--- a/slides/datasets-in-10-minutes-lexglue.pptx
+++ b/slides/datasets-in-10-minutes-lexglue.pptx
@@ -28,9 +28,6 @@
     <p:sldId id="276" r:id="rId26"/>
     <p:sldId id="277" r:id="rId27"/>
     <p:sldId id="278" r:id="rId28"/>
-    <p:sldId id="279" r:id="rId29"/>
-    <p:sldId id="280" r:id="rId30"/>
-    <p:sldId id="281" r:id="rId31"/>
     <p:sldId id="282" r:id="rId32"/>
     <p:sldId id="283" r:id="rId33"/>
     <p:sldId id="284" r:id="rId34"/>
@@ -52,11 +49,6 @@
     <p:sldId id="300" r:id="rId50"/>
     <p:sldId id="301" r:id="rId51"/>
     <p:sldId id="302" r:id="rId52"/>
-    <p:sldId id="303" r:id="rId53"/>
-    <p:sldId id="304" r:id="rId54"/>
-    <p:sldId id="305" r:id="rId55"/>
-    <p:sldId id="306" r:id="rId56"/>
-    <p:sldId id="307" r:id="rId57"/>
     <p:sldId id="308" r:id="rId58"/>
     <p:sldId id="309" r:id="rId59"/>
     <p:sldId id="310" r:id="rId60"/>
@@ -7192,11 +7184,11 @@
         <p:spPr>
           <a:xfrm>
             <a:off x="548640" y="2647277"/>
-            <a:ext cx="8046720" cy="989965"/>
+            <a:ext cx="8046720" cy="1091565"/>
           </a:xfrm>
         </p:spPr>
         <p:txBody>
-          <a:bodyPr lIns="0" rIns="0" tIns="0" bIns="0">
+          <a:bodyPr lIns="0" rIns="0" tIns="0" bIns="101600">
             <a:noAutofit/>
           </a:bodyPr>
           <a:lstStyle/>
@@ -7823,18 +7815,7 @@
                 <a:ea typeface="Noto Sans CJK JP"/>
                 <a:cs typeface="Noto Sans"/>
               </a:rPr>
-              <a:t>[1] coastalcph/lex_glue. 固定revision c23fdff… / 元の裁判・法令・契約の作成者に帰属。 ecthr_a/test/34</a:t>
-            </a:r>
-            <a:r>
-              <a:rPr sz="810" b="0" lang="ja-JP" altLang="en-US">
-                <a:solidFill>
-                  <a:srgbClr val="626669"/>
-                </a:solidFill>
-                <a:latin typeface="Noto Sans"/>
-                <a:ea typeface="Noto Sans CJK JP"/>
-                <a:cs typeface="Noto Sans"/>
-              </a:rPr>
-              <a:t>  </a:t>
+              <a:t>[1] Chalkidis et al. LexGLUE公開データ。</a:t>
             </a:r>
             <a:r>
               <a:rPr sz="810" b="0" lang="ja-JP" altLang="en-US">
@@ -8320,18 +8301,7 @@
                 <a:ea typeface="Noto Sans CJK JP"/>
                 <a:cs typeface="Noto Sans"/>
               </a:rPr>
-              <a:t>[1] coastalcph/lex_glue. 固定revision c23fdff… / 元の裁判・法令・契約の作成者に帰属。 ecthr_a/test/34</a:t>
-            </a:r>
-            <a:r>
-              <a:rPr sz="810" b="0" lang="ja-JP" altLang="en-US">
-                <a:solidFill>
-                  <a:srgbClr val="626669"/>
-                </a:solidFill>
-                <a:latin typeface="Noto Sans"/>
-                <a:ea typeface="Noto Sans CJK JP"/>
-                <a:cs typeface="Noto Sans"/>
-              </a:rPr>
-              <a:t>  </a:t>
+              <a:t>[1] Chalkidis et al. LexGLUE公開データ。</a:t>
             </a:r>
             <a:r>
               <a:rPr sz="810" b="0" lang="ja-JP" altLang="en-US">
@@ -8492,37 +8462,7 @@
                 <a:ea typeface="Noto Sans CJK JP"/>
                 <a:cs typeface="Noto Sans"/>
               </a:rPr>
-              <a:t>どちらも欧州人権条約の10条項に絞った複数ラベル分類。第6条などの条項名と、配布中の0始まりの整数は対応表で区別する。</a:t>
-            </a:r>
-          </a:p>
-          <a:p>
-            <a:pPr marL="457200" indent="-355600">
-              <a:lnSpc>
-                <a:spcPts val="2379"/>
-              </a:lnSpc>
-              <a:spcAft>
-                <a:spcPts val="0"/>
-              </a:spcAft>
-              <a:buSzPct val="66500"/>
-              <a:buFont typeface="Noto Sans CJK JP"/>
-              <a:buChar char="●"/>
-              <a:defRPr sz="2000" b="0">
-                <a:solidFill>
-                  <a:srgbClr val="303437"/>
-                </a:solidFill>
-                <a:latin typeface="Noto Sans"/>
-              </a:defRPr>
-            </a:pPr>
-            <a:r>
-              <a:rPr sz="2000" b="0" lang="ja-JP" altLang="en-US">
-                <a:solidFill>
-                  <a:srgbClr val="303437"/>
-                </a:solidFill>
-                <a:latin typeface="Noto Sans"/>
-                <a:ea typeface="Noto Sans CJK JP"/>
-                <a:cs typeface="Noto Sans"/>
-              </a:rPr>
-              <a:t>Task Bのラベルが付いていても、Task Aで違反が認定されるとは限らない。</a:t>
+              <a:t>どちらも欧州人権条約の10条項を対象とする複数ラベル分類である。条番号と、配布データ中の整数ラベルとの対応は補足に示す。</a:t>
             </a:r>
           </a:p>
         </p:txBody>
@@ -8624,18 +8564,7 @@
                 <a:ea typeface="Noto Sans CJK JP"/>
                 <a:cs typeface="Noto Sans"/>
               </a:rPr>
-              <a:t>[1] Chalkidis et al. (2022). LexGLUE: A Benchmark Dataset for Legal Language Understanding in English. ACL.</a:t>
-            </a:r>
-            <a:r>
-              <a:rPr sz="810" b="0" lang="ja-JP" altLang="en-US">
-                <a:solidFill>
-                  <a:srgbClr val="626669"/>
-                </a:solidFill>
-                <a:latin typeface="Noto Sans"/>
-                <a:ea typeface="Noto Sans CJK JP"/>
-                <a:cs typeface="Noto Sans"/>
-              </a:rPr>
-              <a:t>  </a:t>
+              <a:t>[1] Chalkidis et al. (2022). LexGLUE: A Benchmark Dataset for Legal Language Understanding in English. ACL.  </a:t>
             </a:r>
             <a:r>
               <a:rPr sz="810" b="0" lang="ja-JP" altLang="en-US">
@@ -10054,18 +9983,7 @@
                 <a:ea typeface="Noto Sans CJK JP"/>
                 <a:cs typeface="Noto Sans"/>
               </a:rPr>
-              <a:t>[1] Chalkidis et al. (2022). LexGLUE: A Benchmark Dataset for Legal Language Understanding in English. ACL.</a:t>
-            </a:r>
-            <a:r>
-              <a:rPr sz="810" b="0" lang="ja-JP" altLang="en-US">
-                <a:solidFill>
-                  <a:srgbClr val="626669"/>
-                </a:solidFill>
-                <a:latin typeface="Noto Sans"/>
-                <a:ea typeface="Noto Sans CJK JP"/>
-                <a:cs typeface="Noto Sans"/>
-              </a:rPr>
-              <a:t>  </a:t>
+              <a:t>[1] Chalkidis et al. (2022). LexGLUE: A Benchmark Dataset for Legal Language Understanding in English. ACL.  </a:t>
             </a:r>
             <a:r>
               <a:rPr sz="810" b="0" lang="ja-JP" altLang="en-US">
@@ -10143,7 +10061,7 @@
                 <a:ea typeface="Noto Sans CJK JP"/>
                 <a:cs typeface="Noto Sans"/>
               </a:rPr>
-              <a:t>既存データを、比較しやすい形へ整える</a:t>
+              <a:t>法律データを七つの課題に整える</a:t>
             </a:r>
           </a:p>
         </p:txBody>
@@ -10196,7 +10114,7 @@
                 <a:ea typeface="Noto Sans CJK JP"/>
                 <a:cs typeface="Noto Sans"/>
               </a:rPr>
-              <a:t>公開され、論文で説明された法律データを選び、分割、入力とラベル、評価方法へのアクセスをそろえた。</a:t>
+              <a:t>既存の法律データを整理し、SCOTUSは判決文とSCDBの争点情報を組み合わせて新たに構築した。分割、入力とラベル、評価方法へのアクセスをそろえた。</a:t>
             </a:r>
           </a:p>
           <a:p>
@@ -10256,7 +10174,7 @@
                 <a:ea typeface="Noto Sans CJK JP"/>
                 <a:cs typeface="Noto Sans"/>
               </a:rPr>
-              <a:t>法律の専門性を必要とする課題も対象にし、文書が長い課題も残した。</a:t>
+              <a:t>CaseHOLDでは、米国判例の引用にある判旨を隠して5択を作る。年代情報がないため、ほかの課題のような時系列の分け直しは行わない。</a:t>
             </a:r>
           </a:p>
         </p:txBody>
@@ -10358,18 +10276,7 @@
                 <a:ea typeface="Noto Sans CJK JP"/>
                 <a:cs typeface="Noto Sans"/>
               </a:rPr>
-              <a:t>[1] Chalkidis et al. (2022). LexGLUE: A Benchmark Dataset for Legal Language Understanding in English. ACL.</a:t>
-            </a:r>
-            <a:r>
-              <a:rPr sz="810" b="0" lang="ja-JP" altLang="en-US">
-                <a:solidFill>
-                  <a:srgbClr val="626669"/>
-                </a:solidFill>
-                <a:latin typeface="Noto Sans"/>
-                <a:ea typeface="Noto Sans CJK JP"/>
-                <a:cs typeface="Noto Sans"/>
-              </a:rPr>
-              <a:t>  </a:t>
+              <a:t>[1] Chalkidis et al. (2022). LexGLUE: A Benchmark Dataset for Legal Language Understanding in English. ACL.  </a:t>
             </a:r>
             <a:r>
               <a:rPr sz="810" b="0" lang="ja-JP" altLang="en-US">
@@ -12037,7 +11944,7 @@
                 <a:ea typeface="Noto Sans CJK JP"/>
                 <a:cs typeface="Noto Sans"/>
               </a:rPr>
-              <a:t>固定配布の件数。CaseHOLD testは論文3,900、現配布3,600。</a:t>
+              <a:t>配布の件数。CaseHOLD testは2022年の論文が3,900問、配布が3,600問。SCOTUSも、論文は14分野、配布のラベル名は13種類である。</a:t>
             </a:r>
           </a:p>
         </p:txBody>
@@ -12091,7 +11998,7 @@
                 <a:ea typeface="Noto Sans CJK JP"/>
                 <a:cs typeface="Noto Sans"/>
               </a:rPr>
-              <a:t>[1] coastalcph/lex_glue. 固定revision c23fdff… / 元の裁判・法令・契約の作成者に帰属。</a:t>
+              <a:t>[1] Chalkidis et al. (2022). LexGLUE. </a:t>
             </a:r>
             <a:r>
               <a:rPr sz="810" b="0" lang="ja-JP" altLang="en-US">
@@ -12101,8 +12008,40 @@
                 <a:latin typeface="Noto Sans"/>
                 <a:ea typeface="Noto Sans CJK JP"/>
                 <a:cs typeface="Noto Sans"/>
-              </a:rPr>
-              <a:t>  </a:t>
+                <a:hlinkClick r:id="rId3"/>
+              </a:rPr>
+              <a:t>https://aclanthology.org/2022.acl-long.297/</a:t>
+            </a:r>
+          </a:p>
+          <a:p>
+            <a:pPr algn="l">
+              <a:lnSpc>
+                <a:spcPts val="940"/>
+              </a:lnSpc>
+              <a:spcBef>
+                <a:spcPts val="0"/>
+              </a:spcBef>
+              <a:spcAft>
+                <a:spcPts val="140"/>
+              </a:spcAft>
+              <a:buNone/>
+              <a:defRPr sz="810" b="0">
+                <a:solidFill>
+                  <a:srgbClr val="303437"/>
+                </a:solidFill>
+                <a:latin typeface="Noto Sans"/>
+              </a:defRPr>
+            </a:pPr>
+            <a:r>
+              <a:rPr sz="810" b="0" lang="ja-JP" altLang="en-US">
+                <a:solidFill>
+                  <a:srgbClr val="626669"/>
+                </a:solidFill>
+                <a:latin typeface="Noto Sans"/>
+                <a:ea typeface="Noto Sans CJK JP"/>
+                <a:cs typeface="Noto Sans"/>
+              </a:rPr>
+              <a:t>[2] Chalkidis et al. LexGLUE公開データ。</a:t>
             </a:r>
             <a:r>
               <a:rPr sz="810" b="0" lang="ja-JP" altLang="en-US">
@@ -12293,7 +12232,7 @@
                 <a:ea typeface="Noto Sans CJK JP"/>
                 <a:cs typeface="Noto Sans"/>
               </a:rPr>
-              <a:t>後の時期の文書を予測する条件を保つため、学習とtestを混ぜず、公開された分割で比較する。</a:t>
+              <a:t>後の時期の文書を、以前の文書で学習したモデルが予測する条件で評価できる。</a:t>
             </a:r>
           </a:p>
         </p:txBody>
@@ -12395,18 +12334,7 @@
                 <a:ea typeface="Noto Sans CJK JP"/>
                 <a:cs typeface="Noto Sans"/>
               </a:rPr>
-              <a:t>[1] Chalkidis et al. (2022). LexGLUE: A Benchmark Dataset for Legal Language Understanding in English. ACL.</a:t>
-            </a:r>
-            <a:r>
-              <a:rPr sz="810" b="0" lang="ja-JP" altLang="en-US">
-                <a:solidFill>
-                  <a:srgbClr val="626669"/>
-                </a:solidFill>
-                <a:latin typeface="Noto Sans"/>
-                <a:ea typeface="Noto Sans CJK JP"/>
-                <a:cs typeface="Noto Sans"/>
-              </a:rPr>
-              <a:t>  </a:t>
+              <a:t>[1] Chalkidis et al. (2022). LexGLUE: A Benchmark Dataset for Legal Language Understanding in English. ACL.  </a:t>
             </a:r>
             <a:r>
               <a:rPr sz="810" b="0" lang="ja-JP" altLang="en-US">
@@ -12484,7 +12412,7 @@
                 <a:ea typeface="Noto Sans CJK JP"/>
                 <a:cs typeface="Noto Sans"/>
               </a:rPr>
-              <a:t>採点方法と到達水準</a:t>
+              <a:t>採点方法と2022年の成績</a:t>
             </a:r>
           </a:p>
         </p:txBody>
@@ -12532,7 +12460,7 @@
                 <a:ea typeface="Noto Sans CJK JP"/>
                 <a:cs typeface="Noto Sans"/>
               </a:rPr>
-              <a:t>3. 採点方法と到達水準</a:t>
+              <a:t>3. 採点方法と2022年の成績</a:t>
             </a:r>
           </a:p>
         </p:txBody>
@@ -12651,7 +12579,7 @@
                 <a:ea typeface="Noto Sans CJK JP"/>
                 <a:cs typeface="Noto Sans"/>
               </a:rPr>
-              <a:t>micro-F1は、全クラスの正解・誤りをまとめて計算する。出現が多いラベルの影響を受けやすい。</a:t>
+              <a:t>F1は、予測ラベルの正しさを表す適合率と、正解ラベルをどれだけ拾えたかを表す再現率を合わせた指標。micro-F1は、全ラベルの正解・誤りをまとめて計算する。</a:t>
             </a:r>
           </a:p>
           <a:p>
@@ -12759,7 +12687,7 @@
                 <a:ea typeface="Noto Sans CJK JP"/>
                 <a:cs typeface="Noto Sans"/>
               </a:rPr>
-              <a:t>3. 採点方法と到達水準</a:t>
+              <a:t>3. 採点方法と2022年の成績</a:t>
             </a:r>
           </a:p>
         </p:txBody>
@@ -12813,18 +12741,7 @@
                 <a:ea typeface="Noto Sans CJK JP"/>
                 <a:cs typeface="Noto Sans"/>
               </a:rPr>
-              <a:t>[1] Chalkidis et al. (2022). LexGLUE: A Benchmark Dataset for Legal Language Understanding in English. ACL.</a:t>
-            </a:r>
-            <a:r>
-              <a:rPr sz="810" b="0" lang="ja-JP" altLang="en-US">
-                <a:solidFill>
-                  <a:srgbClr val="626669"/>
-                </a:solidFill>
-                <a:latin typeface="Noto Sans"/>
-                <a:ea typeface="Noto Sans CJK JP"/>
-                <a:cs typeface="Noto Sans"/>
-              </a:rPr>
-              <a:t>  </a:t>
+              <a:t>[1] Chalkidis et al. (2022). LexGLUE: A Benchmark Dataset for Legal Language Understanding in English. ACL.  </a:t>
             </a:r>
             <a:r>
               <a:rPr sz="810" b="0" lang="ja-JP" altLang="en-US">
@@ -13028,18 +12945,7 @@
                 <a:ea typeface="Noto Sans CJK JP"/>
                 <a:cs typeface="Noto Sans"/>
               </a:rPr>
-              <a:t>[1] Chalkidis et al. LexGLUE 公式リポジトリ。</a:t>
-            </a:r>
-            <a:r>
-              <a:rPr sz="810" b="0" lang="ja-JP" altLang="en-US">
-                <a:solidFill>
-                  <a:srgbClr val="626669"/>
-                </a:solidFill>
-                <a:latin typeface="Noto Sans"/>
-                <a:ea typeface="Noto Sans CJK JP"/>
-                <a:cs typeface="Noto Sans"/>
-              </a:rPr>
-              <a:t>  </a:t>
+              <a:t>[1] Chalkidis et al. LexGLUE 公式リポジトリ。  </a:t>
             </a:r>
             <a:r>
               <a:rPr sz="810" b="0" lang="ja-JP" altLang="en-US">
@@ -13170,7 +13076,7 @@
                 <a:ea typeface="Noto Sans CJK JP"/>
                 <a:cs typeface="Noto Sans"/>
               </a:rPr>
-              <a:t>ECtHRとUNFAIR-ToSでは、どのラベルも付かない文書や文がある。すべて0の予測と参照は、通常のラベルだけのF1には正例として数えられない。</a:t>
+              <a:t>ECtHRとUNFAIR-ToSでは、どのラベルも付かない文書や文がある。通常のラベルだけでF1を計算すると、空集合を正しく予測しても正例として数えられない。</a:t>
             </a:r>
           </a:p>
           <a:p>
@@ -13200,7 +13106,7 @@
                 <a:ea typeface="Noto Sans CJK JP"/>
                 <a:cs typeface="Noto Sans"/>
               </a:rPr>
-              <a:t>そこで評価時には「どの種類にも当たらない」という追加ラベルを設け、空集合を正しく予測した場合も数える。学習時の出力クラスを増やす処理とは区別する。</a:t>
+              <a:t>評価時には「どの種類にも当たらない」という追加ラベルを設け、空集合の正しい予測も数える。</a:t>
             </a:r>
           </a:p>
           <a:p>
@@ -13230,7 +13136,7 @@
                 <a:ea typeface="Noto Sans CJK JP"/>
                 <a:cs typeface="Noto Sans"/>
               </a:rPr>
-              <a:t>固定配布のtestでは、UNFAIR-ToSの空集合は1,607文中1,435文、89.30%。</a:t>
+              <a:t>公開testでは、UNFAIR-ToSの空集合は1,607文中1,435文、約89.3%を占める。</a:t>
             </a:r>
           </a:p>
         </p:txBody>
@@ -13278,7 +13184,7 @@
                 <a:ea typeface="Noto Sans CJK JP"/>
                 <a:cs typeface="Noto Sans"/>
               </a:rPr>
-              <a:t>3. 採点方法と到達水準</a:t>
+              <a:t>3. 採点方法と2022年の成績</a:t>
             </a:r>
           </a:p>
         </p:txBody>
@@ -13332,7 +13238,7 @@
                 <a:ea typeface="Noto Sans CJK JP"/>
                 <a:cs typeface="Noto Sans"/>
               </a:rPr>
-              <a:t>[1] Chalkidis et al. (2022). LexGLUE: A Benchmark Dataset for Legal Language Understanding in English. ACL.</a:t>
+              <a:t>[1] Chalkidis et al. (2022). LexGLUE. </a:t>
             </a:r>
             <a:r>
               <a:rPr sz="810" b="0" lang="ja-JP" altLang="en-US">
@@ -13342,9 +13248,30 @@
                 <a:latin typeface="Noto Sans"/>
                 <a:ea typeface="Noto Sans CJK JP"/>
                 <a:cs typeface="Noto Sans"/>
-              </a:rPr>
-              <a:t>  </a:t>
-            </a:r>
+                <a:hlinkClick r:id="rId2"/>
+              </a:rPr>
+              <a:t>https://aclanthology.org/2022.acl-long.297/</a:t>
+            </a:r>
+          </a:p>
+          <a:p>
+            <a:pPr algn="l">
+              <a:lnSpc>
+                <a:spcPts val="940"/>
+              </a:lnSpc>
+              <a:spcBef>
+                <a:spcPts val="0"/>
+              </a:spcBef>
+              <a:spcAft>
+                <a:spcPts val="140"/>
+              </a:spcAft>
+              <a:buNone/>
+              <a:defRPr sz="810" b="0">
+                <a:solidFill>
+                  <a:srgbClr val="303437"/>
+                </a:solidFill>
+                <a:latin typeface="Noto Sans"/>
+              </a:defRPr>
+            </a:pPr>
             <a:r>
               <a:rPr sz="810" b="0" lang="ja-JP" altLang="en-US">
                 <a:solidFill>
@@ -13353,9 +13280,20 @@
                 <a:latin typeface="Noto Sans"/>
                 <a:ea typeface="Noto Sans CJK JP"/>
                 <a:cs typeface="Noto Sans"/>
-                <a:hlinkClick r:id="rId2"/>
-              </a:rPr>
-              <a:t>https://aclanthology.org/2022.acl-long.297/</a:t>
+              </a:rPr>
+              <a:t>[2] Chalkidis et al. LexGLUE公開データ。</a:t>
+            </a:r>
+            <a:r>
+              <a:rPr sz="810" b="0" lang="ja-JP" altLang="en-US">
+                <a:solidFill>
+                  <a:srgbClr val="626669"/>
+                </a:solidFill>
+                <a:latin typeface="Noto Sans"/>
+                <a:ea typeface="Noto Sans CJK JP"/>
+                <a:cs typeface="Noto Sans"/>
+                <a:hlinkClick r:id="rId3"/>
+              </a:rPr>
+              <a:t>https://huggingface.co/datasets/coastalcph/lex_glue</a:t>
             </a:r>
           </a:p>
         </p:txBody>
@@ -13469,7 +13407,7 @@
                 <a:ea typeface="Noto Sans CJK JP"/>
                 <a:cs typeface="Noto Sans"/>
               </a:rPr>
-              <a:t>3. 採点方法と到達水準</a:t>
+              <a:t>3. 採点方法と2022年の成績</a:t>
             </a:r>
           </a:p>
         </p:txBody>
@@ -14800,7 +14738,7 @@
                 <a:ea typeface="Noto Sans CJK JP"/>
                 <a:cs typeface="Noto Sans"/>
               </a:rPr>
-              <a:t>2022年のtest macro-F1（%）。各課題で微調整、5 seedから開発最良を採用。</a:t>
+              <a:t>2022年のtest macro-F1（%）。各課題で微調整し、初期化を変えた5回の実験のうち開発得点が最良の結果を採用。</a:t>
             </a:r>
           </a:p>
         </p:txBody>
@@ -14813,7 +14751,7 @@
         </p:nvSpPr>
         <p:spPr>
           <a:xfrm>
-            <a:off x="502920" y="4700016"/>
+            <a:off x="502920" y="4852416"/>
             <a:ext cx="8183879" cy="530352"/>
           </a:xfrm>
           <a:prstGeom prst="rect">
@@ -14854,18 +14792,7 @@
                 <a:ea typeface="Noto Sans CJK JP"/>
                 <a:cs typeface="Noto Sans"/>
               </a:rPr>
-              <a:t>[1] Chalkidis et al. (2022). LexGLUE: A Benchmark Dataset for Legal Language Understanding in English. ACL.</a:t>
-            </a:r>
-            <a:r>
-              <a:rPr sz="810" b="0" lang="ja-JP" altLang="en-US">
-                <a:solidFill>
-                  <a:srgbClr val="626669"/>
-                </a:solidFill>
-                <a:latin typeface="Noto Sans"/>
-                <a:ea typeface="Noto Sans CJK JP"/>
-                <a:cs typeface="Noto Sans"/>
-              </a:rPr>
-              <a:t>  </a:t>
+              <a:t>[1] Chalkidis et al. (2022). LexGLUE: A Benchmark Dataset for Legal Language Understanding in English. ACL.  </a:t>
             </a:r>
             <a:r>
               <a:rPr sz="810" b="0" lang="ja-JP" altLang="en-US">
@@ -15026,37 +14953,7 @@
                 <a:ea typeface="Noto Sans CJK JP"/>
                 <a:cs typeface="Noto Sans"/>
               </a:rPr>
-              <a:t>LongformerとBigBirdは疎な注意を使い、最大4,096トークンを扱う。モデル名だけでなく、読める範囲も条件の一部となる。</a:t>
-            </a:r>
-          </a:p>
-          <a:p>
-            <a:pPr marL="457200" indent="-355600">
-              <a:lnSpc>
-                <a:spcPts val="2320"/>
-              </a:lnSpc>
-              <a:spcAft>
-                <a:spcPts val="0"/>
-              </a:spcAft>
-              <a:buSzPct val="68205"/>
-              <a:buFont typeface="Noto Sans CJK JP"/>
-              <a:buChar char="●"/>
-              <a:defRPr sz="1950" b="0">
-                <a:solidFill>
-                  <a:srgbClr val="303437"/>
-                </a:solidFill>
-                <a:latin typeface="Noto Sans"/>
-              </a:defRPr>
-            </a:pPr>
-            <a:r>
-              <a:rPr sz="1950" b="0" lang="ja-JP" altLang="en-US">
-                <a:solidFill>
-                  <a:srgbClr val="303437"/>
-                </a:solidFill>
-                <a:latin typeface="Noto Sans"/>
-                <a:ea typeface="Noto Sans CJK JP"/>
-                <a:cs typeface="Noto Sans"/>
-              </a:rPr>
-              <a:t>成績は各課題で微調整し、5 seedのうち開発成績が最良のseedを採用。HELMの少数例提示の成績とは区別する。</a:t>
+              <a:t>LongformerとBigBirdは疎な注意を使い、最大4,096トークンを扱う。長い文書のどこまで読めるかが、方式ごとの評価条件に含まれる。</a:t>
             </a:r>
           </a:p>
         </p:txBody>
@@ -15104,7 +15001,7 @@
                 <a:ea typeface="Noto Sans CJK JP"/>
                 <a:cs typeface="Noto Sans"/>
               </a:rPr>
-              <a:t>3. 採点方法と到達水準</a:t>
+              <a:t>3. 採点方法と2022年の成績</a:t>
             </a:r>
           </a:p>
         </p:txBody>
@@ -15158,18 +15055,7 @@
                 <a:ea typeface="Noto Sans CJK JP"/>
                 <a:cs typeface="Noto Sans"/>
               </a:rPr>
-              <a:t>[1] Chalkidis et al. (2022). LexGLUE: A Benchmark Dataset for Legal Language Understanding in English. ACL.</a:t>
-            </a:r>
-            <a:r>
-              <a:rPr sz="810" b="0" lang="ja-JP" altLang="en-US">
-                <a:solidFill>
-                  <a:srgbClr val="626669"/>
-                </a:solidFill>
-                <a:latin typeface="Noto Sans"/>
-                <a:ea typeface="Noto Sans CJK JP"/>
-                <a:cs typeface="Noto Sans"/>
-              </a:rPr>
-              <a:t>  </a:t>
+              <a:t>[1] Chalkidis et al. (2022). LexGLUE: A Benchmark Dataset for Legal Language Understanding in English. ACL.  </a:t>
             </a:r>
             <a:r>
               <a:rPr sz="810" b="0" lang="ja-JP" altLang="en-US">
@@ -15247,7 +15133,7 @@
                 <a:ea typeface="Noto Sans CJK JP"/>
                 <a:cs typeface="Noto Sans"/>
               </a:rPr>
-              <a:t>HELMでの位置付けと入手方法</a:t>
+              <a:t>公開配布と利用方法</a:t>
             </a:r>
           </a:p>
         </p:txBody>
@@ -15295,1985 +15181,7 @@
                 <a:ea typeface="Noto Sans CJK JP"/>
                 <a:cs typeface="Noto Sans"/>
               </a:rPr>
-              <a:t>4. HELMでの位置付けと入手方法</a:t>
-            </a:r>
-          </a:p>
-        </p:txBody>
-      </p:sp>
-    </p:spTree>
-  </p:cSld>
-  <p:clrMapOvr>
-    <a:masterClrMapping/>
-  </p:clrMapOvr>
-</p:sld>
-</file>
-
-<file path=ppt/slides/slide24.xml><?xml version="1.0" encoding="utf-8"?>
-<p:sld xmlns:a="http://schemas.openxmlformats.org/drawingml/2006/main" xmlns:p="http://schemas.openxmlformats.org/presentationml/2006/main" xmlns:r="http://schemas.openxmlformats.org/officeDocument/2006/relationships">
-  <p:cSld>
-    <p:spTree>
-      <p:nvGrpSpPr>
-        <p:cNvPr id="1" name=""/>
-        <p:cNvGrpSpPr/>
-        <p:nvPr/>
-      </p:nvGrpSpPr>
-      <p:grpSpPr/>
-      <p:sp>
-        <p:nvSpPr>
-          <p:cNvPr id="2" name="Title 1"/>
-          <p:cNvSpPr>
-            <a:spLocks noGrp="1"/>
-          </p:cNvSpPr>
-          <p:nvPr>
-            <p:ph type="title"/>
-          </p:nvPr>
-        </p:nvSpPr>
-        <p:spPr>
-          <a:xfrm>
-            <a:off x="468172" y="650138"/>
-            <a:ext cx="8206740" cy="616305"/>
-          </a:xfrm>
-        </p:spPr>
-        <p:txBody>
-          <a:bodyPr wrap="square" lIns="0" rIns="0" tIns="0" bIns="0">
-            <a:noAutofit/>
-          </a:bodyPr>
-          <a:lstStyle/>
-          <a:p>
-            <a:pPr algn="l">
-              <a:lnSpc>
-                <a:spcPct val="110000"/>
-              </a:lnSpc>
-              <a:buNone/>
-              <a:defRPr sz="2800" b="0">
-                <a:solidFill>
-                  <a:srgbClr val="303437"/>
-                </a:solidFill>
-                <a:latin typeface="Noto Sans"/>
-              </a:defRPr>
-            </a:pPr>
-            <a:r>
-              <a:rPr sz="2800" b="1" lang="ja-JP" altLang="en-US">
-                <a:solidFill>
-                  <a:srgbClr val="303437"/>
-                </a:solidFill>
-                <a:latin typeface="Noto Sans"/>
-                <a:ea typeface="Noto Sans CJK JP"/>
-                <a:cs typeface="Noto Sans"/>
-              </a:rPr>
-              <a:t>HELMには実装があり、固定版の公開runはない</a:t>
-            </a:r>
-          </a:p>
-        </p:txBody>
-      </p:sp>
-      <p:sp>
-        <p:nvSpPr>
-          <p:cNvPr id="3" name="Text Placeholder 2"/>
-          <p:cNvSpPr>
-            <a:spLocks noGrp="1"/>
-          </p:cNvSpPr>
-          <p:nvPr>
-            <p:ph type="body" idx="1"/>
-          </p:nvPr>
-        </p:nvSpPr>
-        <p:spPr>
-          <a:xfrm>
-            <a:off x="594360" y="1463040"/>
-            <a:ext cx="7955279" cy="3044952"/>
-          </a:xfrm>
-        </p:spPr>
-        <p:txBody>
-          <a:bodyPr wrap="square" tIns="91440" bIns="91440">
-            <a:noAutofit/>
-          </a:bodyPr>
-          <a:lstStyle/>
-          <a:p>
-            <a:pPr marL="457200" indent="-355600">
-              <a:lnSpc>
-                <a:spcPts val="2379"/>
-              </a:lnSpc>
-              <a:spcAft>
-                <a:spcPts val="700"/>
-              </a:spcAft>
-              <a:buSzPct val="66500"/>
-              <a:buFont typeface="Noto Sans CJK JP"/>
-              <a:buChar char="●"/>
-              <a:defRPr sz="2000" b="0">
-                <a:solidFill>
-                  <a:srgbClr val="303437"/>
-                </a:solidFill>
-                <a:latin typeface="Noto Sans"/>
-              </a:defRPr>
-            </a:pPr>
-            <a:r>
-              <a:rPr sz="2000" b="0" lang="ja-JP" altLang="en-US">
-                <a:solidFill>
-                  <a:srgbClr val="303437"/>
-                </a:solidFill>
-                <a:latin typeface="Noto Sans"/>
-                <a:ea typeface="Noto Sans CJK JP"/>
-                <a:cs typeface="Noto Sans"/>
-              </a:rPr>
-              <a:t>HELM Classic v0.4.0のschemaにはLexGLUE群があり、7つのsubsetを読み込む実装もある。</a:t>
-            </a:r>
-          </a:p>
-          <a:p>
-            <a:pPr marL="457200" indent="-355600">
-              <a:lnSpc>
-                <a:spcPts val="2379"/>
-              </a:lnSpc>
-              <a:spcAft>
-                <a:spcPts val="700"/>
-              </a:spcAft>
-              <a:buSzPct val="66500"/>
-              <a:buFont typeface="Noto Sans CJK JP"/>
-              <a:buChar char="●"/>
-              <a:defRPr sz="2000" b="0">
-                <a:solidFill>
-                  <a:srgbClr val="303437"/>
-                </a:solidFill>
-                <a:latin typeface="Noto Sans"/>
-              </a:defRPr>
-            </a:pPr>
-            <a:r>
-              <a:rPr sz="2000" b="0" lang="ja-JP" altLang="en-US">
-                <a:solidFill>
-                  <a:srgbClr val="303437"/>
-                </a:solidFill>
-                <a:latin typeface="Noto Sans"/>
-                <a:ea typeface="Noto Sans CJK JP"/>
-                <a:cs typeface="Noto Sans"/>
-              </a:rPr>
-              <a:t>一方、固定releaseの全run_specsを名前とscenarioクラスで調べると、LexGLUEに対応する公開runは0件だった。</a:t>
-            </a:r>
-          </a:p>
-          <a:p>
-            <a:pPr marL="457200" indent="-355600">
-              <a:lnSpc>
-                <a:spcPts val="2379"/>
-              </a:lnSpc>
-              <a:spcAft>
-                <a:spcPts val="0"/>
-              </a:spcAft>
-              <a:buSzPct val="66500"/>
-              <a:buFont typeface="Noto Sans CJK JP"/>
-              <a:buChar char="●"/>
-              <a:defRPr sz="2000" b="0">
-                <a:solidFill>
-                  <a:srgbClr val="303437"/>
-                </a:solidFill>
-                <a:latin typeface="Noto Sans"/>
-              </a:defRPr>
-            </a:pPr>
-            <a:r>
-              <a:rPr sz="2000" b="0" lang="ja-JP" altLang="en-US">
-                <a:solidFill>
-                  <a:srgbClr val="303437"/>
-                </a:solidFill>
-                <a:latin typeface="Noto Sans"/>
-                <a:ea typeface="Noto Sans CJK JP"/>
-                <a:cs typeface="Noto Sans"/>
-              </a:rPr>
-              <a:t>このため、ここではHELMの得点やモデル順位を示さず、公開されている入力・参照・生成設定の設計を説明する。</a:t>
-            </a:r>
-          </a:p>
-        </p:txBody>
-      </p:sp>
-      <p:sp>
-        <p:nvSpPr>
-          <p:cNvPr id="4" name="Title 3"/>
-          <p:cNvSpPr>
-            <a:spLocks noGrp="1"/>
-          </p:cNvSpPr>
-          <p:nvPr>
-            <p:ph type="title" idx="2"/>
-          </p:nvPr>
-        </p:nvSpPr>
-        <p:spPr>
-          <a:xfrm>
-            <a:off x="75895" y="0"/>
-            <a:ext cx="8115300" cy="480060"/>
-          </a:xfrm>
-        </p:spPr>
-        <p:txBody>
-          <a:bodyPr wrap="square" lIns="0" rIns="0" tIns="0" bIns="0" anchor="ctr">
-            <a:noAutofit/>
-          </a:bodyPr>
-          <a:lstStyle/>
-          <a:p>
-            <a:pPr algn="l">
-              <a:lnSpc>
-                <a:spcPct val="110000"/>
-              </a:lnSpc>
-              <a:buNone/>
-              <a:defRPr sz="1400" b="0">
-                <a:solidFill>
-                  <a:srgbClr val="303437"/>
-                </a:solidFill>
-                <a:latin typeface="Noto Sans"/>
-              </a:defRPr>
-            </a:pPr>
-            <a:r>
-              <a:rPr sz="1400" b="1" lang="ja-JP" altLang="en-US">
-                <a:solidFill>
-                  <a:srgbClr val="FFFEF8"/>
-                </a:solidFill>
-                <a:latin typeface="Noto Sans"/>
-                <a:ea typeface="Noto Sans CJK JP"/>
-                <a:cs typeface="Noto Sans"/>
-              </a:rPr>
-              <a:t>4. HELMでの位置付けと入手方法</a:t>
-            </a:r>
-          </a:p>
-        </p:txBody>
-      </p:sp>
-      <p:sp>
-        <p:nvSpPr>
-          <p:cNvPr id="5" name="sources"/>
-          <p:cNvSpPr txBox="1"/>
-          <p:nvPr/>
-        </p:nvSpPr>
-        <p:spPr>
-          <a:xfrm>
-            <a:off x="502920" y="4700016"/>
-            <a:ext cx="8183879" cy="530352"/>
-          </a:xfrm>
-          <a:prstGeom prst="rect">
-            <a:avLst/>
-          </a:prstGeom>
-          <a:noFill/>
-        </p:spPr>
-        <p:txBody>
-          <a:bodyPr wrap="square" lIns="0" rIns="0" tIns="0" bIns="0">
-            <a:noAutofit/>
-          </a:bodyPr>
-          <a:lstStyle/>
-          <a:p>
-            <a:pPr algn="l">
-              <a:lnSpc>
-                <a:spcPts val="940"/>
-              </a:lnSpc>
-              <a:spcBef>
-                <a:spcPts val="0"/>
-              </a:spcBef>
-              <a:spcAft>
-                <a:spcPts val="140"/>
-              </a:spcAft>
-              <a:buNone/>
-              <a:defRPr sz="810" b="0">
-                <a:solidFill>
-                  <a:srgbClr val="303437"/>
-                </a:solidFill>
-                <a:latin typeface="Noto Sans"/>
-              </a:defRPr>
-            </a:pPr>
-            <a:r>
-              <a:rPr sz="810" b="0" lang="ja-JP" altLang="en-US">
-                <a:solidFill>
-                  <a:srgbClr val="626669"/>
-                </a:solidFill>
-                <a:latin typeface="Noto Sans"/>
-                <a:ea typeface="Noto Sans CJK JP"/>
-                <a:cs typeface="Noto Sans"/>
-              </a:rPr>
-              <a:t>[1] Stanford CRFM. HELM Classic v0.4.0, LexGLUE群。</a:t>
-            </a:r>
-            <a:r>
-              <a:rPr sz="810" b="0" lang="ja-JP" altLang="en-US">
-                <a:solidFill>
-                  <a:srgbClr val="626669"/>
-                </a:solidFill>
-                <a:latin typeface="Noto Sans"/>
-                <a:ea typeface="Noto Sans CJK JP"/>
-                <a:cs typeface="Noto Sans"/>
-              </a:rPr>
-              <a:t>  </a:t>
-            </a:r>
-            <a:r>
-              <a:rPr sz="810" b="0" lang="ja-JP" altLang="en-US">
-                <a:solidFill>
-                  <a:srgbClr val="626669"/>
-                </a:solidFill>
-                <a:latin typeface="Noto Sans"/>
-                <a:ea typeface="Noto Sans CJK JP"/>
-                <a:cs typeface="Noto Sans"/>
-                <a:hlinkClick r:id="rId2"/>
-              </a:rPr>
-              <a:t>https://crfm.stanford.edu/helm/classic/v0.4.0/#/groups/lex_glue</a:t>
-            </a:r>
-          </a:p>
-        </p:txBody>
-      </p:sp>
-    </p:spTree>
-  </p:cSld>
-  <p:clrMapOvr>
-    <a:masterClrMapping/>
-  </p:clrMapOvr>
-</p:sld>
-</file>
-
-<file path=ppt/slides/slide25.xml><?xml version="1.0" encoding="utf-8"?>
-<p:sld xmlns:a="http://schemas.openxmlformats.org/drawingml/2006/main" xmlns:p="http://schemas.openxmlformats.org/presentationml/2006/main" xmlns:r="http://schemas.openxmlformats.org/officeDocument/2006/relationships">
-  <p:cSld>
-    <p:spTree>
-      <p:nvGrpSpPr>
-        <p:cNvPr id="1" name=""/>
-        <p:cNvGrpSpPr/>
-        <p:nvPr/>
-      </p:nvGrpSpPr>
-      <p:grpSpPr/>
-      <p:sp>
-        <p:nvSpPr>
-          <p:cNvPr id="2" name="Title 1"/>
-          <p:cNvSpPr>
-            <a:spLocks noGrp="1"/>
-          </p:cNvSpPr>
-          <p:nvPr>
-            <p:ph type="title"/>
-          </p:nvPr>
-        </p:nvSpPr>
-        <p:spPr>
-          <a:xfrm>
-            <a:off x="468172" y="650138"/>
-            <a:ext cx="8206740" cy="616305"/>
-          </a:xfrm>
-        </p:spPr>
-        <p:txBody>
-          <a:bodyPr wrap="square" lIns="0" rIns="0" tIns="0" bIns="0">
-            <a:noAutofit/>
-          </a:bodyPr>
-          <a:lstStyle/>
-          <a:p>
-            <a:pPr algn="l">
-              <a:lnSpc>
-                <a:spcPct val="110000"/>
-              </a:lnSpc>
-              <a:buNone/>
-              <a:defRPr sz="2800" b="0">
-                <a:solidFill>
-                  <a:srgbClr val="303437"/>
-                </a:solidFill>
-                <a:latin typeface="Noto Sans"/>
-              </a:defRPr>
-            </a:pPr>
-            <a:r>
-              <a:rPr sz="2800" b="1" lang="ja-JP" altLang="en-US">
-                <a:solidFill>
-                  <a:srgbClr val="303437"/>
-                </a:solidFill>
-                <a:latin typeface="Noto Sans"/>
-                <a:ea typeface="Noto Sans CJK JP"/>
-                <a:cs typeface="Noto Sans"/>
-              </a:rPr>
-              <a:t>実装上の提示上限と出力上限</a:t>
-            </a:r>
-          </a:p>
-        </p:txBody>
-      </p:sp>
-      <p:sp>
-        <p:nvSpPr>
-          <p:cNvPr id="3" name="Title 2"/>
-          <p:cNvSpPr>
-            <a:spLocks noGrp="1"/>
-          </p:cNvSpPr>
-          <p:nvPr>
-            <p:ph type="title" idx="2"/>
-          </p:nvPr>
-        </p:nvSpPr>
-        <p:spPr>
-          <a:xfrm>
-            <a:off x="75895" y="0"/>
-            <a:ext cx="8115300" cy="480060"/>
-          </a:xfrm>
-        </p:spPr>
-        <p:txBody>
-          <a:bodyPr wrap="square" lIns="0" rIns="0" tIns="0" bIns="0" anchor="ctr">
-            <a:noAutofit/>
-          </a:bodyPr>
-          <a:lstStyle/>
-          <a:p>
-            <a:pPr algn="l">
-              <a:lnSpc>
-                <a:spcPct val="110000"/>
-              </a:lnSpc>
-              <a:buNone/>
-              <a:defRPr sz="1400" b="0">
-                <a:solidFill>
-                  <a:srgbClr val="303437"/>
-                </a:solidFill>
-                <a:latin typeface="Noto Sans"/>
-              </a:defRPr>
-            </a:pPr>
-            <a:r>
-              <a:rPr sz="1400" b="1" lang="ja-JP" altLang="en-US">
-                <a:solidFill>
-                  <a:srgbClr val="FFFEF8"/>
-                </a:solidFill>
-                <a:latin typeface="Noto Sans"/>
-                <a:ea typeface="Noto Sans CJK JP"/>
-                <a:cs typeface="Noto Sans"/>
-              </a:rPr>
-              <a:t>4. HELMでの位置付けと入手方法</a:t>
-            </a:r>
-          </a:p>
-        </p:txBody>
-      </p:sp>
-      <p:graphicFrame>
-        <p:nvGraphicFramePr>
-          <p:cNvPr id="4" name="Table 3"/>
-          <p:cNvGraphicFramePr>
-            <a:graphicFrameLocks noGrp="1"/>
-          </p:cNvGraphicFramePr>
-          <p:nvPr/>
-        </p:nvGraphicFramePr>
-        <p:xfrm>
-          <a:off x="548640" y="1508760"/>
-          <a:ext cx="8046720" cy="2640330"/>
-        </p:xfrm>
-        <a:graphic>
-          <a:graphicData uri="http://schemas.openxmlformats.org/drawingml/2006/table">
-            <a:tbl>
-              <a:tblPr firstRow="0" bandRow="0"/>
-              <a:tblGrid>
-                <a:gridCol w="3108960"/>
-                <a:gridCol w="2468880"/>
-                <a:gridCol w="2468880"/>
-              </a:tblGrid>
-              <a:tr h="377190">
-                <a:tc>
-                  <a:txBody>
-                    <a:bodyPr wrap="square">
-                      <a:noAutofit/>
-                    </a:bodyPr>
-                    <a:lstStyle/>
-                    <a:p>
-                      <a:pPr algn="l">
-                        <a:lnSpc>
-                          <a:spcPts val="2070"/>
-                        </a:lnSpc>
-                        <a:buNone/>
-                        <a:defRPr sz="1800" b="0">
-                          <a:solidFill>
-                            <a:srgbClr val="303437"/>
-                          </a:solidFill>
-                          <a:latin typeface="Noto Sans"/>
-                        </a:defRPr>
-                      </a:pPr>
-                      <a:r>
-                        <a:rPr sz="1800" b="0" lang="ja-JP" altLang="en-US">
-                          <a:solidFill>
-                            <a:srgbClr val="303437"/>
-                          </a:solidFill>
-                          <a:latin typeface="Noto Sans"/>
-                          <a:ea typeface="Noto Sans CJK JP"/>
-                          <a:cs typeface="Noto Sans"/>
-                        </a:rPr>
-                        <a:t>subset</a:t>
-                      </a:r>
-                    </a:p>
-                  </a:txBody>
-                  <a:tcPr marL="63500" marR="63500" marT="38100" marB="38100" anchor="ctr">
-                    <a:lnL w="7620">
-                      <a:noFill/>
-                    </a:lnL>
-                    <a:lnR w="7620">
-                      <a:noFill/>
-                    </a:lnR>
-                    <a:lnT w="15240">
-                      <a:solidFill>
-                        <a:srgbClr val="626669"/>
-                      </a:solidFill>
-                      <a:prstDash val="solid"/>
-                    </a:lnT>
-                    <a:lnB w="7620">
-                      <a:solidFill>
-                        <a:srgbClr val="626669"/>
-                      </a:solidFill>
-                      <a:prstDash val="solid"/>
-                    </a:lnB>
-                    <a:solidFill>
-                      <a:srgbClr val="FFFEF8"/>
-                    </a:solidFill>
-                  </a:tcPr>
-                </a:tc>
-                <a:tc>
-                  <a:txBody>
-                    <a:bodyPr wrap="square">
-                      <a:noAutofit/>
-                    </a:bodyPr>
-                    <a:lstStyle/>
-                    <a:p>
-                      <a:pPr algn="r">
-                        <a:lnSpc>
-                          <a:spcPts val="2070"/>
-                        </a:lnSpc>
-                        <a:buNone/>
-                        <a:defRPr sz="1800" b="0">
-                          <a:solidFill>
-                            <a:srgbClr val="303437"/>
-                          </a:solidFill>
-                          <a:latin typeface="Noto Sans"/>
-                        </a:defRPr>
-                      </a:pPr>
-                      <a:r>
-                        <a:rPr sz="1800" b="0" lang="ja-JP" altLang="en-US">
-                          <a:solidFill>
-                            <a:srgbClr val="303437"/>
-                          </a:solidFill>
-                          <a:latin typeface="Noto Sans"/>
-                          <a:ea typeface="Noto Sans CJK JP"/>
-                          <a:cs typeface="Noto Sans"/>
-                        </a:rPr>
-                        <a:t>提示例の上限</a:t>
-                      </a:r>
-                    </a:p>
-                  </a:txBody>
-                  <a:tcPr marL="63500" marR="63500" marT="38100" marB="38100" anchor="ctr">
-                    <a:lnL w="7620">
-                      <a:noFill/>
-                    </a:lnL>
-                    <a:lnR w="7620">
-                      <a:noFill/>
-                    </a:lnR>
-                    <a:lnT w="15240">
-                      <a:solidFill>
-                        <a:srgbClr val="626669"/>
-                      </a:solidFill>
-                      <a:prstDash val="solid"/>
-                    </a:lnT>
-                    <a:lnB w="7620">
-                      <a:solidFill>
-                        <a:srgbClr val="626669"/>
-                      </a:solidFill>
-                      <a:prstDash val="solid"/>
-                    </a:lnB>
-                    <a:solidFill>
-                      <a:srgbClr val="FFFEF8"/>
-                    </a:solidFill>
-                  </a:tcPr>
-                </a:tc>
-                <a:tc>
-                  <a:txBody>
-                    <a:bodyPr wrap="square">
-                      <a:noAutofit/>
-                    </a:bodyPr>
-                    <a:lstStyle/>
-                    <a:p>
-                      <a:pPr algn="r">
-                        <a:lnSpc>
-                          <a:spcPts val="2070"/>
-                        </a:lnSpc>
-                        <a:buNone/>
-                        <a:defRPr sz="1800" b="0">
-                          <a:solidFill>
-                            <a:srgbClr val="303437"/>
-                          </a:solidFill>
-                          <a:latin typeface="Noto Sans"/>
-                        </a:defRPr>
-                      </a:pPr>
-                      <a:r>
-                        <a:rPr sz="1800" b="0" lang="ja-JP" altLang="en-US">
-                          <a:solidFill>
-                            <a:srgbClr val="303437"/>
-                          </a:solidFill>
-                          <a:latin typeface="Noto Sans"/>
-                          <a:ea typeface="Noto Sans CJK JP"/>
-                          <a:cs typeface="Noto Sans"/>
-                        </a:rPr>
-                        <a:t>最大出力トークン</a:t>
-                      </a:r>
-                    </a:p>
-                  </a:txBody>
-                  <a:tcPr marL="63500" marR="63500" marT="38100" marB="38100" anchor="ctr">
-                    <a:lnL w="7620">
-                      <a:noFill/>
-                    </a:lnL>
-                    <a:lnR w="7620">
-                      <a:noFill/>
-                    </a:lnR>
-                    <a:lnT w="15240">
-                      <a:solidFill>
-                        <a:srgbClr val="626669"/>
-                      </a:solidFill>
-                      <a:prstDash val="solid"/>
-                    </a:lnT>
-                    <a:lnB w="7620">
-                      <a:solidFill>
-                        <a:srgbClr val="626669"/>
-                      </a:solidFill>
-                      <a:prstDash val="solid"/>
-                    </a:lnB>
-                    <a:solidFill>
-                      <a:srgbClr val="FFFEF8"/>
-                    </a:solidFill>
-                  </a:tcPr>
-                </a:tc>
-              </a:tr>
-              <a:tr h="377190">
-                <a:tc>
-                  <a:txBody>
-                    <a:bodyPr wrap="square">
-                      <a:noAutofit/>
-                    </a:bodyPr>
-                    <a:lstStyle/>
-                    <a:p>
-                      <a:pPr algn="l">
-                        <a:lnSpc>
-                          <a:spcPts val="2070"/>
-                        </a:lnSpc>
-                        <a:buNone/>
-                        <a:defRPr sz="1800" b="0">
-                          <a:solidFill>
-                            <a:srgbClr val="303437"/>
-                          </a:solidFill>
-                          <a:latin typeface="Noto Sans"/>
-                        </a:defRPr>
-                      </a:pPr>
-                      <a:r>
-                        <a:rPr sz="1800" b="0" lang="ja-JP" altLang="en-US">
-                          <a:solidFill>
-                            <a:srgbClr val="303437"/>
-                          </a:solidFill>
-                          <a:latin typeface="Noto Sans"/>
-                          <a:ea typeface="Noto Sans CJK JP"/>
-                          <a:cs typeface="Noto Sans"/>
-                        </a:rPr>
-                        <a:t>ECtHR A / B</a:t>
-                      </a:r>
-                    </a:p>
-                  </a:txBody>
-                  <a:tcPr marL="63500" marR="63500" marT="38100" marB="38100" anchor="ctr">
-                    <a:lnL w="7620">
-                      <a:noFill/>
-                    </a:lnL>
-                    <a:lnR w="7620">
-                      <a:noFill/>
-                    </a:lnR>
-                    <a:lnT w="7620">
-                      <a:solidFill>
-                        <a:srgbClr val="626669"/>
-                      </a:solidFill>
-                      <a:prstDash val="solid"/>
-                    </a:lnT>
-                    <a:lnB w="7620">
-                      <a:noFill/>
-                    </a:lnB>
-                    <a:solidFill>
-                      <a:srgbClr val="FFFEF8"/>
-                    </a:solidFill>
-                  </a:tcPr>
-                </a:tc>
-                <a:tc>
-                  <a:txBody>
-                    <a:bodyPr wrap="square">
-                      <a:noAutofit/>
-                    </a:bodyPr>
-                    <a:lstStyle/>
-                    <a:p>
-                      <a:pPr algn="r">
-                        <a:lnSpc>
-                          <a:spcPts val="2070"/>
-                        </a:lnSpc>
-                        <a:buNone/>
-                        <a:defRPr sz="1800" b="0">
-                          <a:solidFill>
-                            <a:srgbClr val="303437"/>
-                          </a:solidFill>
-                          <a:latin typeface="Noto Sans"/>
-                        </a:defRPr>
-                      </a:pPr>
-                      <a:r>
-                        <a:rPr sz="1800" b="0" lang="ja-JP" altLang="en-US">
-                          <a:solidFill>
-                            <a:srgbClr val="303437"/>
-                          </a:solidFill>
-                          <a:latin typeface="Noto Sans"/>
-                          <a:ea typeface="Noto Sans CJK JP"/>
-                          <a:cs typeface="Noto Sans"/>
-                        </a:rPr>
-                        <a:t>1</a:t>
-                      </a:r>
-                    </a:p>
-                  </a:txBody>
-                  <a:tcPr marL="63500" marR="63500" marT="38100" marB="38100" anchor="ctr">
-                    <a:lnL w="7620">
-                      <a:noFill/>
-                    </a:lnL>
-                    <a:lnR w="7620">
-                      <a:noFill/>
-                    </a:lnR>
-                    <a:lnT w="7620">
-                      <a:solidFill>
-                        <a:srgbClr val="626669"/>
-                      </a:solidFill>
-                      <a:prstDash val="solid"/>
-                    </a:lnT>
-                    <a:lnB w="7620">
-                      <a:noFill/>
-                    </a:lnB>
-                    <a:solidFill>
-                      <a:srgbClr val="FFFEF8"/>
-                    </a:solidFill>
-                  </a:tcPr>
-                </a:tc>
-                <a:tc>
-                  <a:txBody>
-                    <a:bodyPr wrap="square">
-                      <a:noAutofit/>
-                    </a:bodyPr>
-                    <a:lstStyle/>
-                    <a:p>
-                      <a:pPr algn="r">
-                        <a:lnSpc>
-                          <a:spcPts val="2070"/>
-                        </a:lnSpc>
-                        <a:buNone/>
-                        <a:defRPr sz="1800" b="0">
-                          <a:solidFill>
-                            <a:srgbClr val="303437"/>
-                          </a:solidFill>
-                          <a:latin typeface="Noto Sans"/>
-                        </a:defRPr>
-                      </a:pPr>
-                      <a:r>
-                        <a:rPr sz="1800" b="0" lang="ja-JP" altLang="en-US">
-                          <a:solidFill>
-                            <a:srgbClr val="303437"/>
-                          </a:solidFill>
-                          <a:latin typeface="Noto Sans"/>
-                          <a:ea typeface="Noto Sans CJK JP"/>
-                          <a:cs typeface="Noto Sans"/>
-                        </a:rPr>
-                        <a:t>20</a:t>
-                      </a:r>
-                    </a:p>
-                  </a:txBody>
-                  <a:tcPr marL="63500" marR="63500" marT="38100" marB="38100" anchor="ctr">
-                    <a:lnL w="7620">
-                      <a:noFill/>
-                    </a:lnL>
-                    <a:lnR w="7620">
-                      <a:noFill/>
-                    </a:lnR>
-                    <a:lnT w="7620">
-                      <a:solidFill>
-                        <a:srgbClr val="626669"/>
-                      </a:solidFill>
-                      <a:prstDash val="solid"/>
-                    </a:lnT>
-                    <a:lnB w="7620">
-                      <a:noFill/>
-                    </a:lnB>
-                    <a:solidFill>
-                      <a:srgbClr val="FFFEF8"/>
-                    </a:solidFill>
-                  </a:tcPr>
-                </a:tc>
-              </a:tr>
-              <a:tr h="377190">
-                <a:tc>
-                  <a:txBody>
-                    <a:bodyPr wrap="square">
-                      <a:noAutofit/>
-                    </a:bodyPr>
-                    <a:lstStyle/>
-                    <a:p>
-                      <a:pPr algn="l">
-                        <a:lnSpc>
-                          <a:spcPts val="2070"/>
-                        </a:lnSpc>
-                        <a:buNone/>
-                        <a:defRPr sz="1800" b="0">
-                          <a:solidFill>
-                            <a:srgbClr val="303437"/>
-                          </a:solidFill>
-                          <a:latin typeface="Noto Sans"/>
-                        </a:defRPr>
-                      </a:pPr>
-                      <a:r>
-                        <a:rPr sz="1800" b="0" lang="ja-JP" altLang="en-US">
-                          <a:solidFill>
-                            <a:srgbClr val="303437"/>
-                          </a:solidFill>
-                          <a:latin typeface="Noto Sans"/>
-                          <a:ea typeface="Noto Sans CJK JP"/>
-                          <a:cs typeface="Noto Sans"/>
-                        </a:rPr>
-                        <a:t>SCOTUS</a:t>
-                      </a:r>
-                    </a:p>
-                  </a:txBody>
-                  <a:tcPr marL="63500" marR="63500" marT="38100" marB="38100" anchor="ctr">
-                    <a:lnL w="7620">
-                      <a:noFill/>
-                    </a:lnL>
-                    <a:lnR w="7620">
-                      <a:noFill/>
-                    </a:lnR>
-                    <a:lnT w="7620">
-                      <a:noFill/>
-                    </a:lnT>
-                    <a:lnB w="7620">
-                      <a:noFill/>
-                    </a:lnB>
-                    <a:solidFill>
-                      <a:srgbClr val="FFFEF8"/>
-                    </a:solidFill>
-                  </a:tcPr>
-                </a:tc>
-                <a:tc>
-                  <a:txBody>
-                    <a:bodyPr wrap="square">
-                      <a:noAutofit/>
-                    </a:bodyPr>
-                    <a:lstStyle/>
-                    <a:p>
-                      <a:pPr algn="r">
-                        <a:lnSpc>
-                          <a:spcPts val="2070"/>
-                        </a:lnSpc>
-                        <a:buNone/>
-                        <a:defRPr sz="1800" b="0">
-                          <a:solidFill>
-                            <a:srgbClr val="303437"/>
-                          </a:solidFill>
-                          <a:latin typeface="Noto Sans"/>
-                        </a:defRPr>
-                      </a:pPr>
-                      <a:r>
-                        <a:rPr sz="1800" b="0" lang="ja-JP" altLang="en-US">
-                          <a:solidFill>
-                            <a:srgbClr val="303437"/>
-                          </a:solidFill>
-                          <a:latin typeface="Noto Sans"/>
-                          <a:ea typeface="Noto Sans CJK JP"/>
-                          <a:cs typeface="Noto Sans"/>
-                        </a:rPr>
-                        <a:t>1</a:t>
-                      </a:r>
-                    </a:p>
-                  </a:txBody>
-                  <a:tcPr marL="63500" marR="63500" marT="38100" marB="38100" anchor="ctr">
-                    <a:lnL w="7620">
-                      <a:noFill/>
-                    </a:lnL>
-                    <a:lnR w="7620">
-                      <a:noFill/>
-                    </a:lnR>
-                    <a:lnT w="7620">
-                      <a:noFill/>
-                    </a:lnT>
-                    <a:lnB w="7620">
-                      <a:noFill/>
-                    </a:lnB>
-                    <a:solidFill>
-                      <a:srgbClr val="FFFEF8"/>
-                    </a:solidFill>
-                  </a:tcPr>
-                </a:tc>
-                <a:tc>
-                  <a:txBody>
-                    <a:bodyPr wrap="square">
-                      <a:noAutofit/>
-                    </a:bodyPr>
-                    <a:lstStyle/>
-                    <a:p>
-                      <a:pPr algn="r">
-                        <a:lnSpc>
-                          <a:spcPts val="2070"/>
-                        </a:lnSpc>
-                        <a:buNone/>
-                        <a:defRPr sz="1800" b="0">
-                          <a:solidFill>
-                            <a:srgbClr val="303437"/>
-                          </a:solidFill>
-                          <a:latin typeface="Noto Sans"/>
-                        </a:defRPr>
-                      </a:pPr>
-                      <a:r>
-                        <a:rPr sz="1800" b="0" lang="ja-JP" altLang="en-US">
-                          <a:solidFill>
-                            <a:srgbClr val="303437"/>
-                          </a:solidFill>
-                          <a:latin typeface="Noto Sans"/>
-                          <a:ea typeface="Noto Sans CJK JP"/>
-                          <a:cs typeface="Noto Sans"/>
-                        </a:rPr>
-                        <a:t>5</a:t>
-                      </a:r>
-                    </a:p>
-                  </a:txBody>
-                  <a:tcPr marL="63500" marR="63500" marT="38100" marB="38100" anchor="ctr">
-                    <a:lnL w="7620">
-                      <a:noFill/>
-                    </a:lnL>
-                    <a:lnR w="7620">
-                      <a:noFill/>
-                    </a:lnR>
-                    <a:lnT w="7620">
-                      <a:noFill/>
-                    </a:lnT>
-                    <a:lnB w="7620">
-                      <a:noFill/>
-                    </a:lnB>
-                    <a:solidFill>
-                      <a:srgbClr val="FFFEF8"/>
-                    </a:solidFill>
-                  </a:tcPr>
-                </a:tc>
-              </a:tr>
-              <a:tr h="377190">
-                <a:tc>
-                  <a:txBody>
-                    <a:bodyPr wrap="square">
-                      <a:noAutofit/>
-                    </a:bodyPr>
-                    <a:lstStyle/>
-                    <a:p>
-                      <a:pPr algn="l">
-                        <a:lnSpc>
-                          <a:spcPts val="2070"/>
-                        </a:lnSpc>
-                        <a:buNone/>
-                        <a:defRPr sz="1800" b="0">
-                          <a:solidFill>
-                            <a:srgbClr val="303437"/>
-                          </a:solidFill>
-                          <a:latin typeface="Noto Sans"/>
-                        </a:defRPr>
-                      </a:pPr>
-                      <a:r>
-                        <a:rPr sz="1800" b="0" lang="ja-JP" altLang="en-US">
-                          <a:solidFill>
-                            <a:srgbClr val="303437"/>
-                          </a:solidFill>
-                          <a:latin typeface="Noto Sans"/>
-                          <a:ea typeface="Noto Sans CJK JP"/>
-                          <a:cs typeface="Noto Sans"/>
-                        </a:rPr>
-                        <a:t>EUR-LEX</a:t>
-                      </a:r>
-                    </a:p>
-                  </a:txBody>
-                  <a:tcPr marL="63500" marR="63500" marT="38100" marB="38100" anchor="ctr">
-                    <a:lnL w="7620">
-                      <a:noFill/>
-                    </a:lnL>
-                    <a:lnR w="7620">
-                      <a:noFill/>
-                    </a:lnR>
-                    <a:lnT w="7620">
-                      <a:noFill/>
-                    </a:lnT>
-                    <a:lnB w="7620">
-                      <a:noFill/>
-                    </a:lnB>
-                    <a:solidFill>
-                      <a:srgbClr val="FFFEF8"/>
-                    </a:solidFill>
-                  </a:tcPr>
-                </a:tc>
-                <a:tc>
-                  <a:txBody>
-                    <a:bodyPr wrap="square">
-                      <a:noAutofit/>
-                    </a:bodyPr>
-                    <a:lstStyle/>
-                    <a:p>
-                      <a:pPr algn="r">
-                        <a:lnSpc>
-                          <a:spcPts val="2070"/>
-                        </a:lnSpc>
-                        <a:buNone/>
-                        <a:defRPr sz="1800" b="0">
-                          <a:solidFill>
-                            <a:srgbClr val="303437"/>
-                          </a:solidFill>
-                          <a:latin typeface="Noto Sans"/>
-                        </a:defRPr>
-                      </a:pPr>
-                      <a:r>
-                        <a:rPr sz="1800" b="0" lang="ja-JP" altLang="en-US">
-                          <a:solidFill>
-                            <a:srgbClr val="303437"/>
-                          </a:solidFill>
-                          <a:latin typeface="Noto Sans"/>
-                          <a:ea typeface="Noto Sans CJK JP"/>
-                          <a:cs typeface="Noto Sans"/>
-                        </a:rPr>
-                        <a:t>5</a:t>
-                      </a:r>
-                    </a:p>
-                  </a:txBody>
-                  <a:tcPr marL="63500" marR="63500" marT="38100" marB="38100" anchor="ctr">
-                    <a:lnL w="7620">
-                      <a:noFill/>
-                    </a:lnL>
-                    <a:lnR w="7620">
-                      <a:noFill/>
-                    </a:lnR>
-                    <a:lnT w="7620">
-                      <a:noFill/>
-                    </a:lnT>
-                    <a:lnB w="7620">
-                      <a:noFill/>
-                    </a:lnB>
-                    <a:solidFill>
-                      <a:srgbClr val="FFFEF8"/>
-                    </a:solidFill>
-                  </a:tcPr>
-                </a:tc>
-                <a:tc>
-                  <a:txBody>
-                    <a:bodyPr wrap="square">
-                      <a:noAutofit/>
-                    </a:bodyPr>
-                    <a:lstStyle/>
-                    <a:p>
-                      <a:pPr algn="r">
-                        <a:lnSpc>
-                          <a:spcPts val="2070"/>
-                        </a:lnSpc>
-                        <a:buNone/>
-                        <a:defRPr sz="1800" b="0">
-                          <a:solidFill>
-                            <a:srgbClr val="303437"/>
-                          </a:solidFill>
-                          <a:latin typeface="Noto Sans"/>
-                        </a:defRPr>
-                      </a:pPr>
-                      <a:r>
-                        <a:rPr sz="1800" b="0" lang="ja-JP" altLang="en-US">
-                          <a:solidFill>
-                            <a:srgbClr val="303437"/>
-                          </a:solidFill>
-                          <a:latin typeface="Noto Sans"/>
-                          <a:ea typeface="Noto Sans CJK JP"/>
-                          <a:cs typeface="Noto Sans"/>
-                        </a:rPr>
-                        <a:t>20</a:t>
-                      </a:r>
-                    </a:p>
-                  </a:txBody>
-                  <a:tcPr marL="63500" marR="63500" marT="38100" marB="38100" anchor="ctr">
-                    <a:lnL w="7620">
-                      <a:noFill/>
-                    </a:lnL>
-                    <a:lnR w="7620">
-                      <a:noFill/>
-                    </a:lnR>
-                    <a:lnT w="7620">
-                      <a:noFill/>
-                    </a:lnT>
-                    <a:lnB w="7620">
-                      <a:noFill/>
-                    </a:lnB>
-                    <a:solidFill>
-                      <a:srgbClr val="FFFEF8"/>
-                    </a:solidFill>
-                  </a:tcPr>
-                </a:tc>
-              </a:tr>
-              <a:tr h="377190">
-                <a:tc>
-                  <a:txBody>
-                    <a:bodyPr wrap="square">
-                      <a:noAutofit/>
-                    </a:bodyPr>
-                    <a:lstStyle/>
-                    <a:p>
-                      <a:pPr algn="l">
-                        <a:lnSpc>
-                          <a:spcPts val="2070"/>
-                        </a:lnSpc>
-                        <a:buNone/>
-                        <a:defRPr sz="1800" b="0">
-                          <a:solidFill>
-                            <a:srgbClr val="303437"/>
-                          </a:solidFill>
-                          <a:latin typeface="Noto Sans"/>
-                        </a:defRPr>
-                      </a:pPr>
-                      <a:r>
-                        <a:rPr sz="1800" b="0" lang="ja-JP" altLang="en-US">
-                          <a:solidFill>
-                            <a:srgbClr val="303437"/>
-                          </a:solidFill>
-                          <a:latin typeface="Noto Sans"/>
-                          <a:ea typeface="Noto Sans CJK JP"/>
-                          <a:cs typeface="Noto Sans"/>
-                        </a:rPr>
-                        <a:t>LEDGAR</a:t>
-                      </a:r>
-                    </a:p>
-                  </a:txBody>
-                  <a:tcPr marL="63500" marR="63500" marT="38100" marB="38100" anchor="ctr">
-                    <a:lnL w="7620">
-                      <a:noFill/>
-                    </a:lnL>
-                    <a:lnR w="7620">
-                      <a:noFill/>
-                    </a:lnR>
-                    <a:lnT w="7620">
-                      <a:noFill/>
-                    </a:lnT>
-                    <a:lnB w="7620">
-                      <a:noFill/>
-                    </a:lnB>
-                    <a:solidFill>
-                      <a:srgbClr val="FFFEF8"/>
-                    </a:solidFill>
-                  </a:tcPr>
-                </a:tc>
-                <a:tc>
-                  <a:txBody>
-                    <a:bodyPr wrap="square">
-                      <a:noAutofit/>
-                    </a:bodyPr>
-                    <a:lstStyle/>
-                    <a:p>
-                      <a:pPr algn="r">
-                        <a:lnSpc>
-                          <a:spcPts val="2070"/>
-                        </a:lnSpc>
-                        <a:buNone/>
-                        <a:defRPr sz="1800" b="0">
-                          <a:solidFill>
-                            <a:srgbClr val="303437"/>
-                          </a:solidFill>
-                          <a:latin typeface="Noto Sans"/>
-                        </a:defRPr>
-                      </a:pPr>
-                      <a:r>
-                        <a:rPr sz="1800" b="0" lang="ja-JP" altLang="en-US">
-                          <a:solidFill>
-                            <a:srgbClr val="303437"/>
-                          </a:solidFill>
-                          <a:latin typeface="Noto Sans"/>
-                          <a:ea typeface="Noto Sans CJK JP"/>
-                          <a:cs typeface="Noto Sans"/>
-                        </a:rPr>
-                        <a:t>5</a:t>
-                      </a:r>
-                    </a:p>
-                  </a:txBody>
-                  <a:tcPr marL="63500" marR="63500" marT="38100" marB="38100" anchor="ctr">
-                    <a:lnL w="7620">
-                      <a:noFill/>
-                    </a:lnL>
-                    <a:lnR w="7620">
-                      <a:noFill/>
-                    </a:lnR>
-                    <a:lnT w="7620">
-                      <a:noFill/>
-                    </a:lnT>
-                    <a:lnB w="7620">
-                      <a:noFill/>
-                    </a:lnB>
-                    <a:solidFill>
-                      <a:srgbClr val="FFFEF8"/>
-                    </a:solidFill>
-                  </a:tcPr>
-                </a:tc>
-                <a:tc>
-                  <a:txBody>
-                    <a:bodyPr wrap="square">
-                      <a:noAutofit/>
-                    </a:bodyPr>
-                    <a:lstStyle/>
-                    <a:p>
-                      <a:pPr algn="r">
-                        <a:lnSpc>
-                          <a:spcPts val="2070"/>
-                        </a:lnSpc>
-                        <a:buNone/>
-                        <a:defRPr sz="1800" b="0">
-                          <a:solidFill>
-                            <a:srgbClr val="303437"/>
-                          </a:solidFill>
-                          <a:latin typeface="Noto Sans"/>
-                        </a:defRPr>
-                      </a:pPr>
-                      <a:r>
-                        <a:rPr sz="1800" b="0" lang="ja-JP" altLang="en-US">
-                          <a:solidFill>
-                            <a:srgbClr val="303437"/>
-                          </a:solidFill>
-                          <a:latin typeface="Noto Sans"/>
-                          <a:ea typeface="Noto Sans CJK JP"/>
-                          <a:cs typeface="Noto Sans"/>
-                        </a:rPr>
-                        <a:t>20</a:t>
-                      </a:r>
-                    </a:p>
-                  </a:txBody>
-                  <a:tcPr marL="63500" marR="63500" marT="38100" marB="38100" anchor="ctr">
-                    <a:lnL w="7620">
-                      <a:noFill/>
-                    </a:lnL>
-                    <a:lnR w="7620">
-                      <a:noFill/>
-                    </a:lnR>
-                    <a:lnT w="7620">
-                      <a:noFill/>
-                    </a:lnT>
-                    <a:lnB w="7620">
-                      <a:noFill/>
-                    </a:lnB>
-                    <a:solidFill>
-                      <a:srgbClr val="FFFEF8"/>
-                    </a:solidFill>
-                  </a:tcPr>
-                </a:tc>
-              </a:tr>
-              <a:tr h="377190">
-                <a:tc>
-                  <a:txBody>
-                    <a:bodyPr wrap="square">
-                      <a:noAutofit/>
-                    </a:bodyPr>
-                    <a:lstStyle/>
-                    <a:p>
-                      <a:pPr algn="l">
-                        <a:lnSpc>
-                          <a:spcPts val="2070"/>
-                        </a:lnSpc>
-                        <a:buNone/>
-                        <a:defRPr sz="1800" b="0">
-                          <a:solidFill>
-                            <a:srgbClr val="303437"/>
-                          </a:solidFill>
-                          <a:latin typeface="Noto Sans"/>
-                        </a:defRPr>
-                      </a:pPr>
-                      <a:r>
-                        <a:rPr sz="1800" b="0" lang="ja-JP" altLang="en-US">
-                          <a:solidFill>
-                            <a:srgbClr val="303437"/>
-                          </a:solidFill>
-                          <a:latin typeface="Noto Sans"/>
-                          <a:ea typeface="Noto Sans CJK JP"/>
-                          <a:cs typeface="Noto Sans"/>
-                        </a:rPr>
-                        <a:t>UNFAIR-ToS</a:t>
-                      </a:r>
-                    </a:p>
-                  </a:txBody>
-                  <a:tcPr marL="63500" marR="63500" marT="38100" marB="38100" anchor="ctr">
-                    <a:lnL w="7620">
-                      <a:noFill/>
-                    </a:lnL>
-                    <a:lnR w="7620">
-                      <a:noFill/>
-                    </a:lnR>
-                    <a:lnT w="7620">
-                      <a:noFill/>
-                    </a:lnT>
-                    <a:lnB w="7620">
-                      <a:noFill/>
-                    </a:lnB>
-                    <a:solidFill>
-                      <a:srgbClr val="FFFEF8"/>
-                    </a:solidFill>
-                  </a:tcPr>
-                </a:tc>
-                <a:tc>
-                  <a:txBody>
-                    <a:bodyPr wrap="square">
-                      <a:noAutofit/>
-                    </a:bodyPr>
-                    <a:lstStyle/>
-                    <a:p>
-                      <a:pPr algn="r">
-                        <a:lnSpc>
-                          <a:spcPts val="2070"/>
-                        </a:lnSpc>
-                        <a:buNone/>
-                        <a:defRPr sz="1800" b="0">
-                          <a:solidFill>
-                            <a:srgbClr val="303437"/>
-                          </a:solidFill>
-                          <a:latin typeface="Noto Sans"/>
-                        </a:defRPr>
-                      </a:pPr>
-                      <a:r>
-                        <a:rPr sz="1800" b="0" lang="ja-JP" altLang="en-US">
-                          <a:solidFill>
-                            <a:srgbClr val="303437"/>
-                          </a:solidFill>
-                          <a:latin typeface="Noto Sans"/>
-                          <a:ea typeface="Noto Sans CJK JP"/>
-                          <a:cs typeface="Noto Sans"/>
-                        </a:rPr>
-                        <a:t>5</a:t>
-                      </a:r>
-                    </a:p>
-                  </a:txBody>
-                  <a:tcPr marL="63500" marR="63500" marT="38100" marB="38100" anchor="ctr">
-                    <a:lnL w="7620">
-                      <a:noFill/>
-                    </a:lnL>
-                    <a:lnR w="7620">
-                      <a:noFill/>
-                    </a:lnR>
-                    <a:lnT w="7620">
-                      <a:noFill/>
-                    </a:lnT>
-                    <a:lnB w="7620">
-                      <a:noFill/>
-                    </a:lnB>
-                    <a:solidFill>
-                      <a:srgbClr val="FFFEF8"/>
-                    </a:solidFill>
-                  </a:tcPr>
-                </a:tc>
-                <a:tc>
-                  <a:txBody>
-                    <a:bodyPr wrap="square">
-                      <a:noAutofit/>
-                    </a:bodyPr>
-                    <a:lstStyle/>
-                    <a:p>
-                      <a:pPr algn="r">
-                        <a:lnSpc>
-                          <a:spcPts val="2070"/>
-                        </a:lnSpc>
-                        <a:buNone/>
-                        <a:defRPr sz="1800" b="0">
-                          <a:solidFill>
-                            <a:srgbClr val="303437"/>
-                          </a:solidFill>
-                          <a:latin typeface="Noto Sans"/>
-                        </a:defRPr>
-                      </a:pPr>
-                      <a:r>
-                        <a:rPr sz="1800" b="0" lang="ja-JP" altLang="en-US">
-                          <a:solidFill>
-                            <a:srgbClr val="303437"/>
-                          </a:solidFill>
-                          <a:latin typeface="Noto Sans"/>
-                          <a:ea typeface="Noto Sans CJK JP"/>
-                          <a:cs typeface="Noto Sans"/>
-                        </a:rPr>
-                        <a:t>20</a:t>
-                      </a:r>
-                    </a:p>
-                  </a:txBody>
-                  <a:tcPr marL="63500" marR="63500" marT="38100" marB="38100" anchor="ctr">
-                    <a:lnL w="7620">
-                      <a:noFill/>
-                    </a:lnL>
-                    <a:lnR w="7620">
-                      <a:noFill/>
-                    </a:lnR>
-                    <a:lnT w="7620">
-                      <a:noFill/>
-                    </a:lnT>
-                    <a:lnB w="7620">
-                      <a:noFill/>
-                    </a:lnB>
-                    <a:solidFill>
-                      <a:srgbClr val="FFFEF8"/>
-                    </a:solidFill>
-                  </a:tcPr>
-                </a:tc>
-              </a:tr>
-              <a:tr h="377190">
-                <a:tc>
-                  <a:txBody>
-                    <a:bodyPr wrap="square">
-                      <a:noAutofit/>
-                    </a:bodyPr>
-                    <a:lstStyle/>
-                    <a:p>
-                      <a:pPr algn="l">
-                        <a:lnSpc>
-                          <a:spcPts val="2070"/>
-                        </a:lnSpc>
-                        <a:buNone/>
-                        <a:defRPr sz="1800" b="0">
-                          <a:solidFill>
-                            <a:srgbClr val="303437"/>
-                          </a:solidFill>
-                          <a:latin typeface="Noto Sans"/>
-                        </a:defRPr>
-                      </a:pPr>
-                      <a:r>
-                        <a:rPr sz="1800" b="0" lang="ja-JP" altLang="en-US">
-                          <a:solidFill>
-                            <a:srgbClr val="303437"/>
-                          </a:solidFill>
-                          <a:latin typeface="Noto Sans"/>
-                          <a:ea typeface="Noto Sans CJK JP"/>
-                          <a:cs typeface="Noto Sans"/>
-                        </a:rPr>
-                        <a:t>CaseHOLD</a:t>
-                      </a:r>
-                    </a:p>
-                  </a:txBody>
-                  <a:tcPr marL="63500" marR="63500" marT="38100" marB="38100" anchor="ctr">
-                    <a:lnL w="7620">
-                      <a:noFill/>
-                    </a:lnL>
-                    <a:lnR w="7620">
-                      <a:noFill/>
-                    </a:lnR>
-                    <a:lnT w="7620">
-                      <a:noFill/>
-                    </a:lnT>
-                    <a:lnB w="15240">
-                      <a:solidFill>
-                        <a:srgbClr val="626669"/>
-                      </a:solidFill>
-                      <a:prstDash val="solid"/>
-                    </a:lnB>
-                    <a:solidFill>
-                      <a:srgbClr val="FFFEF8"/>
-                    </a:solidFill>
-                  </a:tcPr>
-                </a:tc>
-                <a:tc>
-                  <a:txBody>
-                    <a:bodyPr wrap="square">
-                      <a:noAutofit/>
-                    </a:bodyPr>
-                    <a:lstStyle/>
-                    <a:p>
-                      <a:pPr algn="r">
-                        <a:lnSpc>
-                          <a:spcPts val="2070"/>
-                        </a:lnSpc>
-                        <a:buNone/>
-                        <a:defRPr sz="1800" b="0">
-                          <a:solidFill>
-                            <a:srgbClr val="303437"/>
-                          </a:solidFill>
-                          <a:latin typeface="Noto Sans"/>
-                        </a:defRPr>
-                      </a:pPr>
-                      <a:r>
-                        <a:rPr sz="1800" b="0" lang="ja-JP" altLang="en-US">
-                          <a:solidFill>
-                            <a:srgbClr val="303437"/>
-                          </a:solidFill>
-                          <a:latin typeface="Noto Sans"/>
-                          <a:ea typeface="Noto Sans CJK JP"/>
-                          <a:cs typeface="Noto Sans"/>
-                        </a:rPr>
-                        <a:t>5</a:t>
-                      </a:r>
-                    </a:p>
-                  </a:txBody>
-                  <a:tcPr marL="63500" marR="63500" marT="38100" marB="38100" anchor="ctr">
-                    <a:lnL w="7620">
-                      <a:noFill/>
-                    </a:lnL>
-                    <a:lnR w="7620">
-                      <a:noFill/>
-                    </a:lnR>
-                    <a:lnT w="7620">
-                      <a:noFill/>
-                    </a:lnT>
-                    <a:lnB w="15240">
-                      <a:solidFill>
-                        <a:srgbClr val="626669"/>
-                      </a:solidFill>
-                      <a:prstDash val="solid"/>
-                    </a:lnB>
-                    <a:solidFill>
-                      <a:srgbClr val="FFFEF8"/>
-                    </a:solidFill>
-                  </a:tcPr>
-                </a:tc>
-                <a:tc>
-                  <a:txBody>
-                    <a:bodyPr wrap="square">
-                      <a:noAutofit/>
-                    </a:bodyPr>
-                    <a:lstStyle/>
-                    <a:p>
-                      <a:pPr algn="r">
-                        <a:lnSpc>
-                          <a:spcPts val="2070"/>
-                        </a:lnSpc>
-                        <a:buNone/>
-                        <a:defRPr sz="1800" b="0">
-                          <a:solidFill>
-                            <a:srgbClr val="303437"/>
-                          </a:solidFill>
-                          <a:latin typeface="Noto Sans"/>
-                        </a:defRPr>
-                      </a:pPr>
-                      <a:r>
-                        <a:rPr sz="1800" b="0" lang="ja-JP" altLang="en-US">
-                          <a:solidFill>
-                            <a:srgbClr val="303437"/>
-                          </a:solidFill>
-                          <a:latin typeface="Noto Sans"/>
-                          <a:ea typeface="Noto Sans CJK JP"/>
-                          <a:cs typeface="Noto Sans"/>
-                        </a:rPr>
-                        <a:t>5</a:t>
-                      </a:r>
-                    </a:p>
-                  </a:txBody>
-                  <a:tcPr marL="63500" marR="63500" marT="38100" marB="38100" anchor="ctr">
-                    <a:lnL w="7620">
-                      <a:noFill/>
-                    </a:lnL>
-                    <a:lnR w="7620">
-                      <a:noFill/>
-                    </a:lnR>
-                    <a:lnT w="7620">
-                      <a:noFill/>
-                    </a:lnT>
-                    <a:lnB w="15240">
-                      <a:solidFill>
-                        <a:srgbClr val="626669"/>
-                      </a:solidFill>
-                      <a:prstDash val="solid"/>
-                    </a:lnB>
-                    <a:solidFill>
-                      <a:srgbClr val="FFFEF8"/>
-                    </a:solidFill>
-                  </a:tcPr>
-                </a:tc>
-              </a:tr>
-            </a:tbl>
-          </a:graphicData>
-        </a:graphic>
-      </p:graphicFrame>
-      <p:sp>
-        <p:nvSpPr>
-          <p:cNvPr id="5" name="TextBox 4"/>
-          <p:cNvSpPr txBox="1"/>
-          <p:nvPr/>
-        </p:nvSpPr>
-        <p:spPr>
-          <a:xfrm>
-            <a:off x="594360" y="4240529"/>
-            <a:ext cx="7955279" cy="658368"/>
-          </a:xfrm>
-          <a:prstGeom prst="rect">
-            <a:avLst/>
-          </a:prstGeom>
-          <a:noFill/>
-        </p:spPr>
-        <p:txBody>
-          <a:bodyPr wrap="square" lIns="0" rIns="0" tIns="0" bIns="0">
-            <a:noAutofit/>
-          </a:bodyPr>
-          <a:lstStyle/>
-          <a:p>
-            <a:pPr algn="l">
-              <a:lnSpc>
-                <a:spcPts val="1568"/>
-              </a:lnSpc>
-              <a:spcBef>
-                <a:spcPts val="0"/>
-              </a:spcBef>
-              <a:spcAft>
-                <a:spcPts val="0"/>
-              </a:spcAft>
-              <a:buNone/>
-              <a:defRPr sz="1400" b="0">
-                <a:solidFill>
-                  <a:srgbClr val="303437"/>
-                </a:solidFill>
-                <a:latin typeface="Noto Sans"/>
-              </a:defRPr>
-            </a:pPr>
-            <a:r>
-              <a:rPr sz="1400" b="0" lang="ja-JP" altLang="en-US">
-                <a:solidFill>
-                  <a:srgbClr val="303437"/>
-                </a:solidFill>
-                <a:latin typeface="Noto Sans"/>
-                <a:ea typeface="Noto Sans CJK JP"/>
-                <a:cs typeface="Noto Sans"/>
-              </a:rPr>
-              <a:t>v0.4.0の設定値。実際の提示数・試行数・切詰め率は公開runなし。</a:t>
-            </a:r>
-          </a:p>
-        </p:txBody>
-      </p:sp>
-      <p:sp>
-        <p:nvSpPr>
-          <p:cNvPr id="6" name="sources"/>
-          <p:cNvSpPr txBox="1"/>
-          <p:nvPr/>
-        </p:nvSpPr>
-        <p:spPr>
-          <a:xfrm>
-            <a:off x="502920" y="4700016"/>
-            <a:ext cx="8183879" cy="530352"/>
-          </a:xfrm>
-          <a:prstGeom prst="rect">
-            <a:avLst/>
-          </a:prstGeom>
-          <a:noFill/>
-        </p:spPr>
-        <p:txBody>
-          <a:bodyPr wrap="square" lIns="0" rIns="0" tIns="0" bIns="0">
-            <a:noAutofit/>
-          </a:bodyPr>
-          <a:lstStyle/>
-          <a:p>
-            <a:pPr algn="l">
-              <a:lnSpc>
-                <a:spcPts val="940"/>
-              </a:lnSpc>
-              <a:spcBef>
-                <a:spcPts val="0"/>
-              </a:spcBef>
-              <a:spcAft>
-                <a:spcPts val="140"/>
-              </a:spcAft>
-              <a:buNone/>
-              <a:defRPr sz="810" b="0">
-                <a:solidFill>
-                  <a:srgbClr val="303437"/>
-                </a:solidFill>
-                <a:latin typeface="Noto Sans"/>
-              </a:defRPr>
-            </a:pPr>
-            <a:r>
-              <a:rPr sz="810" b="0" lang="ja-JP" altLang="en-US">
-                <a:solidFill>
-                  <a:srgbClr val="626669"/>
-                </a:solidFill>
-                <a:latin typeface="Noto Sans"/>
-                <a:ea typeface="Noto Sans CJK JP"/>
-                <a:cs typeface="Noto Sans"/>
-              </a:rPr>
-              <a:t>[1] Stanford CRFM. LexGLUEScenario, HELM v0.4.0.</a:t>
-            </a:r>
-            <a:r>
-              <a:rPr sz="810" b="0" lang="ja-JP" altLang="en-US">
-                <a:solidFill>
-                  <a:srgbClr val="626669"/>
-                </a:solidFill>
-                <a:latin typeface="Noto Sans"/>
-                <a:ea typeface="Noto Sans CJK JP"/>
-                <a:cs typeface="Noto Sans"/>
-              </a:rPr>
-              <a:t>  </a:t>
-            </a:r>
-            <a:r>
-              <a:rPr sz="810" b="0" lang="ja-JP" altLang="en-US">
-                <a:solidFill>
-                  <a:srgbClr val="626669"/>
-                </a:solidFill>
-                <a:latin typeface="Noto Sans"/>
-                <a:ea typeface="Noto Sans CJK JP"/>
-                <a:cs typeface="Noto Sans"/>
-                <a:hlinkClick r:id="rId2"/>
-              </a:rPr>
-              <a:t>https://github.com/stanford-crfm/helm/blob/v0.4.0/src/helm/benchmark/scenarios/lex_glue_scenario.py</a:t>
-            </a:r>
-          </a:p>
-        </p:txBody>
-      </p:sp>
-    </p:spTree>
-  </p:cSld>
-  <p:clrMapOvr>
-    <a:masterClrMapping/>
-  </p:clrMapOvr>
-</p:sld>
-</file>
-
-<file path=ppt/slides/slide26.xml><?xml version="1.0" encoding="utf-8"?>
-<p:sld xmlns:a="http://schemas.openxmlformats.org/drawingml/2006/main" xmlns:p="http://schemas.openxmlformats.org/presentationml/2006/main" xmlns:r="http://schemas.openxmlformats.org/officeDocument/2006/relationships">
-  <p:cSld>
-    <p:spTree>
-      <p:nvGrpSpPr>
-        <p:cNvPr id="1" name=""/>
-        <p:cNvGrpSpPr/>
-        <p:nvPr/>
-      </p:nvGrpSpPr>
-      <p:grpSpPr/>
-      <p:sp>
-        <p:nvSpPr>
-          <p:cNvPr id="2" name="Title 1"/>
-          <p:cNvSpPr>
-            <a:spLocks noGrp="1"/>
-          </p:cNvSpPr>
-          <p:nvPr>
-            <p:ph type="title"/>
-          </p:nvPr>
-        </p:nvSpPr>
-        <p:spPr>
-          <a:xfrm>
-            <a:off x="468172" y="650138"/>
-            <a:ext cx="8206740" cy="616305"/>
-          </a:xfrm>
-        </p:spPr>
-        <p:txBody>
-          <a:bodyPr wrap="square" lIns="0" rIns="0" tIns="0" bIns="0">
-            <a:noAutofit/>
-          </a:bodyPr>
-          <a:lstStyle/>
-          <a:p>
-            <a:pPr algn="l">
-              <a:lnSpc>
-                <a:spcPct val="110000"/>
-              </a:lnSpc>
-              <a:buNone/>
-              <a:defRPr sz="2800" b="0">
-                <a:solidFill>
-                  <a:srgbClr val="303437"/>
-                </a:solidFill>
-                <a:latin typeface="Noto Sans"/>
-              </a:defRPr>
-            </a:pPr>
-            <a:r>
-              <a:rPr sz="2800" b="1" lang="ja-JP" altLang="en-US">
-                <a:solidFill>
-                  <a:srgbClr val="303437"/>
-                </a:solidFill>
-                <a:latin typeface="Noto Sans"/>
-                <a:ea typeface="Noto Sans CJK JP"/>
-                <a:cs typeface="Noto Sans"/>
-              </a:rPr>
-              <a:t>配布のラベルと、出力文字列を区別する</a:t>
-            </a:r>
-          </a:p>
-        </p:txBody>
-      </p:sp>
-      <p:sp>
-        <p:nvSpPr>
-          <p:cNvPr id="3" name="Text Placeholder 2"/>
-          <p:cNvSpPr>
-            <a:spLocks noGrp="1"/>
-          </p:cNvSpPr>
-          <p:nvPr>
-            <p:ph type="body" idx="1"/>
-          </p:nvPr>
-        </p:nvSpPr>
-        <p:spPr>
-          <a:xfrm>
-            <a:off x="594360" y="1463040"/>
-            <a:ext cx="7955279" cy="3044952"/>
-          </a:xfrm>
-        </p:spPr>
-        <p:txBody>
-          <a:bodyPr wrap="square" tIns="91440" bIns="91440">
-            <a:noAutofit/>
-          </a:bodyPr>
-          <a:lstStyle/>
-          <a:p>
-            <a:pPr marL="457200" indent="-355600">
-              <a:lnSpc>
-                <a:spcPts val="2320"/>
-              </a:lnSpc>
-              <a:spcAft>
-                <a:spcPts val="700"/>
-              </a:spcAft>
-              <a:buSzPct val="68205"/>
-              <a:buFont typeface="Noto Sans CJK JP"/>
-              <a:buChar char="●"/>
-              <a:defRPr sz="1950" b="0">
-                <a:solidFill>
-                  <a:srgbClr val="303437"/>
-                </a:solidFill>
-                <a:latin typeface="Noto Sans"/>
-              </a:defRPr>
-            </a:pPr>
-            <a:r>
-              <a:rPr sz="1950" b="0" lang="ja-JP" altLang="en-US">
-                <a:solidFill>
-                  <a:srgbClr val="303437"/>
-                </a:solidFill>
-                <a:latin typeface="Noto Sans"/>
-                <a:ea typeface="Noto Sans CJK JP"/>
-                <a:cs typeface="Noto Sans"/>
-              </a:rPr>
-              <a:t>HELMの複数ラベル課題は、配布の整数インデックスを文字列化する。ECtHRの第6条は3、EUR-LEXのEuroVoc ID 100174は7となる。</a:t>
-            </a:r>
-          </a:p>
-          <a:p>
-            <a:pPr marL="457200" indent="-355600">
-              <a:lnSpc>
-                <a:spcPts val="2320"/>
-              </a:lnSpc>
-              <a:spcAft>
-                <a:spcPts val="700"/>
-              </a:spcAft>
-              <a:buSzPct val="68205"/>
-              <a:buFont typeface="Noto Sans CJK JP"/>
-              <a:buChar char="●"/>
-              <a:defRPr sz="1950" b="0">
-                <a:solidFill>
-                  <a:srgbClr val="303437"/>
-                </a:solidFill>
-                <a:latin typeface="Noto Sans"/>
-              </a:defRPr>
-            </a:pPr>
-            <a:r>
-              <a:rPr sz="1950" b="0" lang="ja-JP" altLang="en-US">
-                <a:solidFill>
-                  <a:srgbClr val="303437"/>
-                </a:solidFill>
-                <a:latin typeface="Noto Sans"/>
-                <a:ea typeface="Noto Sans CJK JP"/>
-                <a:cs typeface="Noto Sans"/>
-              </a:rPr>
-              <a:t>LEDGARはClassLabelの名前を参照とし、CaseHOLDは0〜4の候補番号を使う。</a:t>
-            </a:r>
-          </a:p>
-          <a:p>
-            <a:pPr marL="457200" indent="-355600">
-              <a:lnSpc>
-                <a:spcPts val="2320"/>
-              </a:lnSpc>
-              <a:spcAft>
-                <a:spcPts val="0"/>
-              </a:spcAft>
-              <a:buSzPct val="68205"/>
-              <a:buFont typeface="Noto Sans CJK JP"/>
-              <a:buChar char="●"/>
-              <a:defRPr sz="1950" b="0">
-                <a:solidFill>
-                  <a:srgbClr val="303437"/>
-                </a:solidFill>
-                <a:latin typeface="Noto Sans"/>
-              </a:defRPr>
-            </a:pPr>
-            <a:r>
-              <a:rPr sz="1950" b="0" lang="ja-JP" altLang="en-US">
-                <a:solidFill>
-                  <a:srgbClr val="303437"/>
-                </a:solidFill>
-                <a:latin typeface="Noto Sans"/>
-                <a:ea typeface="Noto Sans CJK JP"/>
-                <a:cs typeface="Noto Sans"/>
-              </a:rPr>
-              <a:t>SCOTUSには説明中の番号と参照文字列のずれがある。固定配布・実装を照合した対応をAppendixに示す。</a:t>
-            </a:r>
-          </a:p>
-        </p:txBody>
-      </p:sp>
-      <p:sp>
-        <p:nvSpPr>
-          <p:cNvPr id="4" name="Title 3"/>
-          <p:cNvSpPr>
-            <a:spLocks noGrp="1"/>
-          </p:cNvSpPr>
-          <p:nvPr>
-            <p:ph type="title" idx="2"/>
-          </p:nvPr>
-        </p:nvSpPr>
-        <p:spPr>
-          <a:xfrm>
-            <a:off x="75895" y="0"/>
-            <a:ext cx="8115300" cy="480060"/>
-          </a:xfrm>
-        </p:spPr>
-        <p:txBody>
-          <a:bodyPr wrap="square" lIns="0" rIns="0" tIns="0" bIns="0" anchor="ctr">
-            <a:noAutofit/>
-          </a:bodyPr>
-          <a:lstStyle/>
-          <a:p>
-            <a:pPr algn="l">
-              <a:lnSpc>
-                <a:spcPct val="110000"/>
-              </a:lnSpc>
-              <a:buNone/>
-              <a:defRPr sz="1400" b="0">
-                <a:solidFill>
-                  <a:srgbClr val="303437"/>
-                </a:solidFill>
-                <a:latin typeface="Noto Sans"/>
-              </a:defRPr>
-            </a:pPr>
-            <a:r>
-              <a:rPr sz="1400" b="1" lang="ja-JP" altLang="en-US">
-                <a:solidFill>
-                  <a:srgbClr val="FFFEF8"/>
-                </a:solidFill>
-                <a:latin typeface="Noto Sans"/>
-                <a:ea typeface="Noto Sans CJK JP"/>
-                <a:cs typeface="Noto Sans"/>
-              </a:rPr>
-              <a:t>4. HELMでの位置付けと入手方法</a:t>
-            </a:r>
-          </a:p>
-        </p:txBody>
-      </p:sp>
-      <p:sp>
-        <p:nvSpPr>
-          <p:cNvPr id="5" name="sources"/>
-          <p:cNvSpPr txBox="1"/>
-          <p:nvPr/>
-        </p:nvSpPr>
-        <p:spPr>
-          <a:xfrm>
-            <a:off x="502920" y="4700016"/>
-            <a:ext cx="8183879" cy="530352"/>
-          </a:xfrm>
-          <a:prstGeom prst="rect">
-            <a:avLst/>
-          </a:prstGeom>
-          <a:noFill/>
-        </p:spPr>
-        <p:txBody>
-          <a:bodyPr wrap="square" lIns="0" rIns="0" tIns="0" bIns="0">
-            <a:noAutofit/>
-          </a:bodyPr>
-          <a:lstStyle/>
-          <a:p>
-            <a:pPr algn="l">
-              <a:lnSpc>
-                <a:spcPts val="940"/>
-              </a:lnSpc>
-              <a:spcBef>
-                <a:spcPts val="0"/>
-              </a:spcBef>
-              <a:spcAft>
-                <a:spcPts val="140"/>
-              </a:spcAft>
-              <a:buNone/>
-              <a:defRPr sz="810" b="0">
-                <a:solidFill>
-                  <a:srgbClr val="303437"/>
-                </a:solidFill>
-                <a:latin typeface="Noto Sans"/>
-              </a:defRPr>
-            </a:pPr>
-            <a:r>
-              <a:rPr sz="810" b="0" lang="ja-JP" altLang="en-US">
-                <a:solidFill>
-                  <a:srgbClr val="626669"/>
-                </a:solidFill>
-                <a:latin typeface="Noto Sans"/>
-                <a:ea typeface="Noto Sans CJK JP"/>
-                <a:cs typeface="Noto Sans"/>
-              </a:rPr>
-              <a:t>[1] Stanford CRFM. LexGLUEScenario, HELM v0.4.0.</a:t>
-            </a:r>
-            <a:r>
-              <a:rPr sz="810" b="0" lang="ja-JP" altLang="en-US">
-                <a:solidFill>
-                  <a:srgbClr val="626669"/>
-                </a:solidFill>
-                <a:latin typeface="Noto Sans"/>
-                <a:ea typeface="Noto Sans CJK JP"/>
-                <a:cs typeface="Noto Sans"/>
-              </a:rPr>
-              <a:t>  </a:t>
-            </a:r>
-            <a:r>
-              <a:rPr sz="810" b="0" lang="ja-JP" altLang="en-US">
-                <a:solidFill>
-                  <a:srgbClr val="626669"/>
-                </a:solidFill>
-                <a:latin typeface="Noto Sans"/>
-                <a:ea typeface="Noto Sans CJK JP"/>
-                <a:cs typeface="Noto Sans"/>
-                <a:hlinkClick r:id="rId2"/>
-              </a:rPr>
-              <a:t>https://github.com/stanford-crfm/helm/blob/v0.4.0/src/helm/benchmark/scenarios/lex_glue_scenario.py</a:t>
+              <a:t>4. 公開配布と利用方法</a:t>
             </a:r>
           </a:p>
         </p:txBody>
@@ -17339,7 +15247,7 @@
                 <a:ea typeface="Noto Sans CJK JP"/>
                 <a:cs typeface="Noto Sans"/>
               </a:rPr>
-              <a:t>subsetとrevisionを指定して取得する</a:t>
+              <a:t>契約条項を読み、整数ラベルを主題名へ変換する</a:t>
             </a:r>
           </a:p>
         </p:txBody>
@@ -17387,7 +15295,7 @@
                 <a:ea typeface="Noto Sans CJK JP"/>
                 <a:cs typeface="Noto Sans"/>
               </a:rPr>
-              <a:t>4. HELMでの位置付けと入手方法</a:t>
+              <a:t>4. 公開配布と利用方法</a:t>
             </a:r>
           </a:p>
         </p:txBody>
@@ -17400,8 +15308,8 @@
         </p:nvSpPr>
         <p:spPr>
           <a:xfrm>
-            <a:off x="548640" y="1508760"/>
-            <a:ext cx="8046720" cy="1787969"/>
+            <a:off x="548640" y="1543050"/>
+            <a:ext cx="8046720" cy="1954339"/>
           </a:xfrm>
           <a:prstGeom prst="rect">
             <a:avLst/>
@@ -17429,7 +15337,7 @@
           </a:fontRef>
         </p:style>
         <p:txBody>
-          <a:bodyPr rtlCol="0" anchor="t" wrap="none" lIns="152400" rIns="152400" tIns="101600" bIns="127000">
+          <a:bodyPr rtlCol="0" anchor="t" wrap="none" lIns="152400" rIns="152400" tIns="67310" bIns="127000">
             <a:noAutofit/>
           </a:bodyPr>
           <a:lstStyle/>
@@ -17461,7 +15369,7 @@
                 <a:ea typeface="Noto Sans CJK JP"/>
                 <a:cs typeface="Liberation Mono"/>
               </a:rPr>
-              <a:t>from datasets import load_dataset</a:t>
+              <a:t>import json</a:t>
             </a:r>
           </a:p>
           <a:p>
@@ -17492,7 +15400,7 @@
                 <a:ea typeface="Noto Sans CJK JP"/>
                 <a:cs typeface="Liberation Mono"/>
               </a:rPr>
-              <a:t>data = load_dataset(</a:t>
+              <a:t>import pyarrow.parquet as pq</a:t>
             </a:r>
           </a:p>
           <a:p>
@@ -17523,7 +15431,7 @@
                 <a:ea typeface="Noto Sans CJK JP"/>
                 <a:cs typeface="Liberation Mono"/>
               </a:rPr>
-              <a:t>    'coastalcph/lex_glue', 'ledgar',</a:t>
+              <a:t>table = pq.read_table("ledgar-test.parquet")</a:t>
             </a:r>
           </a:p>
           <a:p>
@@ -17554,7 +15462,7 @@
                 <a:ea typeface="Noto Sans CJK JP"/>
                 <a:cs typeface="Liberation Mono"/>
               </a:rPr>
-              <a:t>    revision='c23fdff1a6bf74e0e1a71cb86f1e781d37da888c',</a:t>
+              <a:t>info = json.loads(table.schema.metadata[b"huggingface"])</a:t>
             </a:r>
           </a:p>
           <a:p>
@@ -17585,7 +15493,7 @@
                 <a:ea typeface="Noto Sans CJK JP"/>
                 <a:cs typeface="Liberation Mono"/>
               </a:rPr>
-              <a:t>    split='test',</a:t>
+              <a:t>labels = info["info"]["features"]["label"]["names"]</a:t>
             </a:r>
           </a:p>
           <a:p>
@@ -17616,7 +15524,7 @@
                 <a:ea typeface="Noto Sans CJK JP"/>
                 <a:cs typeface="Liberation Mono"/>
               </a:rPr>
-              <a:t>)</a:t>
+              <a:t>row = table.to_pylist()[0]</a:t>
             </a:r>
           </a:p>
           <a:p>
@@ -17647,7 +15555,38 @@
                 <a:ea typeface="Noto Sans CJK JP"/>
                 <a:cs typeface="Liberation Mono"/>
               </a:rPr>
-              <a:t>print(data[52]['text'], data[52]['label'])</a:t>
+              <a:t>print(row["text"])</a:t>
+            </a:r>
+          </a:p>
+          <a:p>
+            <a:pPr algn="l">
+              <a:lnSpc>
+                <a:spcPts val="1725"/>
+              </a:lnSpc>
+              <a:spcBef>
+                <a:spcPts val="0"/>
+              </a:spcBef>
+              <a:spcAft>
+                <a:spcPts val="0"/>
+              </a:spcAft>
+              <a:buNone/>
+              <a:defRPr sz="1450" b="0">
+                <a:solidFill>
+                  <a:srgbClr val="303437"/>
+                </a:solidFill>
+                <a:latin typeface="Noto Sans"/>
+              </a:defRPr>
+            </a:pPr>
+            <a:r>
+              <a:rPr sz="1450" b="0" lang="ja-JP" altLang="en-US">
+                <a:solidFill>
+                  <a:srgbClr val="303437"/>
+                </a:solidFill>
+                <a:latin typeface="Liberation Mono"/>
+                <a:ea typeface="Noto Sans CJK JP"/>
+                <a:cs typeface="Liberation Mono"/>
+              </a:rPr>
+              <a:t>print(labels[row["label"]])</a:t>
             </a:r>
           </a:p>
         </p:txBody>
@@ -17701,7 +15640,7 @@
                 <a:ea typeface="Noto Sans CJK JP"/>
                 <a:cs typeface="Noto Sans"/>
               </a:rPr>
-              <a:t>整数ラベルの意味は、そのsubsetのfeaturesにあるClassLabelと対応させる。</a:t>
+              <a:t>ledgarのtest Parquetをledgar-test.parquetとして保存する。textが条項、labelが主題の整数番号。ClassLabelのnamesから主題名を取り出す。</a:t>
             </a:r>
           </a:p>
         </p:txBody>
@@ -17755,18 +15694,7 @@
                 <a:ea typeface="Noto Sans CJK JP"/>
                 <a:cs typeface="Noto Sans"/>
               </a:rPr>
-              <a:t>[1] coastalcph/lex_glue. 固定revision c23fdff… / 元の裁判・法令・契約の作成者に帰属。</a:t>
-            </a:r>
-            <a:r>
-              <a:rPr sz="810" b="0" lang="ja-JP" altLang="en-US">
-                <a:solidFill>
-                  <a:srgbClr val="626669"/>
-                </a:solidFill>
-                <a:latin typeface="Noto Sans"/>
-                <a:ea typeface="Noto Sans CJK JP"/>
-                <a:cs typeface="Noto Sans"/>
-              </a:rPr>
-              <a:t>  </a:t>
+              <a:t>[1] Chalkidis et al. LexGLUE公開データ。</a:t>
             </a:r>
             <a:r>
               <a:rPr sz="810" b="0" lang="ja-JP" altLang="en-US">
@@ -17844,7 +15772,7 @@
                 <a:ea typeface="Noto Sans CJK JP"/>
                 <a:cs typeface="Noto Sans"/>
               </a:rPr>
-              <a:t>共通カードと、元素材の権利を確認する</a:t>
+              <a:t>共通の配布先から、七つの課題を選べる</a:t>
             </a:r>
           </a:p>
         </p:txBody>
@@ -17897,7 +15825,7 @@
                 <a:ea typeface="Noto Sans CJK JP"/>
                 <a:cs typeface="Noto Sans"/>
               </a:rPr>
-              <a:t>Hugging FaceのデータカードはCC BY 4.0を表示する。裁判所、EU機関、契約や規約の作成者など、元素材の出所と帰属も保つ。</a:t>
+              <a:t>公式GitHubは、7課題の説明、データ取得先、微調整と評価のコードを案内する。Hugging Faceでは課題名とtrain・validation・testを選んで取得できる。</a:t>
             </a:r>
           </a:p>
           <a:p>
@@ -17927,7 +15855,7 @@
                 <a:ea typeface="Noto Sans CJK JP"/>
                 <a:cs typeface="Noto Sans"/>
               </a:rPr>
-              <a:t>本資料では、固定revisionの7つのtest Parquetを取得し、13件の原レコードと参照ラベルを保存した。長い原入力の抜粋には範囲を明示する。</a:t>
+              <a:t>データカードはCC BY 4.0を表示する。裁判所、EU機関、契約や規約の作成者など、元素材の出所と帰属も保って利用する。</a:t>
             </a:r>
           </a:p>
           <a:p>
@@ -17957,7 +15885,7 @@
                 <a:ea typeface="Noto Sans CJK JP"/>
                 <a:cs typeface="Noto Sans"/>
               </a:rPr>
-              <a:t>コードと収録文書では利用条件の出所が異なるため、再配布時は各出所を確認する。</a:t>
+              <a:t>コードと収録文書では利用条件の出所が異なるため、再配布時はそれぞれの出所を確認する。</a:t>
             </a:r>
           </a:p>
         </p:txBody>
@@ -18005,7 +15933,7 @@
                 <a:ea typeface="Noto Sans CJK JP"/>
                 <a:cs typeface="Noto Sans"/>
               </a:rPr>
-              <a:t>4. HELMでの位置付けと入手方法</a:t>
+              <a:t>4. 公開配布と利用方法</a:t>
             </a:r>
           </a:p>
         </p:txBody>
@@ -18059,7 +15987,7 @@
                 <a:ea typeface="Noto Sans CJK JP"/>
                 <a:cs typeface="Noto Sans"/>
               </a:rPr>
-              <a:t>[1] coastalcph/lex_glue. 固定revision c23fdff… / 元の裁判・法令・契約の作成者に帰属。</a:t>
+              <a:t>[1] Chalkidis et al. LexGLUE. </a:t>
             </a:r>
             <a:r>
               <a:rPr sz="810" b="0" lang="ja-JP" altLang="en-US">
@@ -18069,8 +15997,40 @@
                 <a:latin typeface="Noto Sans"/>
                 <a:ea typeface="Noto Sans CJK JP"/>
                 <a:cs typeface="Noto Sans"/>
-              </a:rPr>
-              <a:t>  </a:t>
+                <a:hlinkClick r:id="rId3"/>
+              </a:rPr>
+              <a:t>https://github.com/coastalcph/lex-glue</a:t>
+            </a:r>
+          </a:p>
+          <a:p>
+            <a:pPr algn="l">
+              <a:lnSpc>
+                <a:spcPts val="940"/>
+              </a:lnSpc>
+              <a:spcBef>
+                <a:spcPts val="0"/>
+              </a:spcBef>
+              <a:spcAft>
+                <a:spcPts val="140"/>
+              </a:spcAft>
+              <a:buNone/>
+              <a:defRPr sz="810" b="0">
+                <a:solidFill>
+                  <a:srgbClr val="303437"/>
+                </a:solidFill>
+                <a:latin typeface="Noto Sans"/>
+              </a:defRPr>
+            </a:pPr>
+            <a:r>
+              <a:rPr sz="810" b="0" lang="ja-JP" altLang="en-US">
+                <a:solidFill>
+                  <a:srgbClr val="626669"/>
+                </a:solidFill>
+                <a:latin typeface="Noto Sans"/>
+                <a:ea typeface="Noto Sans CJK JP"/>
+                <a:cs typeface="Noto Sans"/>
+              </a:rPr>
+              <a:t>[2] Chalkidis et al. LexGLUE公開データ。</a:t>
             </a:r>
             <a:r>
               <a:rPr sz="810" b="0" lang="ja-JP" altLang="en-US">
@@ -18201,7 +16161,7 @@
                 <a:ea typeface="Noto Sans CJK JP"/>
                 <a:cs typeface="Noto Sans"/>
               </a:rPr>
-              <a:t>LexGLUEは、英語の法律文書に対する分類と5択を、7課題にまとめる。単一ラベル、複数ラベル、候補番号の違いを保つ。</a:t>
+              <a:t>LexGLUEは、英語の法律文書に対する分類と5択を、7課題にまとめたベンチマーク。裁判・法令・契約など、文書ごとに異なる言語理解を扱う。</a:t>
             </a:r>
           </a:p>
           <a:p>
@@ -18231,7 +16191,7 @@
                 <a:ea typeface="Noto Sans CJK JP"/>
                 <a:cs typeface="Noto Sans"/>
               </a:rPr>
-              <a:t>長文の扱い、空集合の採点、少数クラス、時系列の分割が成績の読み方に関わる。</a:t>
+              <a:t>長文の扱い、空集合の採点、少数クラス、時系列の分割が、成績を読むための重要な特徴である。</a:t>
             </a:r>
           </a:p>
           <a:p>
@@ -18261,7 +16221,7 @@
                 <a:ea typeface="Noto Sans CJK JP"/>
                 <a:cs typeface="Noto Sans"/>
               </a:rPr>
-              <a:t>HELM固定版では公開runを確認できなかった。教師あり学習の公開成績と、実装上の少数例提示条件を区別して利用する。</a:t>
+              <a:t>法律向け事前学習を使うLegal-BERTなどを、共通のデータ分割と指標で比較できる。</a:t>
             </a:r>
           </a:p>
         </p:txBody>
@@ -18309,7 +16269,7 @@
                 <a:ea typeface="Noto Sans CJK JP"/>
                 <a:cs typeface="Noto Sans"/>
               </a:rPr>
-              <a:t>4. HELMでの位置付けと入手方法</a:t>
+              <a:t>4. 公開配布と利用方法</a:t>
             </a:r>
           </a:p>
         </p:txBody>
@@ -18363,18 +16323,7 @@
                 <a:ea typeface="Noto Sans CJK JP"/>
                 <a:cs typeface="Noto Sans"/>
               </a:rPr>
-              <a:t>[1] Chalkidis et al. (2022). LexGLUE: A Benchmark Dataset for Legal Language Understanding in English. ACL.</a:t>
-            </a:r>
-            <a:r>
-              <a:rPr sz="810" b="0" lang="ja-JP" altLang="en-US">
-                <a:solidFill>
-                  <a:srgbClr val="626669"/>
-                </a:solidFill>
-                <a:latin typeface="Noto Sans"/>
-                <a:ea typeface="Noto Sans CJK JP"/>
-                <a:cs typeface="Noto Sans"/>
-              </a:rPr>
-              <a:t>  </a:t>
+              <a:t>[1] Chalkidis et al. (2022). LexGLUE: A Benchmark Dataset for Legal Language Understanding in English. ACL.  </a:t>
             </a:r>
             <a:r>
               <a:rPr sz="810" b="0" lang="ja-JP" altLang="en-US">
@@ -18565,7 +16514,7 @@
                 <a:ea typeface="Noto Sans CJK JP"/>
                 <a:cs typeface="Noto Sans"/>
               </a:rPr>
-              <a:t>採点方法と到達水準</a:t>
+              <a:t>採点方法と2022年の成績</a:t>
             </a:r>
           </a:p>
           <a:p>
@@ -18595,7 +16544,7 @@
                 <a:ea typeface="Noto Sans CJK JP"/>
                 <a:cs typeface="Noto Sans"/>
               </a:rPr>
-              <a:t>HELMでの位置付けと入手方法</a:t>
+              <a:t>公開配布と利用方法</a:t>
             </a:r>
           </a:p>
         </p:txBody>
@@ -18679,11 +16628,11 @@
         <p:spPr>
           <a:xfrm>
             <a:off x="548640" y="2484835"/>
-            <a:ext cx="8046720" cy="585216"/>
+            <a:ext cx="8046720" cy="686816"/>
           </a:xfrm>
         </p:spPr>
         <p:txBody>
-          <a:bodyPr wrap="square" lIns="0" rIns="0" tIns="0" bIns="0" anchor="ctr">
+          <a:bodyPr wrap="square" lIns="0" rIns="0" tIns="0" bIns="101600" anchor="ctr">
             <a:noAutofit/>
           </a:bodyPr>
           <a:lstStyle/>
@@ -18906,7 +16855,7 @@
                 <a:ea typeface="Noto Sans CJK JP"/>
                 <a:cs typeface="Noto Sans"/>
               </a:rPr>
-              <a:t>配布・実装の詳しい条件</a:t>
+              <a:t>条約ラベルの対応</a:t>
             </a:r>
           </a:p>
           <a:p>
@@ -18936,7 +16885,7 @@
                 <a:ea typeface="Noto Sans CJK JP"/>
                 <a:cs typeface="Noto Sans"/>
               </a:rPr>
-              <a:t>制作研究と参考文献</a:t>
+              <a:t>研究と参考文献</a:t>
             </a:r>
           </a:p>
         </p:txBody>
@@ -19556,18 +17505,7 @@
                 <a:ea typeface="Noto Sans CJK JP"/>
                 <a:cs typeface="Noto Sans"/>
               </a:rPr>
-              <a:t>[1] coastalcph/lex_glue. 固定revision c23fdff… / 元の裁判・法令・契約の作成者に帰属。 ledgar/test/86</a:t>
-            </a:r>
-            <a:r>
-              <a:rPr sz="810" b="0" lang="ja-JP" altLang="en-US">
-                <a:solidFill>
-                  <a:srgbClr val="626669"/>
-                </a:solidFill>
-                <a:latin typeface="Noto Sans"/>
-                <a:ea typeface="Noto Sans CJK JP"/>
-                <a:cs typeface="Noto Sans"/>
-              </a:rPr>
-              <a:t>  </a:t>
+              <a:t>[1] Chalkidis et al. LexGLUE公開データ。</a:t>
             </a:r>
             <a:r>
               <a:rPr sz="810" b="0" lang="ja-JP" altLang="en-US">
@@ -20037,18 +17975,7 @@
                 <a:ea typeface="Noto Sans CJK JP"/>
                 <a:cs typeface="Noto Sans"/>
               </a:rPr>
-              <a:t>[1] coastalcph/lex_glue. 固定revision c23fdff… / 元の裁判・法令・契約の作成者に帰属。 ledgar/test/22</a:t>
-            </a:r>
-            <a:r>
-              <a:rPr sz="810" b="0" lang="ja-JP" altLang="en-US">
-                <a:solidFill>
-                  <a:srgbClr val="626669"/>
-                </a:solidFill>
-                <a:latin typeface="Noto Sans"/>
-                <a:ea typeface="Noto Sans CJK JP"/>
-                <a:cs typeface="Noto Sans"/>
-              </a:rPr>
-              <a:t>  </a:t>
+              <a:t>[1] Chalkidis et al. LexGLUE公開データ。</a:t>
             </a:r>
             <a:r>
               <a:rPr sz="810" b="0" lang="ja-JP" altLang="en-US">
@@ -20518,18 +18445,7 @@
                 <a:ea typeface="Noto Sans CJK JP"/>
                 <a:cs typeface="Noto Sans"/>
               </a:rPr>
-              <a:t>[1] coastalcph/lex_glue. 固定revision c23fdff… / 元の裁判・法令・契約の作成者に帰属。 unfair_tos/test/57</a:t>
-            </a:r>
-            <a:r>
-              <a:rPr sz="810" b="0" lang="ja-JP" altLang="en-US">
-                <a:solidFill>
-                  <a:srgbClr val="626669"/>
-                </a:solidFill>
-                <a:latin typeface="Noto Sans"/>
-                <a:ea typeface="Noto Sans CJK JP"/>
-                <a:cs typeface="Noto Sans"/>
-              </a:rPr>
-              <a:t>  </a:t>
+              <a:t>[1] Chalkidis et al. LexGLUE公開データ。</a:t>
             </a:r>
             <a:r>
               <a:rPr sz="810" b="0" lang="ja-JP" altLang="en-US">
@@ -20999,18 +18915,7 @@
                 <a:ea typeface="Noto Sans CJK JP"/>
                 <a:cs typeface="Noto Sans"/>
               </a:rPr>
-              <a:t>[1] coastalcph/lex_glue. 固定revision c23fdff… / 元の裁判・法令・契約の作成者に帰属。 unfair_tos/test/56</a:t>
-            </a:r>
-            <a:r>
-              <a:rPr sz="810" b="0" lang="ja-JP" altLang="en-US">
-                <a:solidFill>
-                  <a:srgbClr val="626669"/>
-                </a:solidFill>
-                <a:latin typeface="Noto Sans"/>
-                <a:ea typeface="Noto Sans CJK JP"/>
-                <a:cs typeface="Noto Sans"/>
-              </a:rPr>
-              <a:t>  </a:t>
+              <a:t>[1] Chalkidis et al. LexGLUE公開データ。</a:t>
             </a:r>
             <a:r>
               <a:rPr sz="810" b="0" lang="ja-JP" altLang="en-US">
@@ -21446,18 +19351,7 @@
                 <a:ea typeface="Noto Sans CJK JP"/>
                 <a:cs typeface="Noto Sans"/>
               </a:rPr>
-              <a:t>[1] coastalcph/lex_glue. 固定revision c23fdff… / 元の裁判・法令・契約の作成者に帰属。 unfair_tos/test/67</a:t>
-            </a:r>
-            <a:r>
-              <a:rPr sz="810" b="0" lang="ja-JP" altLang="en-US">
-                <a:solidFill>
-                  <a:srgbClr val="626669"/>
-                </a:solidFill>
-                <a:latin typeface="Noto Sans"/>
-                <a:ea typeface="Noto Sans CJK JP"/>
-                <a:cs typeface="Noto Sans"/>
-              </a:rPr>
-              <a:t>  </a:t>
+              <a:t>[1] Chalkidis et al. LexGLUE公開データ。</a:t>
             </a:r>
             <a:r>
               <a:rPr sz="810" b="0" lang="ja-JP" altLang="en-US">
@@ -21535,7 +19429,7 @@
                 <a:ea typeface="Noto Sans CJK JP"/>
                 <a:cs typeface="Noto Sans"/>
               </a:rPr>
-              <a:t>実例9：秘密文書を使った手続きを読む</a:t>
+              <a:t>実例9：秘密文書を用いた審理</a:t>
             </a:r>
           </a:p>
         </p:txBody>
@@ -21974,18 +19868,7 @@
                 <a:ea typeface="Noto Sans CJK JP"/>
                 <a:cs typeface="Noto Sans"/>
               </a:rPr>
-              <a:t>[1] coastalcph/lex_glue. 固定revision c23fdff… / 元の裁判・法令・契約の作成者に帰属。 ecthr_a/test/12</a:t>
-            </a:r>
-            <a:r>
-              <a:rPr sz="810" b="0" lang="ja-JP" altLang="en-US">
-                <a:solidFill>
-                  <a:srgbClr val="626669"/>
-                </a:solidFill>
-                <a:latin typeface="Noto Sans"/>
-                <a:ea typeface="Noto Sans CJK JP"/>
-                <a:cs typeface="Noto Sans"/>
-              </a:rPr>
-              <a:t>  </a:t>
+              <a:t>[1] Chalkidis et al. LexGLUE公開データ。</a:t>
             </a:r>
             <a:r>
               <a:rPr sz="810" b="0" lang="ja-JP" altLang="en-US">
@@ -22063,7 +19946,7 @@
                 <a:ea typeface="Noto Sans CJK JP"/>
                 <a:cs typeface="Noto Sans"/>
               </a:rPr>
-              <a:t>実例9：秘密文書を使った手続きを読む（訳）</a:t>
+              <a:t>実例9：秘密文書を用いた審理（訳）</a:t>
             </a:r>
           </a:p>
         </p:txBody>
@@ -22270,7 +20153,7 @@
                 <a:ea typeface="Noto Sans CJK JP"/>
                 <a:cs typeface="Noto Sans"/>
               </a:rPr>
-              <a:t>6. 当事者が提出した事実は、以下のとおり要約できる。</a:t>
+              <a:t>6. 当事者から示された事件の経緯は、以下のように要約できる。</a:t>
             </a:r>
           </a:p>
           <a:p>
@@ -22502,18 +20385,7 @@
                 <a:ea typeface="Noto Sans CJK JP"/>
                 <a:cs typeface="Noto Sans"/>
               </a:rPr>
-              <a:t>[1] coastalcph/lex_glue. 固定revision c23fdff… / 元の裁判・法令・契約の作成者に帰属。 ecthr_a/test/12</a:t>
-            </a:r>
-            <a:r>
-              <a:rPr sz="810" b="0" lang="ja-JP" altLang="en-US">
-                <a:solidFill>
-                  <a:srgbClr val="626669"/>
-                </a:solidFill>
-                <a:latin typeface="Noto Sans"/>
-                <a:ea typeface="Noto Sans CJK JP"/>
-                <a:cs typeface="Noto Sans"/>
-              </a:rPr>
-              <a:t>  </a:t>
+              <a:t>[1] Chalkidis et al. LexGLUE公開データ。</a:t>
             </a:r>
             <a:r>
               <a:rPr sz="810" b="0" lang="ja-JP" altLang="en-US">
@@ -22705,7 +20577,7 @@
                 <a:ea typeface="Noto Sans CJK JP"/>
                 <a:cs typeface="Noto Sans"/>
               </a:rPr>
-              <a:t>実例10：主張された違反と認定を区別する</a:t>
+              <a:t>実例10：検討対象となった条項を予測する</a:t>
             </a:r>
           </a:p>
         </p:txBody>
@@ -23125,18 +20997,7 @@
                 <a:ea typeface="Noto Sans CJK JP"/>
                 <a:cs typeface="Noto Sans"/>
               </a:rPr>
-              <a:t>[1] coastalcph/lex_glue. 固定revision c23fdff… / 元の裁判・法令・契約の作成者に帰属。 ecthr_b/test/26</a:t>
-            </a:r>
-            <a:r>
-              <a:rPr sz="810" b="0" lang="ja-JP" altLang="en-US">
-                <a:solidFill>
-                  <a:srgbClr val="626669"/>
-                </a:solidFill>
-                <a:latin typeface="Noto Sans"/>
-                <a:ea typeface="Noto Sans CJK JP"/>
-                <a:cs typeface="Noto Sans"/>
-              </a:rPr>
-              <a:t>  </a:t>
+              <a:t>[1] Chalkidis et al. LexGLUE公開データ。</a:t>
             </a:r>
             <a:r>
               <a:rPr sz="810" b="0" lang="ja-JP" altLang="en-US">
@@ -23572,18 +21433,7 @@
                 <a:ea typeface="Noto Sans CJK JP"/>
                 <a:cs typeface="Noto Sans"/>
               </a:rPr>
-              <a:t>[1] coastalcph/lex_glue. 固定revision c23fdff… / 元の裁判・法令・契約の作成者に帰属。 scotus/test/18</a:t>
-            </a:r>
-            <a:r>
-              <a:rPr sz="810" b="0" lang="ja-JP" altLang="en-US">
-                <a:solidFill>
-                  <a:srgbClr val="626669"/>
-                </a:solidFill>
-                <a:latin typeface="Noto Sans"/>
-                <a:ea typeface="Noto Sans CJK JP"/>
-                <a:cs typeface="Noto Sans"/>
-              </a:rPr>
-              <a:t>  </a:t>
+              <a:t>[1] Chalkidis et al. LexGLUE公開データ。</a:t>
             </a:r>
             <a:r>
               <a:rPr sz="810" b="0" lang="ja-JP" altLang="en-US">
@@ -23965,7 +21815,7 @@
                 <a:ea typeface="Noto Sans CJK JP"/>
                 <a:cs typeface="Noto Sans"/>
               </a:rPr>
-              <a:t>正解：EuroVoc：100174 / 100277 / 100282 / 100283</a:t>
+              <a:t>正解：EU機関・欧州公務員制度／欧州／経済地理／政治地理</a:t>
             </a:r>
           </a:p>
         </p:txBody>
@@ -24019,18 +21869,7 @@
                 <a:ea typeface="Noto Sans CJK JP"/>
                 <a:cs typeface="Noto Sans"/>
               </a:rPr>
-              <a:t>[1] coastalcph/lex_glue. 固定revision c23fdff… / 元の裁判・法令・契約の作成者に帰属。 eurlex/test/60</a:t>
-            </a:r>
-            <a:r>
-              <a:rPr sz="810" b="0" lang="ja-JP" altLang="en-US">
-                <a:solidFill>
-                  <a:srgbClr val="626669"/>
-                </a:solidFill>
-                <a:latin typeface="Noto Sans"/>
-                <a:ea typeface="Noto Sans CJK JP"/>
-                <a:cs typeface="Noto Sans"/>
-              </a:rPr>
-              <a:t>  </a:t>
+              <a:t>[1] Chalkidis et al. LexGLUE公開データ。</a:t>
             </a:r>
             <a:r>
               <a:rPr sz="810" b="0" lang="ja-JP" altLang="en-US">
@@ -24822,18 +22661,7 @@
                 <a:ea typeface="Noto Sans CJK JP"/>
                 <a:cs typeface="Noto Sans"/>
               </a:rPr>
-              <a:t>[1] Publications Office of the European Union. EuroVoc, English preferred labels.</a:t>
-            </a:r>
-            <a:r>
-              <a:rPr sz="810" b="0" lang="ja-JP" altLang="en-US">
-                <a:solidFill>
-                  <a:srgbClr val="626669"/>
-                </a:solidFill>
-                <a:latin typeface="Noto Sans"/>
-                <a:ea typeface="Noto Sans CJK JP"/>
-                <a:cs typeface="Noto Sans"/>
-              </a:rPr>
-              <a:t>  </a:t>
+              <a:t>[1] Publications Office of the European Union. EuroVoc, English preferred labels.  </a:t>
             </a:r>
             <a:r>
               <a:rPr sz="810" b="0" lang="ja-JP" altLang="en-US">
@@ -25350,18 +23178,7 @@
                 <a:ea typeface="Noto Sans CJK JP"/>
                 <a:cs typeface="Noto Sans"/>
               </a:rPr>
-              <a:t>[1] coastalcph/lex_glue. 固定revision c23fdff… / 元の裁判・法令・契約の作成者に帰属。 case_hold/test/38</a:t>
-            </a:r>
-            <a:r>
-              <a:rPr sz="810" b="0" lang="ja-JP" altLang="en-US">
-                <a:solidFill>
-                  <a:srgbClr val="626669"/>
-                </a:solidFill>
-                <a:latin typeface="Noto Sans"/>
-                <a:ea typeface="Noto Sans CJK JP"/>
-                <a:cs typeface="Noto Sans"/>
-              </a:rPr>
-              <a:t>  </a:t>
+              <a:t>[1] Chalkidis et al. LexGLUE公開データ。</a:t>
             </a:r>
             <a:r>
               <a:rPr sz="810" b="0" lang="ja-JP" altLang="en-US">
@@ -25824,7 +23641,7 @@
                 <a:ea typeface="Noto Sans CJK JP"/>
                 <a:cs typeface="Noto Sans"/>
               </a:rPr>
-              <a:t>正解：選択肢1（0始まり）</a:t>
+              <a:t>正解：選択肢1</a:t>
             </a:r>
           </a:p>
         </p:txBody>
@@ -25878,18 +23695,7 @@
                 <a:ea typeface="Noto Sans CJK JP"/>
                 <a:cs typeface="Noto Sans"/>
               </a:rPr>
-              <a:t>[1] coastalcph/lex_glue. 固定revision c23fdff… / 元の裁判・法令・契約の作成者に帰属。 case_hold/test/38</a:t>
-            </a:r>
-            <a:r>
-              <a:rPr sz="810" b="0" lang="ja-JP" altLang="en-US">
-                <a:solidFill>
-                  <a:srgbClr val="626669"/>
-                </a:solidFill>
-                <a:latin typeface="Noto Sans"/>
-                <a:ea typeface="Noto Sans CJK JP"/>
-                <a:cs typeface="Noto Sans"/>
-              </a:rPr>
-              <a:t>  </a:t>
+              <a:t>[1] Chalkidis et al. LexGLUE公開データ。</a:t>
             </a:r>
             <a:r>
               <a:rPr sz="810" b="0" lang="ja-JP" altLang="en-US">
@@ -25967,7 +23773,7 @@
                 <a:ea typeface="Noto Sans CJK JP"/>
                 <a:cs typeface="Noto Sans"/>
               </a:rPr>
-              <a:t>配布・実装の詳しい条件</a:t>
+              <a:t>条約ラベルの対応</a:t>
             </a:r>
           </a:p>
         </p:txBody>
@@ -26015,7 +23821,7 @@
                 <a:ea typeface="Noto Sans CJK JP"/>
                 <a:cs typeface="Noto Sans"/>
               </a:rPr>
-              <a:t>Appendix: 2. 配布・実装の詳しい条件</a:t>
+              <a:t>Appendix: 2. 条約ラベルの対応</a:t>
             </a:r>
           </a:p>
         </p:txBody>
@@ -26081,7 +23887,7 @@
                 <a:ea typeface="Noto Sans CJK JP"/>
                 <a:cs typeface="Noto Sans"/>
               </a:rPr>
-              <a:t>条約の条番号と、配布の整数は別の値</a:t>
+              <a:t>配布の整数ラベルを、条約の条番号へ対応付ける</a:t>
             </a:r>
           </a:p>
         </p:txBody>
@@ -26129,7 +23935,7 @@
                 <a:ea typeface="Noto Sans CJK JP"/>
                 <a:cs typeface="Noto Sans"/>
               </a:rPr>
-              <a:t>Appendix: 2. 配布・実装の詳しい条件</a:t>
+              <a:t>Appendix: 2. 条約ラベルの対応</a:t>
             </a:r>
           </a:p>
         </p:txBody>
@@ -27469,2505 +25275,7 @@
                 <a:ea typeface="Noto Sans CJK JP"/>
                 <a:cs typeface="Noto Sans"/>
               </a:rPr>
-              <a:t>[1] coastalcph/lex_glue. 固定revision c23fdff… / 元の裁判・法令・契約の作成者に帰属。</a:t>
-            </a:r>
-            <a:r>
-              <a:rPr sz="810" b="0" lang="ja-JP" altLang="en-US">
-                <a:solidFill>
-                  <a:srgbClr val="626669"/>
-                </a:solidFill>
-                <a:latin typeface="Noto Sans"/>
-                <a:ea typeface="Noto Sans CJK JP"/>
-                <a:cs typeface="Noto Sans"/>
-              </a:rPr>
-              <a:t>  </a:t>
-            </a:r>
-            <a:r>
-              <a:rPr sz="810" b="0" lang="ja-JP" altLang="en-US">
-                <a:solidFill>
-                  <a:srgbClr val="626669"/>
-                </a:solidFill>
-                <a:latin typeface="Noto Sans"/>
-                <a:ea typeface="Noto Sans CJK JP"/>
-                <a:cs typeface="Noto Sans"/>
-                <a:hlinkClick r:id="rId2"/>
-              </a:rPr>
-              <a:t>https://huggingface.co/datasets/coastalcph/lex_glue</a:t>
-            </a:r>
-          </a:p>
-        </p:txBody>
-      </p:sp>
-    </p:spTree>
-  </p:cSld>
-  <p:clrMapOvr>
-    <a:masterClrMapping/>
-  </p:clrMapOvr>
-</p:sld>
-</file>
-
-<file path=ppt/slides/slide48.xml><?xml version="1.0" encoding="utf-8"?>
-<p:sld xmlns:a="http://schemas.openxmlformats.org/drawingml/2006/main" xmlns:p="http://schemas.openxmlformats.org/presentationml/2006/main" xmlns:r="http://schemas.openxmlformats.org/officeDocument/2006/relationships">
-  <p:cSld>
-    <p:spTree>
-      <p:nvGrpSpPr>
-        <p:cNvPr id="1" name=""/>
-        <p:cNvGrpSpPr/>
-        <p:nvPr/>
-      </p:nvGrpSpPr>
-      <p:grpSpPr/>
-      <p:sp>
-        <p:nvSpPr>
-          <p:cNvPr id="2" name="Title 1"/>
-          <p:cNvSpPr>
-            <a:spLocks noGrp="1"/>
-          </p:cNvSpPr>
-          <p:nvPr>
-            <p:ph type="title"/>
-          </p:nvPr>
-        </p:nvSpPr>
-        <p:spPr>
-          <a:xfrm>
-            <a:off x="468172" y="650138"/>
-            <a:ext cx="8206740" cy="616305"/>
-          </a:xfrm>
-        </p:spPr>
-        <p:txBody>
-          <a:bodyPr wrap="square" lIns="0" rIns="0" tIns="0" bIns="0">
-            <a:noAutofit/>
-          </a:bodyPr>
-          <a:lstStyle/>
-          <a:p>
-            <a:pPr algn="l">
-              <a:lnSpc>
-                <a:spcPct val="110000"/>
-              </a:lnSpc>
-              <a:buNone/>
-              <a:defRPr sz="2800" b="0">
-                <a:solidFill>
-                  <a:srgbClr val="303437"/>
-                </a:solidFill>
-                <a:latin typeface="Noto Sans"/>
-              </a:defRPr>
-            </a:pPr>
-            <a:r>
-              <a:rPr sz="2800" b="1" lang="ja-JP" altLang="en-US">
-                <a:solidFill>
-                  <a:srgbClr val="303437"/>
-                </a:solidFill>
-                <a:latin typeface="Noto Sans"/>
-                <a:ea typeface="Noto Sans CJK JP"/>
-                <a:cs typeface="Noto Sans"/>
-              </a:rPr>
-              <a:t>SCOTUSの番号は三つの層で読む</a:t>
-            </a:r>
-          </a:p>
-        </p:txBody>
-      </p:sp>
-      <p:sp>
-        <p:nvSpPr>
-          <p:cNvPr id="3" name="Title 2"/>
-          <p:cNvSpPr>
-            <a:spLocks noGrp="1"/>
-          </p:cNvSpPr>
-          <p:nvPr>
-            <p:ph type="title" idx="2"/>
-          </p:nvPr>
-        </p:nvSpPr>
-        <p:spPr>
-          <a:xfrm>
-            <a:off x="75895" y="0"/>
-            <a:ext cx="8115300" cy="480060"/>
-          </a:xfrm>
-        </p:spPr>
-        <p:txBody>
-          <a:bodyPr wrap="square" lIns="0" rIns="0" tIns="0" bIns="0" anchor="ctr">
-            <a:noAutofit/>
-          </a:bodyPr>
-          <a:lstStyle/>
-          <a:p>
-            <a:pPr algn="l">
-              <a:lnSpc>
-                <a:spcPct val="110000"/>
-              </a:lnSpc>
-              <a:buNone/>
-              <a:defRPr sz="1400" b="0">
-                <a:solidFill>
-                  <a:srgbClr val="303437"/>
-                </a:solidFill>
-                <a:latin typeface="Noto Sans"/>
-              </a:defRPr>
-            </a:pPr>
-            <a:r>
-              <a:rPr sz="1400" b="1" lang="ja-JP" altLang="en-US">
-                <a:solidFill>
-                  <a:srgbClr val="FFFEF8"/>
-                </a:solidFill>
-                <a:latin typeface="Noto Sans"/>
-                <a:ea typeface="Noto Sans CJK JP"/>
-                <a:cs typeface="Noto Sans"/>
-              </a:rPr>
-              <a:t>Appendix: 2. 配布・実装の詳しい条件</a:t>
-            </a:r>
-          </a:p>
-        </p:txBody>
-      </p:sp>
-      <p:graphicFrame>
-        <p:nvGraphicFramePr>
-          <p:cNvPr id="4" name="Table 3"/>
-          <p:cNvGraphicFramePr>
-            <a:graphicFrameLocks noGrp="1"/>
-          </p:cNvGraphicFramePr>
-          <p:nvPr/>
-        </p:nvGraphicFramePr>
-        <p:xfrm>
-          <a:off x="548640" y="1508760"/>
-          <a:ext cx="8046720" cy="2131692"/>
-        </p:xfrm>
-        <a:graphic>
-          <a:graphicData uri="http://schemas.openxmlformats.org/drawingml/2006/table">
-            <a:tbl>
-              <a:tblPr firstRow="0" bandRow="0"/>
-              <a:tblGrid>
-                <a:gridCol w="2926080"/>
-                <a:gridCol w="2194560"/>
-                <a:gridCol w="2926080"/>
-              </a:tblGrid>
-              <a:tr h="355282">
-                <a:tc>
-                  <a:txBody>
-                    <a:bodyPr wrap="square">
-                      <a:noAutofit/>
-                    </a:bodyPr>
-                    <a:lstStyle/>
-                    <a:p>
-                      <a:pPr algn="l">
-                        <a:lnSpc>
-                          <a:spcPts val="1897"/>
-                        </a:lnSpc>
-                        <a:buNone/>
-                        <a:defRPr sz="1650" b="0">
-                          <a:solidFill>
-                            <a:srgbClr val="303437"/>
-                          </a:solidFill>
-                          <a:latin typeface="Noto Sans"/>
-                        </a:defRPr>
-                      </a:pPr>
-                      <a:r>
-                        <a:rPr sz="1650" b="0" lang="ja-JP" altLang="en-US">
-                          <a:solidFill>
-                            <a:srgbClr val="303437"/>
-                          </a:solidFill>
-                          <a:latin typeface="Noto Sans"/>
-                          <a:ea typeface="Noto Sans CJK JP"/>
-                          <a:cs typeface="Noto Sans"/>
-                        </a:rPr>
-                        <a:t>表現</a:t>
-                      </a:r>
-                    </a:p>
-                  </a:txBody>
-                  <a:tcPr marL="63500" marR="63500" marT="38100" marB="38100" anchor="ctr">
-                    <a:lnL w="7620">
-                      <a:noFill/>
-                    </a:lnL>
-                    <a:lnR w="7620">
-                      <a:noFill/>
-                    </a:lnR>
-                    <a:lnT w="15240">
-                      <a:solidFill>
-                        <a:srgbClr val="626669"/>
-                      </a:solidFill>
-                      <a:prstDash val="solid"/>
-                    </a:lnT>
-                    <a:lnB w="7620">
-                      <a:solidFill>
-                        <a:srgbClr val="626669"/>
-                      </a:solidFill>
-                      <a:prstDash val="solid"/>
-                    </a:lnB>
-                    <a:solidFill>
-                      <a:srgbClr val="FFFEF8"/>
-                    </a:solidFill>
-                  </a:tcPr>
-                </a:tc>
-                <a:tc>
-                  <a:txBody>
-                    <a:bodyPr wrap="square">
-                      <a:noAutofit/>
-                    </a:bodyPr>
-                    <a:lstStyle/>
-                    <a:p>
-                      <a:pPr algn="l">
-                        <a:lnSpc>
-                          <a:spcPts val="1897"/>
-                        </a:lnSpc>
-                        <a:buNone/>
-                        <a:defRPr sz="1650" b="0">
-                          <a:solidFill>
-                            <a:srgbClr val="303437"/>
-                          </a:solidFill>
-                          <a:latin typeface="Noto Sans"/>
-                        </a:defRPr>
-                      </a:pPr>
-                      <a:r>
-                        <a:rPr sz="1650" b="0" lang="ja-JP" altLang="en-US">
-                          <a:solidFill>
-                            <a:srgbClr val="303437"/>
-                          </a:solidFill>
-                          <a:latin typeface="Noto Sans"/>
-                          <a:ea typeface="Noto Sans CJK JP"/>
-                          <a:cs typeface="Noto Sans"/>
-                        </a:rPr>
-                        <a:t>実例11の値</a:t>
-                      </a:r>
-                    </a:p>
-                  </a:txBody>
-                  <a:tcPr marL="63500" marR="63500" marT="38100" marB="38100" anchor="ctr">
-                    <a:lnL w="7620">
-                      <a:noFill/>
-                    </a:lnL>
-                    <a:lnR w="7620">
-                      <a:noFill/>
-                    </a:lnR>
-                    <a:lnT w="15240">
-                      <a:solidFill>
-                        <a:srgbClr val="626669"/>
-                      </a:solidFill>
-                      <a:prstDash val="solid"/>
-                    </a:lnT>
-                    <a:lnB w="7620">
-                      <a:solidFill>
-                        <a:srgbClr val="626669"/>
-                      </a:solidFill>
-                      <a:prstDash val="solid"/>
-                    </a:lnB>
-                    <a:solidFill>
-                      <a:srgbClr val="FFFEF8"/>
-                    </a:solidFill>
-                  </a:tcPr>
-                </a:tc>
-                <a:tc>
-                  <a:txBody>
-                    <a:bodyPr wrap="square">
-                      <a:noAutofit/>
-                    </a:bodyPr>
-                    <a:lstStyle/>
-                    <a:p>
-                      <a:pPr algn="l">
-                        <a:lnSpc>
-                          <a:spcPts val="1897"/>
-                        </a:lnSpc>
-                        <a:buNone/>
-                        <a:defRPr sz="1650" b="0">
-                          <a:solidFill>
-                            <a:srgbClr val="303437"/>
-                          </a:solidFill>
-                          <a:latin typeface="Noto Sans"/>
-                        </a:defRPr>
-                      </a:pPr>
-                      <a:r>
-                        <a:rPr sz="1650" b="0" lang="ja-JP" altLang="en-US">
-                          <a:solidFill>
-                            <a:srgbClr val="303437"/>
-                          </a:solidFill>
-                          <a:latin typeface="Noto Sans"/>
-                          <a:ea typeface="Noto Sans CJK JP"/>
-                          <a:cs typeface="Noto Sans"/>
-                        </a:rPr>
-                        <a:t>意味</a:t>
-                      </a:r>
-                    </a:p>
-                  </a:txBody>
-                  <a:tcPr marL="63500" marR="63500" marT="38100" marB="38100" anchor="ctr">
-                    <a:lnL w="7620">
-                      <a:noFill/>
-                    </a:lnL>
-                    <a:lnR w="7620">
-                      <a:noFill/>
-                    </a:lnR>
-                    <a:lnT w="15240">
-                      <a:solidFill>
-                        <a:srgbClr val="626669"/>
-                      </a:solidFill>
-                      <a:prstDash val="solid"/>
-                    </a:lnT>
-                    <a:lnB w="7620">
-                      <a:solidFill>
-                        <a:srgbClr val="626669"/>
-                      </a:solidFill>
-                      <a:prstDash val="solid"/>
-                    </a:lnB>
-                    <a:solidFill>
-                      <a:srgbClr val="FFFEF8"/>
-                    </a:solidFill>
-                  </a:tcPr>
-                </a:tc>
-              </a:tr>
-              <a:tr h="355282">
-                <a:tc>
-                  <a:txBody>
-                    <a:bodyPr wrap="square">
-                      <a:noAutofit/>
-                    </a:bodyPr>
-                    <a:lstStyle/>
-                    <a:p>
-                      <a:pPr algn="l">
-                        <a:lnSpc>
-                          <a:spcPts val="1897"/>
-                        </a:lnSpc>
-                        <a:buNone/>
-                        <a:defRPr sz="1650" b="0">
-                          <a:solidFill>
-                            <a:srgbClr val="303437"/>
-                          </a:solidFill>
-                          <a:latin typeface="Noto Sans"/>
-                        </a:defRPr>
-                      </a:pPr>
-                      <a:r>
-                        <a:rPr sz="1650" b="0" lang="ja-JP" altLang="en-US">
-                          <a:solidFill>
-                            <a:srgbClr val="303437"/>
-                          </a:solidFill>
-                          <a:latin typeface="Noto Sans"/>
-                          <a:ea typeface="Noto Sans CJK JP"/>
-                          <a:cs typeface="Noto Sans"/>
-                        </a:rPr>
-                        <a:t>配布の整数インデックス</a:t>
-                      </a:r>
-                    </a:p>
-                  </a:txBody>
-                  <a:tcPr marL="63500" marR="63500" marT="38100" marB="38100" anchor="ctr">
-                    <a:lnL w="7620">
-                      <a:noFill/>
-                    </a:lnL>
-                    <a:lnR w="7620">
-                      <a:noFill/>
-                    </a:lnR>
-                    <a:lnT w="7620">
-                      <a:solidFill>
-                        <a:srgbClr val="626669"/>
-                      </a:solidFill>
-                      <a:prstDash val="solid"/>
-                    </a:lnT>
-                    <a:lnB w="7620">
-                      <a:noFill/>
-                    </a:lnB>
-                    <a:solidFill>
-                      <a:srgbClr val="FFFEF8"/>
-                    </a:solidFill>
-                  </a:tcPr>
-                </a:tc>
-                <a:tc>
-                  <a:txBody>
-                    <a:bodyPr wrap="square">
-                      <a:noAutofit/>
-                    </a:bodyPr>
-                    <a:lstStyle/>
-                    <a:p>
-                      <a:pPr algn="l">
-                        <a:lnSpc>
-                          <a:spcPts val="1897"/>
-                        </a:lnSpc>
-                        <a:buNone/>
-                        <a:defRPr sz="1650" b="0">
-                          <a:solidFill>
-                            <a:srgbClr val="303437"/>
-                          </a:solidFill>
-                          <a:latin typeface="Noto Sans"/>
-                        </a:defRPr>
-                      </a:pPr>
-                      <a:r>
-                        <a:rPr sz="1650" b="0" lang="ja-JP" altLang="en-US">
-                          <a:solidFill>
-                            <a:srgbClr val="303437"/>
-                          </a:solidFill>
-                          <a:latin typeface="Noto Sans"/>
-                          <a:ea typeface="Noto Sans CJK JP"/>
-                          <a:cs typeface="Noto Sans"/>
-                        </a:rPr>
-                        <a:t>8</a:t>
-                      </a:r>
-                    </a:p>
-                  </a:txBody>
-                  <a:tcPr marL="63500" marR="63500" marT="38100" marB="38100" anchor="ctr">
-                    <a:lnL w="7620">
-                      <a:noFill/>
-                    </a:lnL>
-                    <a:lnR w="7620">
-                      <a:noFill/>
-                    </a:lnR>
-                    <a:lnT w="7620">
-                      <a:solidFill>
-                        <a:srgbClr val="626669"/>
-                      </a:solidFill>
-                      <a:prstDash val="solid"/>
-                    </a:lnT>
-                    <a:lnB w="7620">
-                      <a:noFill/>
-                    </a:lnB>
-                    <a:solidFill>
-                      <a:srgbClr val="FFFEF8"/>
-                    </a:solidFill>
-                  </a:tcPr>
-                </a:tc>
-                <a:tc>
-                  <a:txBody>
-                    <a:bodyPr wrap="square">
-                      <a:noAutofit/>
-                    </a:bodyPr>
-                    <a:lstStyle/>
-                    <a:p>
-                      <a:pPr algn="l">
-                        <a:lnSpc>
-                          <a:spcPts val="1897"/>
-                        </a:lnSpc>
-                        <a:buNone/>
-                        <a:defRPr sz="1650" b="0">
-                          <a:solidFill>
-                            <a:srgbClr val="303437"/>
-                          </a:solidFill>
-                          <a:latin typeface="Noto Sans"/>
-                        </a:defRPr>
-                      </a:pPr>
-                      <a:r>
-                        <a:rPr sz="1650" b="0" lang="ja-JP" altLang="en-US">
-                          <a:solidFill>
-                            <a:srgbClr val="303437"/>
-                          </a:solidFill>
-                          <a:latin typeface="Noto Sans"/>
-                          <a:ea typeface="Noto Sans CJK JP"/>
-                          <a:cs typeface="Noto Sans"/>
-                        </a:rPr>
-                        <a:t>0始まりの位置</a:t>
-                      </a:r>
-                    </a:p>
-                  </a:txBody>
-                  <a:tcPr marL="63500" marR="63500" marT="38100" marB="38100" anchor="ctr">
-                    <a:lnL w="7620">
-                      <a:noFill/>
-                    </a:lnL>
-                    <a:lnR w="7620">
-                      <a:noFill/>
-                    </a:lnR>
-                    <a:lnT w="7620">
-                      <a:solidFill>
-                        <a:srgbClr val="626669"/>
-                      </a:solidFill>
-                      <a:prstDash val="solid"/>
-                    </a:lnT>
-                    <a:lnB w="7620">
-                      <a:noFill/>
-                    </a:lnB>
-                    <a:solidFill>
-                      <a:srgbClr val="FFFEF8"/>
-                    </a:solidFill>
-                  </a:tcPr>
-                </a:tc>
-              </a:tr>
-              <a:tr h="355282">
-                <a:tc>
-                  <a:txBody>
-                    <a:bodyPr wrap="square">
-                      <a:noAutofit/>
-                    </a:bodyPr>
-                    <a:lstStyle/>
-                    <a:p>
-                      <a:pPr algn="l">
-                        <a:lnSpc>
-                          <a:spcPts val="1897"/>
-                        </a:lnSpc>
-                        <a:buNone/>
-                        <a:defRPr sz="1650" b="0">
-                          <a:solidFill>
-                            <a:srgbClr val="303437"/>
-                          </a:solidFill>
-                          <a:latin typeface="Noto Sans"/>
-                        </a:defRPr>
-                      </a:pPr>
-                      <a:r>
-                        <a:rPr sz="1650" b="0" lang="ja-JP" altLang="en-US">
-                          <a:solidFill>
-                            <a:srgbClr val="303437"/>
-                          </a:solidFill>
-                          <a:latin typeface="Noto Sans"/>
-                          <a:ea typeface="Noto Sans CJK JP"/>
-                          <a:cs typeface="Noto Sans"/>
-                        </a:rPr>
-                        <a:t>ClassLabelの名前</a:t>
-                      </a:r>
-                    </a:p>
-                  </a:txBody>
-                  <a:tcPr marL="63500" marR="63500" marT="38100" marB="38100" anchor="ctr">
-                    <a:lnL w="7620">
-                      <a:noFill/>
-                    </a:lnL>
-                    <a:lnR w="7620">
-                      <a:noFill/>
-                    </a:lnR>
-                    <a:lnT w="7620">
-                      <a:noFill/>
-                    </a:lnT>
-                    <a:lnB w="7620">
-                      <a:noFill/>
-                    </a:lnB>
-                    <a:solidFill>
-                      <a:srgbClr val="FFFEF8"/>
-                    </a:solidFill>
-                  </a:tcPr>
-                </a:tc>
-                <a:tc>
-                  <a:txBody>
-                    <a:bodyPr wrap="square">
-                      <a:noAutofit/>
-                    </a:bodyPr>
-                    <a:lstStyle/>
-                    <a:p>
-                      <a:pPr algn="l">
-                        <a:lnSpc>
-                          <a:spcPts val="1897"/>
-                        </a:lnSpc>
-                        <a:buNone/>
-                        <a:defRPr sz="1650" b="0">
-                          <a:solidFill>
-                            <a:srgbClr val="303437"/>
-                          </a:solidFill>
-                          <a:latin typeface="Noto Sans"/>
-                        </a:defRPr>
-                      </a:pPr>
-                      <a:r>
-                        <a:rPr sz="1650" b="0" lang="ja-JP" altLang="en-US">
-                          <a:solidFill>
-                            <a:srgbClr val="303437"/>
-                          </a:solidFill>
-                          <a:latin typeface="Noto Sans"/>
-                          <a:ea typeface="Noto Sans CJK JP"/>
-                          <a:cs typeface="Noto Sans"/>
-                        </a:rPr>
-                        <a:t>9</a:t>
-                      </a:r>
-                    </a:p>
-                  </a:txBody>
-                  <a:tcPr marL="63500" marR="63500" marT="38100" marB="38100" anchor="ctr">
-                    <a:lnL w="7620">
-                      <a:noFill/>
-                    </a:lnL>
-                    <a:lnR w="7620">
-                      <a:noFill/>
-                    </a:lnR>
-                    <a:lnT w="7620">
-                      <a:noFill/>
-                    </a:lnT>
-                    <a:lnB w="7620">
-                      <a:noFill/>
-                    </a:lnB>
-                    <a:solidFill>
-                      <a:srgbClr val="FFFEF8"/>
-                    </a:solidFill>
-                  </a:tcPr>
-                </a:tc>
-                <a:tc>
-                  <a:txBody>
-                    <a:bodyPr wrap="square">
-                      <a:noAutofit/>
-                    </a:bodyPr>
-                    <a:lstStyle/>
-                    <a:p>
-                      <a:pPr algn="l">
-                        <a:lnSpc>
-                          <a:spcPts val="1897"/>
-                        </a:lnSpc>
-                        <a:buNone/>
-                        <a:defRPr sz="1650" b="0">
-                          <a:solidFill>
-                            <a:srgbClr val="303437"/>
-                          </a:solidFill>
-                          <a:latin typeface="Noto Sans"/>
-                        </a:defRPr>
-                      </a:pPr>
-                      <a:r>
-                        <a:rPr sz="1650" b="0" lang="ja-JP" altLang="en-US">
-                          <a:solidFill>
-                            <a:srgbClr val="303437"/>
-                          </a:solidFill>
-                          <a:latin typeface="Noto Sans"/>
-                          <a:ea typeface="Noto Sans CJK JP"/>
-                          <a:cs typeface="Noto Sans"/>
-                        </a:rPr>
-                        <a:t>SCDBの分野コード</a:t>
-                      </a:r>
-                    </a:p>
-                  </a:txBody>
-                  <a:tcPr marL="63500" marR="63500" marT="38100" marB="38100" anchor="ctr">
-                    <a:lnL w="7620">
-                      <a:noFill/>
-                    </a:lnL>
-                    <a:lnR w="7620">
-                      <a:noFill/>
-                    </a:lnR>
-                    <a:lnT w="7620">
-                      <a:noFill/>
-                    </a:lnT>
-                    <a:lnB w="7620">
-                      <a:noFill/>
-                    </a:lnB>
-                    <a:solidFill>
-                      <a:srgbClr val="FFFEF8"/>
-                    </a:solidFill>
-                  </a:tcPr>
-                </a:tc>
-              </a:tr>
-              <a:tr h="355282">
-                <a:tc>
-                  <a:txBody>
-                    <a:bodyPr wrap="square">
-                      <a:noAutofit/>
-                    </a:bodyPr>
-                    <a:lstStyle/>
-                    <a:p>
-                      <a:pPr algn="l">
-                        <a:lnSpc>
-                          <a:spcPts val="1897"/>
-                        </a:lnSpc>
-                        <a:buNone/>
-                        <a:defRPr sz="1650" b="0">
-                          <a:solidFill>
-                            <a:srgbClr val="303437"/>
-                          </a:solidFill>
-                          <a:latin typeface="Noto Sans"/>
-                        </a:defRPr>
-                      </a:pPr>
-                      <a:r>
-                        <a:rPr sz="1650" b="0" lang="ja-JP" altLang="en-US">
-                          <a:solidFill>
-                            <a:srgbClr val="303437"/>
-                          </a:solidFill>
-                          <a:latin typeface="Noto Sans"/>
-                          <a:ea typeface="Noto Sans CJK JP"/>
-                          <a:cs typeface="Noto Sans"/>
-                        </a:rPr>
-                        <a:t>HELMの参照文字列</a:t>
-                      </a:r>
-                    </a:p>
-                  </a:txBody>
-                  <a:tcPr marL="63500" marR="63500" marT="38100" marB="38100" anchor="ctr">
-                    <a:lnL w="7620">
-                      <a:noFill/>
-                    </a:lnL>
-                    <a:lnR w="7620">
-                      <a:noFill/>
-                    </a:lnR>
-                    <a:lnT w="7620">
-                      <a:noFill/>
-                    </a:lnT>
-                    <a:lnB w="7620">
-                      <a:noFill/>
-                    </a:lnB>
-                    <a:solidFill>
-                      <a:srgbClr val="FFFEF8"/>
-                    </a:solidFill>
-                  </a:tcPr>
-                </a:tc>
-                <a:tc>
-                  <a:txBody>
-                    <a:bodyPr wrap="square">
-                      <a:noAutofit/>
-                    </a:bodyPr>
-                    <a:lstStyle/>
-                    <a:p>
-                      <a:pPr algn="l">
-                        <a:lnSpc>
-                          <a:spcPts val="1897"/>
-                        </a:lnSpc>
-                        <a:buNone/>
-                        <a:defRPr sz="1650" b="0">
-                          <a:solidFill>
-                            <a:srgbClr val="303437"/>
-                          </a:solidFill>
-                          <a:latin typeface="Noto Sans"/>
-                        </a:defRPr>
-                      </a:pPr>
-                      <a:r>
-                        <a:rPr sz="1650" b="0" lang="ja-JP" altLang="en-US">
-                          <a:solidFill>
-                            <a:srgbClr val="303437"/>
-                          </a:solidFill>
-                          <a:latin typeface="Noto Sans"/>
-                          <a:ea typeface="Noto Sans CJK JP"/>
-                          <a:cs typeface="Noto Sans"/>
-                        </a:rPr>
-                        <a:t>9</a:t>
-                      </a:r>
-                    </a:p>
-                  </a:txBody>
-                  <a:tcPr marL="63500" marR="63500" marT="38100" marB="38100" anchor="ctr">
-                    <a:lnL w="7620">
-                      <a:noFill/>
-                    </a:lnL>
-                    <a:lnR w="7620">
-                      <a:noFill/>
-                    </a:lnR>
-                    <a:lnT w="7620">
-                      <a:noFill/>
-                    </a:lnT>
-                    <a:lnB w="7620">
-                      <a:noFill/>
-                    </a:lnB>
-                    <a:solidFill>
-                      <a:srgbClr val="FFFEF8"/>
-                    </a:solidFill>
-                  </a:tcPr>
-                </a:tc>
-                <a:tc>
-                  <a:txBody>
-                    <a:bodyPr wrap="square">
-                      <a:noAutofit/>
-                    </a:bodyPr>
-                    <a:lstStyle/>
-                    <a:p>
-                      <a:pPr algn="l">
-                        <a:lnSpc>
-                          <a:spcPts val="1897"/>
-                        </a:lnSpc>
-                        <a:buNone/>
-                        <a:defRPr sz="1650" b="0">
-                          <a:solidFill>
-                            <a:srgbClr val="303437"/>
-                          </a:solidFill>
-                          <a:latin typeface="Noto Sans"/>
-                        </a:defRPr>
-                      </a:pPr>
-                      <a:r>
-                        <a:rPr sz="1650" b="0" lang="ja-JP" altLang="en-US">
-                          <a:solidFill>
-                            <a:srgbClr val="303437"/>
-                          </a:solidFill>
-                          <a:latin typeface="Noto Sans"/>
-                          <a:ea typeface="Noto Sans CJK JP"/>
-                          <a:cs typeface="Noto Sans"/>
-                        </a:rPr>
-                        <a:t>ClassLabel名から作る</a:t>
-                      </a:r>
-                    </a:p>
-                  </a:txBody>
-                  <a:tcPr marL="63500" marR="63500" marT="38100" marB="38100" anchor="ctr">
-                    <a:lnL w="7620">
-                      <a:noFill/>
-                    </a:lnL>
-                    <a:lnR w="7620">
-                      <a:noFill/>
-                    </a:lnR>
-                    <a:lnT w="7620">
-                      <a:noFill/>
-                    </a:lnT>
-                    <a:lnB w="7620">
-                      <a:noFill/>
-                    </a:lnB>
-                    <a:solidFill>
-                      <a:srgbClr val="FFFEF8"/>
-                    </a:solidFill>
-                  </a:tcPr>
-                </a:tc>
-              </a:tr>
-              <a:tr h="355282">
-                <a:tc>
-                  <a:txBody>
-                    <a:bodyPr wrap="square">
-                      <a:noAutofit/>
-                    </a:bodyPr>
-                    <a:lstStyle/>
-                    <a:p>
-                      <a:pPr algn="l">
-                        <a:lnSpc>
-                          <a:spcPts val="1897"/>
-                        </a:lnSpc>
-                        <a:buNone/>
-                        <a:defRPr sz="1650" b="0">
-                          <a:solidFill>
-                            <a:srgbClr val="303437"/>
-                          </a:solidFill>
-                          <a:latin typeface="Noto Sans"/>
-                        </a:defRPr>
-                      </a:pPr>
-                      <a:r>
-                        <a:rPr sz="1650" b="0" lang="ja-JP" altLang="en-US">
-                          <a:solidFill>
-                            <a:srgbClr val="303437"/>
-                          </a:solidFill>
-                          <a:latin typeface="Noto Sans"/>
-                          <a:ea typeface="Noto Sans CJK JP"/>
-                          <a:cs typeface="Noto Sans"/>
-                        </a:rPr>
-                        <a:t>HELM説明の8</a:t>
-                      </a:r>
-                    </a:p>
-                  </a:txBody>
-                  <a:tcPr marL="63500" marR="63500" marT="38100" marB="38100" anchor="ctr">
-                    <a:lnL w="7620">
-                      <a:noFill/>
-                    </a:lnL>
-                    <a:lnR w="7620">
-                      <a:noFill/>
-                    </a:lnR>
-                    <a:lnT w="7620">
-                      <a:noFill/>
-                    </a:lnT>
-                    <a:lnB w="7620">
-                      <a:noFill/>
-                    </a:lnB>
-                    <a:solidFill>
-                      <a:srgbClr val="FFFEF8"/>
-                    </a:solidFill>
-                  </a:tcPr>
-                </a:tc>
-                <a:tc>
-                  <a:txBody>
-                    <a:bodyPr wrap="square">
-                      <a:noAutofit/>
-                    </a:bodyPr>
-                    <a:lstStyle/>
-                    <a:p>
-                      <a:pPr algn="l">
-                        <a:lnSpc>
-                          <a:spcPts val="1897"/>
-                        </a:lnSpc>
-                        <a:buNone/>
-                        <a:defRPr sz="1650" b="0">
-                          <a:solidFill>
-                            <a:srgbClr val="303437"/>
-                          </a:solidFill>
-                          <a:latin typeface="Noto Sans"/>
-                        </a:defRPr>
-                      </a:pPr>
-                      <a:r>
-                        <a:rPr sz="1650" b="0" lang="ja-JP" altLang="en-US">
-                          <a:solidFill>
-                            <a:srgbClr val="303437"/>
-                          </a:solidFill>
-                          <a:latin typeface="Noto Sans"/>
-                          <a:ea typeface="Noto Sans CJK JP"/>
-                          <a:cs typeface="Noto Sans"/>
-                        </a:rPr>
-                        <a:t>Judicial Power</a:t>
-                      </a:r>
-                    </a:p>
-                  </a:txBody>
-                  <a:tcPr marL="63500" marR="63500" marT="38100" marB="38100" anchor="ctr">
-                    <a:lnL w="7620">
-                      <a:noFill/>
-                    </a:lnL>
-                    <a:lnR w="7620">
-                      <a:noFill/>
-                    </a:lnR>
-                    <a:lnT w="7620">
-                      <a:noFill/>
-                    </a:lnT>
-                    <a:lnB w="7620">
-                      <a:noFill/>
-                    </a:lnB>
-                    <a:solidFill>
-                      <a:srgbClr val="FFFEF8"/>
-                    </a:solidFill>
-                  </a:tcPr>
-                </a:tc>
-                <a:tc>
-                  <a:txBody>
-                    <a:bodyPr wrap="square">
-                      <a:noAutofit/>
-                    </a:bodyPr>
-                    <a:lstStyle/>
-                    <a:p>
-                      <a:pPr algn="l">
-                        <a:lnSpc>
-                          <a:spcPts val="1897"/>
-                        </a:lnSpc>
-                        <a:buNone/>
-                        <a:defRPr sz="1650" b="0">
-                          <a:solidFill>
-                            <a:srgbClr val="303437"/>
-                          </a:solidFill>
-                          <a:latin typeface="Noto Sans"/>
-                        </a:defRPr>
-                      </a:pPr>
-                      <a:r>
-                        <a:rPr sz="1650" b="0" lang="ja-JP" altLang="en-US">
-                          <a:solidFill>
-                            <a:srgbClr val="303437"/>
-                          </a:solidFill>
-                          <a:latin typeface="Noto Sans"/>
-                          <a:ea typeface="Noto Sans CJK JP"/>
-                          <a:cs typeface="Noto Sans"/>
-                        </a:rPr>
-                        <a:t>0始まりで列挙</a:t>
-                      </a:r>
-                    </a:p>
-                  </a:txBody>
-                  <a:tcPr marL="63500" marR="63500" marT="38100" marB="38100" anchor="ctr">
-                    <a:lnL w="7620">
-                      <a:noFill/>
-                    </a:lnL>
-                    <a:lnR w="7620">
-                      <a:noFill/>
-                    </a:lnR>
-                    <a:lnT w="7620">
-                      <a:noFill/>
-                    </a:lnT>
-                    <a:lnB w="7620">
-                      <a:noFill/>
-                    </a:lnB>
-                    <a:solidFill>
-                      <a:srgbClr val="FFFEF8"/>
-                    </a:solidFill>
-                  </a:tcPr>
-                </a:tc>
-              </a:tr>
-              <a:tr h="355282">
-                <a:tc>
-                  <a:txBody>
-                    <a:bodyPr wrap="square">
-                      <a:noAutofit/>
-                    </a:bodyPr>
-                    <a:lstStyle/>
-                    <a:p>
-                      <a:pPr algn="l">
-                        <a:lnSpc>
-                          <a:spcPts val="1897"/>
-                        </a:lnSpc>
-                        <a:buNone/>
-                        <a:defRPr sz="1650" b="0">
-                          <a:solidFill>
-                            <a:srgbClr val="303437"/>
-                          </a:solidFill>
-                          <a:latin typeface="Noto Sans"/>
-                        </a:defRPr>
-                      </a:pPr>
-                      <a:r>
-                        <a:rPr sz="1650" b="0" lang="ja-JP" altLang="en-US">
-                          <a:solidFill>
-                            <a:srgbClr val="303437"/>
-                          </a:solidFill>
-                          <a:latin typeface="Noto Sans"/>
-                          <a:ea typeface="Noto Sans CJK JP"/>
-                          <a:cs typeface="Noto Sans"/>
-                        </a:rPr>
-                        <a:t>HELM説明の9</a:t>
-                      </a:r>
-                    </a:p>
-                  </a:txBody>
-                  <a:tcPr marL="63500" marR="63500" marT="38100" marB="38100" anchor="ctr">
-                    <a:lnL w="7620">
-                      <a:noFill/>
-                    </a:lnL>
-                    <a:lnR w="7620">
-                      <a:noFill/>
-                    </a:lnR>
-                    <a:lnT w="7620">
-                      <a:noFill/>
-                    </a:lnT>
-                    <a:lnB w="15240">
-                      <a:solidFill>
-                        <a:srgbClr val="626669"/>
-                      </a:solidFill>
-                      <a:prstDash val="solid"/>
-                    </a:lnB>
-                    <a:solidFill>
-                      <a:srgbClr val="FFFEF8"/>
-                    </a:solidFill>
-                  </a:tcPr>
-                </a:tc>
-                <a:tc>
-                  <a:txBody>
-                    <a:bodyPr wrap="square">
-                      <a:noAutofit/>
-                    </a:bodyPr>
-                    <a:lstStyle/>
-                    <a:p>
-                      <a:pPr algn="l">
-                        <a:lnSpc>
-                          <a:spcPts val="1897"/>
-                        </a:lnSpc>
-                        <a:buNone/>
-                        <a:defRPr sz="1650" b="0">
-                          <a:solidFill>
-                            <a:srgbClr val="303437"/>
-                          </a:solidFill>
-                          <a:latin typeface="Noto Sans"/>
-                        </a:defRPr>
-                      </a:pPr>
-                      <a:r>
-                        <a:rPr sz="1650" b="0" lang="ja-JP" altLang="en-US">
-                          <a:solidFill>
-                            <a:srgbClr val="303437"/>
-                          </a:solidFill>
-                          <a:latin typeface="Noto Sans"/>
-                          <a:ea typeface="Noto Sans CJK JP"/>
-                          <a:cs typeface="Noto Sans"/>
-                        </a:rPr>
-                        <a:t>Federalism</a:t>
-                      </a:r>
-                    </a:p>
-                  </a:txBody>
-                  <a:tcPr marL="63500" marR="63500" marT="38100" marB="38100" anchor="ctr">
-                    <a:lnL w="7620">
-                      <a:noFill/>
-                    </a:lnL>
-                    <a:lnR w="7620">
-                      <a:noFill/>
-                    </a:lnR>
-                    <a:lnT w="7620">
-                      <a:noFill/>
-                    </a:lnT>
-                    <a:lnB w="15240">
-                      <a:solidFill>
-                        <a:srgbClr val="626669"/>
-                      </a:solidFill>
-                      <a:prstDash val="solid"/>
-                    </a:lnB>
-                    <a:solidFill>
-                      <a:srgbClr val="FFFEF8"/>
-                    </a:solidFill>
-                  </a:tcPr>
-                </a:tc>
-                <a:tc>
-                  <a:txBody>
-                    <a:bodyPr wrap="square">
-                      <a:noAutofit/>
-                    </a:bodyPr>
-                    <a:lstStyle/>
-                    <a:p>
-                      <a:pPr algn="l">
-                        <a:lnSpc>
-                          <a:spcPts val="1897"/>
-                        </a:lnSpc>
-                        <a:buNone/>
-                        <a:defRPr sz="1650" b="0">
-                          <a:solidFill>
-                            <a:srgbClr val="303437"/>
-                          </a:solidFill>
-                          <a:latin typeface="Noto Sans"/>
-                        </a:defRPr>
-                      </a:pPr>
-                      <a:r>
-                        <a:rPr sz="1650" b="0" lang="ja-JP" altLang="en-US">
-                          <a:solidFill>
-                            <a:srgbClr val="303437"/>
-                          </a:solidFill>
-                          <a:latin typeface="Noto Sans"/>
-                          <a:ea typeface="Noto Sans CJK JP"/>
-                          <a:cs typeface="Noto Sans"/>
-                        </a:rPr>
-                        <a:t>参照9と意味がずれる</a:t>
-                      </a:r>
-                    </a:p>
-                  </a:txBody>
-                  <a:tcPr marL="63500" marR="63500" marT="38100" marB="38100" anchor="ctr">
-                    <a:lnL w="7620">
-                      <a:noFill/>
-                    </a:lnL>
-                    <a:lnR w="7620">
-                      <a:noFill/>
-                    </a:lnR>
-                    <a:lnT w="7620">
-                      <a:noFill/>
-                    </a:lnT>
-                    <a:lnB w="15240">
-                      <a:solidFill>
-                        <a:srgbClr val="626669"/>
-                      </a:solidFill>
-                      <a:prstDash val="solid"/>
-                    </a:lnB>
-                    <a:solidFill>
-                      <a:srgbClr val="FFFEF8"/>
-                    </a:solidFill>
-                  </a:tcPr>
-                </a:tc>
-              </a:tr>
-            </a:tbl>
-          </a:graphicData>
-        </a:graphic>
-      </p:graphicFrame>
-      <p:sp>
-        <p:nvSpPr>
-          <p:cNvPr id="5" name="TextBox 4"/>
-          <p:cNvSpPr txBox="1"/>
-          <p:nvPr/>
-        </p:nvSpPr>
-        <p:spPr>
-          <a:xfrm>
-            <a:off x="594360" y="3731895"/>
-            <a:ext cx="7955279" cy="658368"/>
-          </a:xfrm>
-          <a:prstGeom prst="rect">
-            <a:avLst/>
-          </a:prstGeom>
-          <a:noFill/>
-        </p:spPr>
-        <p:txBody>
-          <a:bodyPr wrap="square" lIns="0" rIns="0" tIns="0" bIns="0">
-            <a:noAutofit/>
-          </a:bodyPr>
-          <a:lstStyle/>
-          <a:p>
-            <a:pPr algn="l">
-              <a:lnSpc>
-                <a:spcPts val="1568"/>
-              </a:lnSpc>
-              <a:spcBef>
-                <a:spcPts val="0"/>
-              </a:spcBef>
-              <a:spcAft>
-                <a:spcPts val="0"/>
-              </a:spcAft>
-              <a:buNone/>
-              <a:defRPr sz="1400" b="0">
-                <a:solidFill>
-                  <a:srgbClr val="303437"/>
-                </a:solidFill>
-                <a:latin typeface="Noto Sans"/>
-              </a:defRPr>
-            </a:pPr>
-            <a:r>
-              <a:rPr sz="1400" b="0" lang="ja-JP" altLang="en-US">
-                <a:solidFill>
-                  <a:srgbClr val="303437"/>
-                </a:solidFill>
-                <a:latin typeface="Noto Sans"/>
-                <a:ea typeface="Noto Sans CJK JP"/>
-                <a:cs typeface="Noto Sans"/>
-              </a:rPr>
-              <a:t>v0.4.0実装と固定配布を照合。実行成績への影響は、公開runがないため観測していない。</a:t>
-            </a:r>
-          </a:p>
-        </p:txBody>
-      </p:sp>
-      <p:sp>
-        <p:nvSpPr>
-          <p:cNvPr id="6" name="sources"/>
-          <p:cNvSpPr txBox="1"/>
-          <p:nvPr/>
-        </p:nvSpPr>
-        <p:spPr>
-          <a:xfrm>
-            <a:off x="502920" y="4700016"/>
-            <a:ext cx="8183879" cy="530352"/>
-          </a:xfrm>
-          <a:prstGeom prst="rect">
-            <a:avLst/>
-          </a:prstGeom>
-          <a:noFill/>
-        </p:spPr>
-        <p:txBody>
-          <a:bodyPr wrap="square" lIns="0" rIns="0" tIns="0" bIns="0">
-            <a:noAutofit/>
-          </a:bodyPr>
-          <a:lstStyle/>
-          <a:p>
-            <a:pPr algn="l">
-              <a:lnSpc>
-                <a:spcPts val="940"/>
-              </a:lnSpc>
-              <a:spcBef>
-                <a:spcPts val="0"/>
-              </a:spcBef>
-              <a:spcAft>
-                <a:spcPts val="140"/>
-              </a:spcAft>
-              <a:buNone/>
-              <a:defRPr sz="810" b="0">
-                <a:solidFill>
-                  <a:srgbClr val="303437"/>
-                </a:solidFill>
-                <a:latin typeface="Noto Sans"/>
-              </a:defRPr>
-            </a:pPr>
-            <a:r>
-              <a:rPr sz="810" b="0" lang="ja-JP" altLang="en-US">
-                <a:solidFill>
-                  <a:srgbClr val="626669"/>
-                </a:solidFill>
-                <a:latin typeface="Noto Sans"/>
-                <a:ea typeface="Noto Sans CJK JP"/>
-                <a:cs typeface="Noto Sans"/>
-              </a:rPr>
-              <a:t>[1] Stanford CRFM. LexGLUEScenario, HELM v0.4.0.</a:t>
-            </a:r>
-            <a:r>
-              <a:rPr sz="810" b="0" lang="ja-JP" altLang="en-US">
-                <a:solidFill>
-                  <a:srgbClr val="626669"/>
-                </a:solidFill>
-                <a:latin typeface="Noto Sans"/>
-                <a:ea typeface="Noto Sans CJK JP"/>
-                <a:cs typeface="Noto Sans"/>
-              </a:rPr>
-              <a:t>  </a:t>
-            </a:r>
-            <a:r>
-              <a:rPr sz="810" b="0" lang="ja-JP" altLang="en-US">
-                <a:solidFill>
-                  <a:srgbClr val="626669"/>
-                </a:solidFill>
-                <a:latin typeface="Noto Sans"/>
-                <a:ea typeface="Noto Sans CJK JP"/>
-                <a:cs typeface="Noto Sans"/>
-                <a:hlinkClick r:id="rId2"/>
-              </a:rPr>
-              <a:t>https://github.com/stanford-crfm/helm/blob/v0.4.0/src/helm/benchmark/scenarios/lex_glue_scenario.py</a:t>
-            </a:r>
-          </a:p>
-        </p:txBody>
-      </p:sp>
-    </p:spTree>
-  </p:cSld>
-  <p:clrMapOvr>
-    <a:masterClrMapping/>
-  </p:clrMapOvr>
-</p:sld>
-</file>
-
-<file path=ppt/slides/slide49.xml><?xml version="1.0" encoding="utf-8"?>
-<p:sld xmlns:a="http://schemas.openxmlformats.org/drawingml/2006/main" xmlns:p="http://schemas.openxmlformats.org/presentationml/2006/main" xmlns:r="http://schemas.openxmlformats.org/officeDocument/2006/relationships">
-  <p:cSld>
-    <p:spTree>
-      <p:nvGrpSpPr>
-        <p:cNvPr id="1" name=""/>
-        <p:cNvGrpSpPr/>
-        <p:nvPr/>
-      </p:nvGrpSpPr>
-      <p:grpSpPr/>
-      <p:sp>
-        <p:nvSpPr>
-          <p:cNvPr id="2" name="Title 1"/>
-          <p:cNvSpPr>
-            <a:spLocks noGrp="1"/>
-          </p:cNvSpPr>
-          <p:nvPr>
-            <p:ph type="title"/>
-          </p:nvPr>
-        </p:nvSpPr>
-        <p:spPr>
-          <a:xfrm>
-            <a:off x="468172" y="650138"/>
-            <a:ext cx="8206740" cy="616305"/>
-          </a:xfrm>
-        </p:spPr>
-        <p:txBody>
-          <a:bodyPr wrap="square" lIns="0" rIns="0" tIns="0" bIns="0">
-            <a:noAutofit/>
-          </a:bodyPr>
-          <a:lstStyle/>
-          <a:p>
-            <a:pPr algn="l">
-              <a:lnSpc>
-                <a:spcPct val="110000"/>
-              </a:lnSpc>
-              <a:buNone/>
-              <a:defRPr sz="2800" b="0">
-                <a:solidFill>
-                  <a:srgbClr val="303437"/>
-                </a:solidFill>
-                <a:latin typeface="Noto Sans"/>
-              </a:defRPr>
-            </a:pPr>
-            <a:r>
-              <a:rPr sz="2800" b="1" lang="ja-JP" altLang="en-US">
-                <a:solidFill>
-                  <a:srgbClr val="303437"/>
-                </a:solidFill>
-                <a:latin typeface="Noto Sans"/>
-                <a:ea typeface="Noto Sans CJK JP"/>
-                <a:cs typeface="Noto Sans"/>
-              </a:rPr>
-              <a:t>論文と固定配布の差を記録する</a:t>
-            </a:r>
-          </a:p>
-        </p:txBody>
-      </p:sp>
-      <p:sp>
-        <p:nvSpPr>
-          <p:cNvPr id="3" name="Title 2"/>
-          <p:cNvSpPr>
-            <a:spLocks noGrp="1"/>
-          </p:cNvSpPr>
-          <p:nvPr>
-            <p:ph type="title" idx="2"/>
-          </p:nvPr>
-        </p:nvSpPr>
-        <p:spPr>
-          <a:xfrm>
-            <a:off x="75895" y="0"/>
-            <a:ext cx="8115300" cy="480060"/>
-          </a:xfrm>
-        </p:spPr>
-        <p:txBody>
-          <a:bodyPr wrap="square" lIns="0" rIns="0" tIns="0" bIns="0" anchor="ctr">
-            <a:noAutofit/>
-          </a:bodyPr>
-          <a:lstStyle/>
-          <a:p>
-            <a:pPr algn="l">
-              <a:lnSpc>
-                <a:spcPct val="110000"/>
-              </a:lnSpc>
-              <a:buNone/>
-              <a:defRPr sz="1400" b="0">
-                <a:solidFill>
-                  <a:srgbClr val="303437"/>
-                </a:solidFill>
-                <a:latin typeface="Noto Sans"/>
-              </a:defRPr>
-            </a:pPr>
-            <a:r>
-              <a:rPr sz="1400" b="1" lang="ja-JP" altLang="en-US">
-                <a:solidFill>
-                  <a:srgbClr val="FFFEF8"/>
-                </a:solidFill>
-                <a:latin typeface="Noto Sans"/>
-                <a:ea typeface="Noto Sans CJK JP"/>
-                <a:cs typeface="Noto Sans"/>
-              </a:rPr>
-              <a:t>Appendix: 2. 配布・実装の詳しい条件</a:t>
-            </a:r>
-          </a:p>
-        </p:txBody>
-      </p:sp>
-      <p:graphicFrame>
-        <p:nvGraphicFramePr>
-          <p:cNvPr id="4" name="Table 3"/>
-          <p:cNvGraphicFramePr>
-            <a:graphicFrameLocks noGrp="1"/>
-          </p:cNvGraphicFramePr>
-          <p:nvPr/>
-        </p:nvGraphicFramePr>
-        <p:xfrm>
-          <a:off x="548640" y="1508760"/>
-          <a:ext cx="8046720" cy="2131692"/>
-        </p:xfrm>
-        <a:graphic>
-          <a:graphicData uri="http://schemas.openxmlformats.org/drawingml/2006/table">
-            <a:tbl>
-              <a:tblPr firstRow="0" bandRow="0"/>
-              <a:tblGrid>
-                <a:gridCol w="2743200"/>
-                <a:gridCol w="2651760"/>
-                <a:gridCol w="2651760"/>
-              </a:tblGrid>
-              <a:tr h="355282">
-                <a:tc>
-                  <a:txBody>
-                    <a:bodyPr wrap="square">
-                      <a:noAutofit/>
-                    </a:bodyPr>
-                    <a:lstStyle/>
-                    <a:p>
-                      <a:pPr algn="l">
-                        <a:lnSpc>
-                          <a:spcPts val="1897"/>
-                        </a:lnSpc>
-                        <a:buNone/>
-                        <a:defRPr sz="1650" b="0">
-                          <a:solidFill>
-                            <a:srgbClr val="303437"/>
-                          </a:solidFill>
-                          <a:latin typeface="Noto Sans"/>
-                        </a:defRPr>
-                      </a:pPr>
-                      <a:r>
-                        <a:rPr sz="1650" b="0" lang="ja-JP" altLang="en-US">
-                          <a:solidFill>
-                            <a:srgbClr val="303437"/>
-                          </a:solidFill>
-                          <a:latin typeface="Noto Sans"/>
-                          <a:ea typeface="Noto Sans CJK JP"/>
-                          <a:cs typeface="Noto Sans"/>
-                        </a:rPr>
-                        <a:t>項目</a:t>
-                      </a:r>
-                    </a:p>
-                  </a:txBody>
-                  <a:tcPr marL="63500" marR="63500" marT="38100" marB="38100" anchor="ctr">
-                    <a:lnL w="7620">
-                      <a:noFill/>
-                    </a:lnL>
-                    <a:lnR w="7620">
-                      <a:noFill/>
-                    </a:lnR>
-                    <a:lnT w="15240">
-                      <a:solidFill>
-                        <a:srgbClr val="626669"/>
-                      </a:solidFill>
-                      <a:prstDash val="solid"/>
-                    </a:lnT>
-                    <a:lnB w="7620">
-                      <a:solidFill>
-                        <a:srgbClr val="626669"/>
-                      </a:solidFill>
-                      <a:prstDash val="solid"/>
-                    </a:lnB>
-                    <a:solidFill>
-                      <a:srgbClr val="FFFEF8"/>
-                    </a:solidFill>
-                  </a:tcPr>
-                </a:tc>
-                <a:tc>
-                  <a:txBody>
-                    <a:bodyPr wrap="square">
-                      <a:noAutofit/>
-                    </a:bodyPr>
-                    <a:lstStyle/>
-                    <a:p>
-                      <a:pPr algn="l">
-                        <a:lnSpc>
-                          <a:spcPts val="1897"/>
-                        </a:lnSpc>
-                        <a:buNone/>
-                        <a:defRPr sz="1650" b="0">
-                          <a:solidFill>
-                            <a:srgbClr val="303437"/>
-                          </a:solidFill>
-                          <a:latin typeface="Noto Sans"/>
-                        </a:defRPr>
-                      </a:pPr>
-                      <a:r>
-                        <a:rPr sz="1650" b="0" lang="ja-JP" altLang="en-US">
-                          <a:solidFill>
-                            <a:srgbClr val="303437"/>
-                          </a:solidFill>
-                          <a:latin typeface="Noto Sans"/>
-                          <a:ea typeface="Noto Sans CJK JP"/>
-                          <a:cs typeface="Noto Sans"/>
-                        </a:rPr>
-                        <a:t>2022年の論文</a:t>
-                      </a:r>
-                    </a:p>
-                  </a:txBody>
-                  <a:tcPr marL="63500" marR="63500" marT="38100" marB="38100" anchor="ctr">
-                    <a:lnL w="7620">
-                      <a:noFill/>
-                    </a:lnL>
-                    <a:lnR w="7620">
-                      <a:noFill/>
-                    </a:lnR>
-                    <a:lnT w="15240">
-                      <a:solidFill>
-                        <a:srgbClr val="626669"/>
-                      </a:solidFill>
-                      <a:prstDash val="solid"/>
-                    </a:lnT>
-                    <a:lnB w="7620">
-                      <a:solidFill>
-                        <a:srgbClr val="626669"/>
-                      </a:solidFill>
-                      <a:prstDash val="solid"/>
-                    </a:lnB>
-                    <a:solidFill>
-                      <a:srgbClr val="FFFEF8"/>
-                    </a:solidFill>
-                  </a:tcPr>
-                </a:tc>
-                <a:tc>
-                  <a:txBody>
-                    <a:bodyPr wrap="square">
-                      <a:noAutofit/>
-                    </a:bodyPr>
-                    <a:lstStyle/>
-                    <a:p>
-                      <a:pPr algn="l">
-                        <a:lnSpc>
-                          <a:spcPts val="1897"/>
-                        </a:lnSpc>
-                        <a:buNone/>
-                        <a:defRPr sz="1650" b="0">
-                          <a:solidFill>
-                            <a:srgbClr val="303437"/>
-                          </a:solidFill>
-                          <a:latin typeface="Noto Sans"/>
-                        </a:defRPr>
-                      </a:pPr>
-                      <a:r>
-                        <a:rPr sz="1650" b="0" lang="ja-JP" altLang="en-US">
-                          <a:solidFill>
-                            <a:srgbClr val="303437"/>
-                          </a:solidFill>
-                          <a:latin typeface="Noto Sans"/>
-                          <a:ea typeface="Noto Sans CJK JP"/>
-                          <a:cs typeface="Noto Sans"/>
-                        </a:rPr>
-                        <a:t>固定配布 c23fdff…</a:t>
-                      </a:r>
-                    </a:p>
-                  </a:txBody>
-                  <a:tcPr marL="63500" marR="63500" marT="38100" marB="38100" anchor="ctr">
-                    <a:lnL w="7620">
-                      <a:noFill/>
-                    </a:lnL>
-                    <a:lnR w="7620">
-                      <a:noFill/>
-                    </a:lnR>
-                    <a:lnT w="15240">
-                      <a:solidFill>
-                        <a:srgbClr val="626669"/>
-                      </a:solidFill>
-                      <a:prstDash val="solid"/>
-                    </a:lnT>
-                    <a:lnB w="7620">
-                      <a:solidFill>
-                        <a:srgbClr val="626669"/>
-                      </a:solidFill>
-                      <a:prstDash val="solid"/>
-                    </a:lnB>
-                    <a:solidFill>
-                      <a:srgbClr val="FFFEF8"/>
-                    </a:solidFill>
-                  </a:tcPr>
-                </a:tc>
-              </a:tr>
-              <a:tr h="355282">
-                <a:tc>
-                  <a:txBody>
-                    <a:bodyPr wrap="square">
-                      <a:noAutofit/>
-                    </a:bodyPr>
-                    <a:lstStyle/>
-                    <a:p>
-                      <a:pPr algn="l">
-                        <a:lnSpc>
-                          <a:spcPts val="1897"/>
-                        </a:lnSpc>
-                        <a:buNone/>
-                        <a:defRPr sz="1650" b="0">
-                          <a:solidFill>
-                            <a:srgbClr val="303437"/>
-                          </a:solidFill>
-                          <a:latin typeface="Noto Sans"/>
-                        </a:defRPr>
-                      </a:pPr>
-                      <a:r>
-                        <a:rPr sz="1650" b="0" lang="ja-JP" altLang="en-US">
-                          <a:solidFill>
-                            <a:srgbClr val="303437"/>
-                          </a:solidFill>
-                          <a:latin typeface="Noto Sans"/>
-                          <a:ea typeface="Noto Sans CJK JP"/>
-                          <a:cs typeface="Noto Sans"/>
-                        </a:rPr>
-                        <a:t>CaseHOLD test</a:t>
-                      </a:r>
-                    </a:p>
-                  </a:txBody>
-                  <a:tcPr marL="63500" marR="63500" marT="38100" marB="38100" anchor="ctr">
-                    <a:lnL w="7620">
-                      <a:noFill/>
-                    </a:lnL>
-                    <a:lnR w="7620">
-                      <a:noFill/>
-                    </a:lnR>
-                    <a:lnT w="7620">
-                      <a:solidFill>
-                        <a:srgbClr val="626669"/>
-                      </a:solidFill>
-                      <a:prstDash val="solid"/>
-                    </a:lnT>
-                    <a:lnB w="7620">
-                      <a:noFill/>
-                    </a:lnB>
-                    <a:solidFill>
-                      <a:srgbClr val="FFFEF8"/>
-                    </a:solidFill>
-                  </a:tcPr>
-                </a:tc>
-                <a:tc>
-                  <a:txBody>
-                    <a:bodyPr wrap="square">
-                      <a:noAutofit/>
-                    </a:bodyPr>
-                    <a:lstStyle/>
-                    <a:p>
-                      <a:pPr algn="l">
-                        <a:lnSpc>
-                          <a:spcPts val="1897"/>
-                        </a:lnSpc>
-                        <a:buNone/>
-                        <a:defRPr sz="1650" b="0">
-                          <a:solidFill>
-                            <a:srgbClr val="303437"/>
-                          </a:solidFill>
-                          <a:latin typeface="Noto Sans"/>
-                        </a:defRPr>
-                      </a:pPr>
-                      <a:r>
-                        <a:rPr sz="1650" b="0" lang="ja-JP" altLang="en-US">
-                          <a:solidFill>
-                            <a:srgbClr val="303437"/>
-                          </a:solidFill>
-                          <a:latin typeface="Noto Sans"/>
-                          <a:ea typeface="Noto Sans CJK JP"/>
-                          <a:cs typeface="Noto Sans"/>
-                        </a:rPr>
-                        <a:t>3,900問</a:t>
-                      </a:r>
-                    </a:p>
-                  </a:txBody>
-                  <a:tcPr marL="63500" marR="63500" marT="38100" marB="38100" anchor="ctr">
-                    <a:lnL w="7620">
-                      <a:noFill/>
-                    </a:lnL>
-                    <a:lnR w="7620">
-                      <a:noFill/>
-                    </a:lnR>
-                    <a:lnT w="7620">
-                      <a:solidFill>
-                        <a:srgbClr val="626669"/>
-                      </a:solidFill>
-                      <a:prstDash val="solid"/>
-                    </a:lnT>
-                    <a:lnB w="7620">
-                      <a:noFill/>
-                    </a:lnB>
-                    <a:solidFill>
-                      <a:srgbClr val="FFFEF8"/>
-                    </a:solidFill>
-                  </a:tcPr>
-                </a:tc>
-                <a:tc>
-                  <a:txBody>
-                    <a:bodyPr wrap="square">
-                      <a:noAutofit/>
-                    </a:bodyPr>
-                    <a:lstStyle/>
-                    <a:p>
-                      <a:pPr algn="l">
-                        <a:lnSpc>
-                          <a:spcPts val="1897"/>
-                        </a:lnSpc>
-                        <a:buNone/>
-                        <a:defRPr sz="1650" b="0">
-                          <a:solidFill>
-                            <a:srgbClr val="303437"/>
-                          </a:solidFill>
-                          <a:latin typeface="Noto Sans"/>
-                        </a:defRPr>
-                      </a:pPr>
-                      <a:r>
-                        <a:rPr sz="1650" b="0" lang="ja-JP" altLang="en-US">
-                          <a:solidFill>
-                            <a:srgbClr val="303437"/>
-                          </a:solidFill>
-                          <a:latin typeface="Noto Sans"/>
-                          <a:ea typeface="Noto Sans CJK JP"/>
-                          <a:cs typeface="Noto Sans"/>
-                        </a:rPr>
-                        <a:t>3,600問</a:t>
-                      </a:r>
-                    </a:p>
-                  </a:txBody>
-                  <a:tcPr marL="63500" marR="63500" marT="38100" marB="38100" anchor="ctr">
-                    <a:lnL w="7620">
-                      <a:noFill/>
-                    </a:lnL>
-                    <a:lnR w="7620">
-                      <a:noFill/>
-                    </a:lnR>
-                    <a:lnT w="7620">
-                      <a:solidFill>
-                        <a:srgbClr val="626669"/>
-                      </a:solidFill>
-                      <a:prstDash val="solid"/>
-                    </a:lnT>
-                    <a:lnB w="7620">
-                      <a:noFill/>
-                    </a:lnB>
-                    <a:solidFill>
-                      <a:srgbClr val="FFFEF8"/>
-                    </a:solidFill>
-                  </a:tcPr>
-                </a:tc>
-              </a:tr>
-              <a:tr h="355282">
-                <a:tc>
-                  <a:txBody>
-                    <a:bodyPr wrap="square">
-                      <a:noAutofit/>
-                    </a:bodyPr>
-                    <a:lstStyle/>
-                    <a:p>
-                      <a:pPr algn="l">
-                        <a:lnSpc>
-                          <a:spcPts val="1897"/>
-                        </a:lnSpc>
-                        <a:buNone/>
-                        <a:defRPr sz="1650" b="0">
-                          <a:solidFill>
-                            <a:srgbClr val="303437"/>
-                          </a:solidFill>
-                          <a:latin typeface="Noto Sans"/>
-                        </a:defRPr>
-                      </a:pPr>
-                      <a:r>
-                        <a:rPr sz="1650" b="0" lang="ja-JP" altLang="en-US">
-                          <a:solidFill>
-                            <a:srgbClr val="303437"/>
-                          </a:solidFill>
-                          <a:latin typeface="Noto Sans"/>
-                          <a:ea typeface="Noto Sans CJK JP"/>
-                          <a:cs typeface="Noto Sans"/>
-                        </a:rPr>
-                        <a:t>SCOTUSのラベル</a:t>
-                      </a:r>
-                    </a:p>
-                  </a:txBody>
-                  <a:tcPr marL="63500" marR="63500" marT="38100" marB="38100" anchor="ctr">
-                    <a:lnL w="7620">
-                      <a:noFill/>
-                    </a:lnL>
-                    <a:lnR w="7620">
-                      <a:noFill/>
-                    </a:lnR>
-                    <a:lnT w="7620">
-                      <a:noFill/>
-                    </a:lnT>
-                    <a:lnB w="7620">
-                      <a:noFill/>
-                    </a:lnB>
-                    <a:solidFill>
-                      <a:srgbClr val="FFFEF8"/>
-                    </a:solidFill>
-                  </a:tcPr>
-                </a:tc>
-                <a:tc>
-                  <a:txBody>
-                    <a:bodyPr wrap="square">
-                      <a:noAutofit/>
-                    </a:bodyPr>
-                    <a:lstStyle/>
-                    <a:p>
-                      <a:pPr algn="l">
-                        <a:lnSpc>
-                          <a:spcPts val="1897"/>
-                        </a:lnSpc>
-                        <a:buNone/>
-                        <a:defRPr sz="1650" b="0">
-                          <a:solidFill>
-                            <a:srgbClr val="303437"/>
-                          </a:solidFill>
-                          <a:latin typeface="Noto Sans"/>
-                        </a:defRPr>
-                      </a:pPr>
-                      <a:r>
-                        <a:rPr sz="1650" b="0" lang="ja-JP" altLang="en-US">
-                          <a:solidFill>
-                            <a:srgbClr val="303437"/>
-                          </a:solidFill>
-                          <a:latin typeface="Noto Sans"/>
-                          <a:ea typeface="Noto Sans CJK JP"/>
-                          <a:cs typeface="Noto Sans"/>
-                        </a:rPr>
-                        <a:t>14分野</a:t>
-                      </a:r>
-                    </a:p>
-                  </a:txBody>
-                  <a:tcPr marL="63500" marR="63500" marT="38100" marB="38100" anchor="ctr">
-                    <a:lnL w="7620">
-                      <a:noFill/>
-                    </a:lnL>
-                    <a:lnR w="7620">
-                      <a:noFill/>
-                    </a:lnR>
-                    <a:lnT w="7620">
-                      <a:noFill/>
-                    </a:lnT>
-                    <a:lnB w="7620">
-                      <a:noFill/>
-                    </a:lnB>
-                    <a:solidFill>
-                      <a:srgbClr val="FFFEF8"/>
-                    </a:solidFill>
-                  </a:tcPr>
-                </a:tc>
-                <a:tc>
-                  <a:txBody>
-                    <a:bodyPr wrap="square">
-                      <a:noAutofit/>
-                    </a:bodyPr>
-                    <a:lstStyle/>
-                    <a:p>
-                      <a:pPr algn="l">
-                        <a:lnSpc>
-                          <a:spcPts val="1897"/>
-                        </a:lnSpc>
-                        <a:buNone/>
-                        <a:defRPr sz="1650" b="0">
-                          <a:solidFill>
-                            <a:srgbClr val="303437"/>
-                          </a:solidFill>
-                          <a:latin typeface="Noto Sans"/>
-                        </a:defRPr>
-                      </a:pPr>
-                      <a:r>
-                        <a:rPr sz="1650" b="0" lang="ja-JP" altLang="en-US">
-                          <a:solidFill>
-                            <a:srgbClr val="303437"/>
-                          </a:solidFill>
-                          <a:latin typeface="Noto Sans"/>
-                          <a:ea typeface="Noto Sans CJK JP"/>
-                          <a:cs typeface="Noto Sans"/>
-                        </a:rPr>
-                        <a:t>ClassLabel名1〜13</a:t>
-                      </a:r>
-                    </a:p>
-                  </a:txBody>
-                  <a:tcPr marL="63500" marR="63500" marT="38100" marB="38100" anchor="ctr">
-                    <a:lnL w="7620">
-                      <a:noFill/>
-                    </a:lnL>
-                    <a:lnR w="7620">
-                      <a:noFill/>
-                    </a:lnR>
-                    <a:lnT w="7620">
-                      <a:noFill/>
-                    </a:lnT>
-                    <a:lnB w="7620">
-                      <a:noFill/>
-                    </a:lnB>
-                    <a:solidFill>
-                      <a:srgbClr val="FFFEF8"/>
-                    </a:solidFill>
-                  </a:tcPr>
-                </a:tc>
-              </a:tr>
-              <a:tr h="355282">
-                <a:tc>
-                  <a:txBody>
-                    <a:bodyPr wrap="square">
-                      <a:noAutofit/>
-                    </a:bodyPr>
-                    <a:lstStyle/>
-                    <a:p>
-                      <a:pPr algn="l">
-                        <a:lnSpc>
-                          <a:spcPts val="1897"/>
-                        </a:lnSpc>
-                        <a:buNone/>
-                        <a:defRPr sz="1650" b="0">
-                          <a:solidFill>
-                            <a:srgbClr val="303437"/>
-                          </a:solidFill>
-                          <a:latin typeface="Noto Sans"/>
-                        </a:defRPr>
-                      </a:pPr>
-                      <a:r>
-                        <a:rPr sz="1650" b="0" lang="ja-JP" altLang="en-US">
-                          <a:solidFill>
-                            <a:srgbClr val="303437"/>
-                          </a:solidFill>
-                          <a:latin typeface="Noto Sans"/>
-                          <a:ea typeface="Noto Sans CJK JP"/>
-                          <a:cs typeface="Noto Sans"/>
-                        </a:rPr>
-                        <a:t>ECtHR A 空集合</a:t>
-                      </a:r>
-                    </a:p>
-                  </a:txBody>
-                  <a:tcPr marL="63500" marR="63500" marT="38100" marB="38100" anchor="ctr">
-                    <a:lnL w="7620">
-                      <a:noFill/>
-                    </a:lnL>
-                    <a:lnR w="7620">
-                      <a:noFill/>
-                    </a:lnR>
-                    <a:lnT w="7620">
-                      <a:noFill/>
-                    </a:lnT>
-                    <a:lnB w="7620">
-                      <a:noFill/>
-                    </a:lnB>
-                    <a:solidFill>
-                      <a:srgbClr val="FFFEF8"/>
-                    </a:solidFill>
-                  </a:tcPr>
-                </a:tc>
-                <a:tc>
-                  <a:txBody>
-                    <a:bodyPr wrap="square">
-                      <a:noAutofit/>
-                    </a:bodyPr>
-                    <a:lstStyle/>
-                    <a:p>
-                      <a:pPr algn="l">
-                        <a:lnSpc>
-                          <a:spcPts val="1897"/>
-                        </a:lnSpc>
-                        <a:buNone/>
-                        <a:defRPr sz="1650" b="0">
-                          <a:solidFill>
-                            <a:srgbClr val="303437"/>
-                          </a:solidFill>
-                          <a:latin typeface="Noto Sans"/>
-                        </a:defRPr>
-                      </a:pPr>
-                      <a:r>
-                        <a:rPr sz="1650" b="0" lang="ja-JP" altLang="en-US">
-                          <a:solidFill>
-                            <a:srgbClr val="303437"/>
-                          </a:solidFill>
-                          <a:latin typeface="Noto Sans"/>
-                          <a:ea typeface="Noto Sans CJK JP"/>
-                          <a:cs typeface="Noto Sans"/>
-                        </a:rPr>
-                        <a:t>11.5%（記載値）</a:t>
-                      </a:r>
-                    </a:p>
-                  </a:txBody>
-                  <a:tcPr marL="63500" marR="63500" marT="38100" marB="38100" anchor="ctr">
-                    <a:lnL w="7620">
-                      <a:noFill/>
-                    </a:lnL>
-                    <a:lnR w="7620">
-                      <a:noFill/>
-                    </a:lnR>
-                    <a:lnT w="7620">
-                      <a:noFill/>
-                    </a:lnT>
-                    <a:lnB w="7620">
-                      <a:noFill/>
-                    </a:lnB>
-                    <a:solidFill>
-                      <a:srgbClr val="FFFEF8"/>
-                    </a:solidFill>
-                  </a:tcPr>
-                </a:tc>
-                <a:tc>
-                  <a:txBody>
-                    <a:bodyPr wrap="square">
-                      <a:noAutofit/>
-                    </a:bodyPr>
-                    <a:lstStyle/>
-                    <a:p>
-                      <a:pPr algn="l">
-                        <a:lnSpc>
-                          <a:spcPts val="1897"/>
-                        </a:lnSpc>
-                        <a:buNone/>
-                        <a:defRPr sz="1650" b="0">
-                          <a:solidFill>
-                            <a:srgbClr val="303437"/>
-                          </a:solidFill>
-                          <a:latin typeface="Noto Sans"/>
-                        </a:defRPr>
-                      </a:pPr>
-                      <a:r>
-                        <a:rPr sz="1650" b="0" lang="ja-JP" altLang="en-US">
-                          <a:solidFill>
-                            <a:srgbClr val="303437"/>
-                          </a:solidFill>
-                          <a:latin typeface="Noto Sans"/>
-                          <a:ea typeface="Noto Sans CJK JP"/>
-                          <a:cs typeface="Noto Sans"/>
-                        </a:rPr>
-                        <a:t>153 / 1,000</a:t>
-                      </a:r>
-                    </a:p>
-                  </a:txBody>
-                  <a:tcPr marL="63500" marR="63500" marT="38100" marB="38100" anchor="ctr">
-                    <a:lnL w="7620">
-                      <a:noFill/>
-                    </a:lnL>
-                    <a:lnR w="7620">
-                      <a:noFill/>
-                    </a:lnR>
-                    <a:lnT w="7620">
-                      <a:noFill/>
-                    </a:lnT>
-                    <a:lnB w="7620">
-                      <a:noFill/>
-                    </a:lnB>
-                    <a:solidFill>
-                      <a:srgbClr val="FFFEF8"/>
-                    </a:solidFill>
-                  </a:tcPr>
-                </a:tc>
-              </a:tr>
-              <a:tr h="355282">
-                <a:tc>
-                  <a:txBody>
-                    <a:bodyPr wrap="square">
-                      <a:noAutofit/>
-                    </a:bodyPr>
-                    <a:lstStyle/>
-                    <a:p>
-                      <a:pPr algn="l">
-                        <a:lnSpc>
-                          <a:spcPts val="1897"/>
-                        </a:lnSpc>
-                        <a:buNone/>
-                        <a:defRPr sz="1650" b="0">
-                          <a:solidFill>
-                            <a:srgbClr val="303437"/>
-                          </a:solidFill>
-                          <a:latin typeface="Noto Sans"/>
-                        </a:defRPr>
-                      </a:pPr>
-                      <a:r>
-                        <a:rPr sz="1650" b="0" lang="ja-JP" altLang="en-US">
-                          <a:solidFill>
-                            <a:srgbClr val="303437"/>
-                          </a:solidFill>
-                          <a:latin typeface="Noto Sans"/>
-                          <a:ea typeface="Noto Sans CJK JP"/>
-                          <a:cs typeface="Noto Sans"/>
-                        </a:rPr>
-                        <a:t>ECtHR B 空集合</a:t>
-                      </a:r>
-                    </a:p>
-                  </a:txBody>
-                  <a:tcPr marL="63500" marR="63500" marT="38100" marB="38100" anchor="ctr">
-                    <a:lnL w="7620">
-                      <a:noFill/>
-                    </a:lnL>
-                    <a:lnR w="7620">
-                      <a:noFill/>
-                    </a:lnR>
-                    <a:lnT w="7620">
-                      <a:noFill/>
-                    </a:lnT>
-                    <a:lnB w="7620">
-                      <a:noFill/>
-                    </a:lnB>
-                    <a:solidFill>
-                      <a:srgbClr val="FFFEF8"/>
-                    </a:solidFill>
-                  </a:tcPr>
-                </a:tc>
-                <a:tc>
-                  <a:txBody>
-                    <a:bodyPr wrap="square">
-                      <a:noAutofit/>
-                    </a:bodyPr>
-                    <a:lstStyle/>
-                    <a:p>
-                      <a:pPr algn="l">
-                        <a:lnSpc>
-                          <a:spcPts val="1897"/>
-                        </a:lnSpc>
-                        <a:buNone/>
-                        <a:defRPr sz="1650" b="0">
-                          <a:solidFill>
-                            <a:srgbClr val="303437"/>
-                          </a:solidFill>
-                          <a:latin typeface="Noto Sans"/>
-                        </a:defRPr>
-                      </a:pPr>
-                      <a:r>
-                        <a:rPr sz="1650" b="0" lang="ja-JP" altLang="en-US">
-                          <a:solidFill>
-                            <a:srgbClr val="303437"/>
-                          </a:solidFill>
-                          <a:latin typeface="Noto Sans"/>
-                          <a:ea typeface="Noto Sans CJK JP"/>
-                          <a:cs typeface="Noto Sans"/>
-                        </a:rPr>
-                        <a:t>1.6%（記載値）</a:t>
-                      </a:r>
-                    </a:p>
-                  </a:txBody>
-                  <a:tcPr marL="63500" marR="63500" marT="38100" marB="38100" anchor="ctr">
-                    <a:lnL w="7620">
-                      <a:noFill/>
-                    </a:lnL>
-                    <a:lnR w="7620">
-                      <a:noFill/>
-                    </a:lnR>
-                    <a:lnT w="7620">
-                      <a:noFill/>
-                    </a:lnT>
-                    <a:lnB w="7620">
-                      <a:noFill/>
-                    </a:lnB>
-                    <a:solidFill>
-                      <a:srgbClr val="FFFEF8"/>
-                    </a:solidFill>
-                  </a:tcPr>
-                </a:tc>
-                <a:tc>
-                  <a:txBody>
-                    <a:bodyPr wrap="square">
-                      <a:noAutofit/>
-                    </a:bodyPr>
-                    <a:lstStyle/>
-                    <a:p>
-                      <a:pPr algn="l">
-                        <a:lnSpc>
-                          <a:spcPts val="1897"/>
-                        </a:lnSpc>
-                        <a:buNone/>
-                        <a:defRPr sz="1650" b="0">
-                          <a:solidFill>
-                            <a:srgbClr val="303437"/>
-                          </a:solidFill>
-                          <a:latin typeface="Noto Sans"/>
-                        </a:defRPr>
-                      </a:pPr>
-                      <a:r>
-                        <a:rPr sz="1650" b="0" lang="ja-JP" altLang="en-US">
-                          <a:solidFill>
-                            <a:srgbClr val="303437"/>
-                          </a:solidFill>
-                          <a:latin typeface="Noto Sans"/>
-                          <a:ea typeface="Noto Sans CJK JP"/>
-                          <a:cs typeface="Noto Sans"/>
-                        </a:rPr>
-                        <a:t>14 / 1,000</a:t>
-                      </a:r>
-                    </a:p>
-                  </a:txBody>
-                  <a:tcPr marL="63500" marR="63500" marT="38100" marB="38100" anchor="ctr">
-                    <a:lnL w="7620">
-                      <a:noFill/>
-                    </a:lnL>
-                    <a:lnR w="7620">
-                      <a:noFill/>
-                    </a:lnR>
-                    <a:lnT w="7620">
-                      <a:noFill/>
-                    </a:lnT>
-                    <a:lnB w="7620">
-                      <a:noFill/>
-                    </a:lnB>
-                    <a:solidFill>
-                      <a:srgbClr val="FFFEF8"/>
-                    </a:solidFill>
-                  </a:tcPr>
-                </a:tc>
-              </a:tr>
-              <a:tr h="355282">
-                <a:tc>
-                  <a:txBody>
-                    <a:bodyPr wrap="square">
-                      <a:noAutofit/>
-                    </a:bodyPr>
-                    <a:lstStyle/>
-                    <a:p>
-                      <a:pPr algn="l">
-                        <a:lnSpc>
-                          <a:spcPts val="1897"/>
-                        </a:lnSpc>
-                        <a:buNone/>
-                        <a:defRPr sz="1650" b="0">
-                          <a:solidFill>
-                            <a:srgbClr val="303437"/>
-                          </a:solidFill>
-                          <a:latin typeface="Noto Sans"/>
-                        </a:defRPr>
-                      </a:pPr>
-                      <a:r>
-                        <a:rPr sz="1650" b="0" lang="ja-JP" altLang="en-US">
-                          <a:solidFill>
-                            <a:srgbClr val="303437"/>
-                          </a:solidFill>
-                          <a:latin typeface="Noto Sans"/>
-                          <a:ea typeface="Noto Sans CJK JP"/>
-                          <a:cs typeface="Noto Sans"/>
-                        </a:rPr>
-                        <a:t>UNFAIR-ToS 空集合</a:t>
-                      </a:r>
-                    </a:p>
-                  </a:txBody>
-                  <a:tcPr marL="63500" marR="63500" marT="38100" marB="38100" anchor="ctr">
-                    <a:lnL w="7620">
-                      <a:noFill/>
-                    </a:lnL>
-                    <a:lnR w="7620">
-                      <a:noFill/>
-                    </a:lnR>
-                    <a:lnT w="7620">
-                      <a:noFill/>
-                    </a:lnT>
-                    <a:lnB w="15240">
-                      <a:solidFill>
-                        <a:srgbClr val="626669"/>
-                      </a:solidFill>
-                      <a:prstDash val="solid"/>
-                    </a:lnB>
-                    <a:solidFill>
-                      <a:srgbClr val="FFFEF8"/>
-                    </a:solidFill>
-                  </a:tcPr>
-                </a:tc>
-                <a:tc>
-                  <a:txBody>
-                    <a:bodyPr wrap="square">
-                      <a:noAutofit/>
-                    </a:bodyPr>
-                    <a:lstStyle/>
-                    <a:p>
-                      <a:pPr algn="l">
-                        <a:lnSpc>
-                          <a:spcPts val="1897"/>
-                        </a:lnSpc>
-                        <a:buNone/>
-                        <a:defRPr sz="1650" b="0">
-                          <a:solidFill>
-                            <a:srgbClr val="303437"/>
-                          </a:solidFill>
-                          <a:latin typeface="Noto Sans"/>
-                        </a:defRPr>
-                      </a:pPr>
-                      <a:r>
-                        <a:rPr sz="1650" b="0" lang="ja-JP" altLang="en-US">
-                          <a:solidFill>
-                            <a:srgbClr val="303437"/>
-                          </a:solidFill>
-                          <a:latin typeface="Noto Sans"/>
-                          <a:ea typeface="Noto Sans CJK JP"/>
-                          <a:cs typeface="Noto Sans"/>
-                        </a:rPr>
-                        <a:t>95.5%（記載値）</a:t>
-                      </a:r>
-                    </a:p>
-                  </a:txBody>
-                  <a:tcPr marL="63500" marR="63500" marT="38100" marB="38100" anchor="ctr">
-                    <a:lnL w="7620">
-                      <a:noFill/>
-                    </a:lnL>
-                    <a:lnR w="7620">
-                      <a:noFill/>
-                    </a:lnR>
-                    <a:lnT w="7620">
-                      <a:noFill/>
-                    </a:lnT>
-                    <a:lnB w="15240">
-                      <a:solidFill>
-                        <a:srgbClr val="626669"/>
-                      </a:solidFill>
-                      <a:prstDash val="solid"/>
-                    </a:lnB>
-                    <a:solidFill>
-                      <a:srgbClr val="FFFEF8"/>
-                    </a:solidFill>
-                  </a:tcPr>
-                </a:tc>
-                <a:tc>
-                  <a:txBody>
-                    <a:bodyPr wrap="square">
-                      <a:noAutofit/>
-                    </a:bodyPr>
-                    <a:lstStyle/>
-                    <a:p>
-                      <a:pPr algn="l">
-                        <a:lnSpc>
-                          <a:spcPts val="1897"/>
-                        </a:lnSpc>
-                        <a:buNone/>
-                        <a:defRPr sz="1650" b="0">
-                          <a:solidFill>
-                            <a:srgbClr val="303437"/>
-                          </a:solidFill>
-                          <a:latin typeface="Noto Sans"/>
-                        </a:defRPr>
-                      </a:pPr>
-                      <a:r>
-                        <a:rPr sz="1650" b="0" lang="ja-JP" altLang="en-US">
-                          <a:solidFill>
-                            <a:srgbClr val="303437"/>
-                          </a:solidFill>
-                          <a:latin typeface="Noto Sans"/>
-                          <a:ea typeface="Noto Sans CJK JP"/>
-                          <a:cs typeface="Noto Sans"/>
-                        </a:rPr>
-                        <a:t>1,435 / 1,607</a:t>
-                      </a:r>
-                    </a:p>
-                  </a:txBody>
-                  <a:tcPr marL="63500" marR="63500" marT="38100" marB="38100" anchor="ctr">
-                    <a:lnL w="7620">
-                      <a:noFill/>
-                    </a:lnL>
-                    <a:lnR w="7620">
-                      <a:noFill/>
-                    </a:lnR>
-                    <a:lnT w="7620">
-                      <a:noFill/>
-                    </a:lnT>
-                    <a:lnB w="15240">
-                      <a:solidFill>
-                        <a:srgbClr val="626669"/>
-                      </a:solidFill>
-                      <a:prstDash val="solid"/>
-                    </a:lnB>
-                    <a:solidFill>
-                      <a:srgbClr val="FFFEF8"/>
-                    </a:solidFill>
-                  </a:tcPr>
-                </a:tc>
-              </a:tr>
-            </a:tbl>
-          </a:graphicData>
-        </a:graphic>
-      </p:graphicFrame>
-      <p:sp>
-        <p:nvSpPr>
-          <p:cNvPr id="5" name="TextBox 4"/>
-          <p:cNvSpPr txBox="1"/>
-          <p:nvPr/>
-        </p:nvSpPr>
-        <p:spPr>
-          <a:xfrm>
-            <a:off x="594360" y="3731895"/>
-            <a:ext cx="7955279" cy="658368"/>
-          </a:xfrm>
-          <a:prstGeom prst="rect">
-            <a:avLst/>
-          </a:prstGeom>
-          <a:noFill/>
-        </p:spPr>
-        <p:txBody>
-          <a:bodyPr wrap="square" lIns="0" rIns="0" tIns="0" bIns="0">
-            <a:noAutofit/>
-          </a:bodyPr>
-          <a:lstStyle/>
-          <a:p>
-            <a:pPr algn="l">
-              <a:lnSpc>
-                <a:spcPts val="1568"/>
-              </a:lnSpc>
-              <a:spcBef>
-                <a:spcPts val="0"/>
-              </a:spcBef>
-              <a:spcAft>
-                <a:spcPts val="0"/>
-              </a:spcAft>
-              <a:buNone/>
-              <a:defRPr sz="1400" b="0">
-                <a:solidFill>
-                  <a:srgbClr val="303437"/>
-                </a:solidFill>
-                <a:latin typeface="Noto Sans"/>
-              </a:defRPr>
-            </a:pPr>
-            <a:r>
-              <a:rPr sz="1400" b="0" lang="ja-JP" altLang="en-US">
-                <a:solidFill>
-                  <a:srgbClr val="303437"/>
-                </a:solidFill>
-                <a:latin typeface="Noto Sans"/>
-                <a:ea typeface="Noto Sans CJK JP"/>
-                <a:cs typeface="Noto Sans"/>
-              </a:rPr>
-              <a:t>固定配布の空集合はtest実測。論文の記載比率と区別する。差が生じた経緯は未確定。</a:t>
-            </a:r>
-          </a:p>
-        </p:txBody>
-      </p:sp>
-      <p:sp>
-        <p:nvSpPr>
-          <p:cNvPr id="6" name="sources"/>
-          <p:cNvSpPr txBox="1"/>
-          <p:nvPr/>
-        </p:nvSpPr>
-        <p:spPr>
-          <a:xfrm>
-            <a:off x="502920" y="4700016"/>
-            <a:ext cx="8183879" cy="530352"/>
-          </a:xfrm>
-          <a:prstGeom prst="rect">
-            <a:avLst/>
-          </a:prstGeom>
-          <a:noFill/>
-        </p:spPr>
-        <p:txBody>
-          <a:bodyPr wrap="square" lIns="0" rIns="0" tIns="0" bIns="0">
-            <a:noAutofit/>
-          </a:bodyPr>
-          <a:lstStyle/>
-          <a:p>
-            <a:pPr algn="l">
-              <a:lnSpc>
-                <a:spcPts val="940"/>
-              </a:lnSpc>
-              <a:spcBef>
-                <a:spcPts val="0"/>
-              </a:spcBef>
-              <a:spcAft>
-                <a:spcPts val="140"/>
-              </a:spcAft>
-              <a:buNone/>
-              <a:defRPr sz="810" b="0">
-                <a:solidFill>
-                  <a:srgbClr val="303437"/>
-                </a:solidFill>
-                <a:latin typeface="Noto Sans"/>
-              </a:defRPr>
-            </a:pPr>
-            <a:r>
-              <a:rPr sz="810" b="0" lang="ja-JP" altLang="en-US">
-                <a:solidFill>
-                  <a:srgbClr val="626669"/>
-                </a:solidFill>
-                <a:latin typeface="Noto Sans"/>
-                <a:ea typeface="Noto Sans CJK JP"/>
-                <a:cs typeface="Noto Sans"/>
-              </a:rPr>
-              <a:t>[1] Chalkidis et al. (2022). LexGLUE: A Benchmark Dataset for Legal Language Understanding in English. ACL.</a:t>
-            </a:r>
-            <a:r>
-              <a:rPr sz="810" b="0" lang="ja-JP" altLang="en-US">
-                <a:solidFill>
-                  <a:srgbClr val="626669"/>
-                </a:solidFill>
-                <a:latin typeface="Noto Sans"/>
-                <a:ea typeface="Noto Sans CJK JP"/>
-                <a:cs typeface="Noto Sans"/>
-              </a:rPr>
-              <a:t>  </a:t>
-            </a:r>
-            <a:r>
-              <a:rPr sz="810" b="0" lang="ja-JP" altLang="en-US">
-                <a:solidFill>
-                  <a:srgbClr val="626669"/>
-                </a:solidFill>
-                <a:latin typeface="Noto Sans"/>
-                <a:ea typeface="Noto Sans CJK JP"/>
-                <a:cs typeface="Noto Sans"/>
-                <a:hlinkClick r:id="rId3"/>
-              </a:rPr>
-              <a:t>https://aclanthology.org/2022.acl-long.297/</a:t>
-            </a:r>
-          </a:p>
-          <a:p>
-            <a:pPr>
-              <a:lnSpc>
-                <a:spcPts val="940"/>
-              </a:lnSpc>
-              <a:spcAft>
-                <a:spcPts val="140"/>
-              </a:spcAft>
-              <a:buNone/>
-              <a:defRPr sz="810" b="0">
-                <a:solidFill>
-                  <a:srgbClr val="303437"/>
-                </a:solidFill>
-                <a:latin typeface="Noto Sans"/>
-              </a:defRPr>
-            </a:pPr>
-            <a:r>
-              <a:rPr sz="810" b="0" lang="ja-JP" altLang="en-US">
-                <a:solidFill>
-                  <a:srgbClr val="626669"/>
-                </a:solidFill>
-                <a:latin typeface="Noto Sans"/>
-                <a:ea typeface="Noto Sans CJK JP"/>
-                <a:cs typeface="Noto Sans"/>
-              </a:rPr>
-              <a:t>[2] coastalcph/lex_glue. 固定revision c23fdff… / 元の裁判・法令・契約の作成者に帰属。</a:t>
-            </a:r>
-            <a:r>
-              <a:rPr sz="810" b="0" lang="ja-JP" altLang="en-US">
-                <a:solidFill>
-                  <a:srgbClr val="626669"/>
-                </a:solidFill>
-                <a:latin typeface="Noto Sans"/>
-                <a:ea typeface="Noto Sans CJK JP"/>
-                <a:cs typeface="Noto Sans"/>
-              </a:rPr>
-              <a:t>  </a:t>
+              <a:t>[1] Chalkidis et al. LexGLUE公開データ。</a:t>
             </a:r>
             <a:r>
               <a:rPr sz="810" b="0" lang="ja-JP" altLang="en-US">
@@ -30098,7 +25406,7 @@
                 <a:ea typeface="Noto Sans CJK JP"/>
                 <a:cs typeface="Noto Sans"/>
               </a:rPr>
-              <a:t>LexGLUEは、英語の法律文書を使う7つのデータセットを、共通の評価枠組みにまとめたベンチマーク。2022年のACLで発表された。</a:t>
+              <a:t>LexGLUEは、英語の法律文書を使う7つのデータセットを、共通の評価枠組みにまとめたベンチマーク。Ilias Chalkidisらが2021年に公開し、2022年のACLで発表した。</a:t>
             </a:r>
           </a:p>
           <a:p>
@@ -30260,7 +25568,7 @@
                 <a:ea typeface="Noto Sans CJK JP"/>
                 <a:cs typeface="Noto Sans"/>
               </a:rPr>
-              <a:t>[1] Chalkidis et al. (2022). LexGLUE: A Benchmark Dataset for Legal Language Understanding in English. ACL.</a:t>
+              <a:t>[1] Chalkidis et al. (2022). LexGLUE: A Benchmark Dataset for Legal Language Understanding in English. ACL.  </a:t>
             </a:r>
             <a:r>
               <a:rPr sz="810" b="0" lang="ja-JP" altLang="en-US">
@@ -30270,932 +25578,9 @@
                 <a:latin typeface="Noto Sans"/>
                 <a:ea typeface="Noto Sans CJK JP"/>
                 <a:cs typeface="Noto Sans"/>
-              </a:rPr>
-              <a:t>  </a:t>
-            </a:r>
-            <a:r>
-              <a:rPr sz="810" b="0" lang="ja-JP" altLang="en-US">
-                <a:solidFill>
-                  <a:srgbClr val="626669"/>
-                </a:solidFill>
-                <a:latin typeface="Noto Sans"/>
-                <a:ea typeface="Noto Sans CJK JP"/>
-                <a:cs typeface="Noto Sans"/>
                 <a:hlinkClick r:id="rId2"/>
               </a:rPr>
               <a:t>https://aclanthology.org/2022.acl-long.297/</a:t>
-            </a:r>
-          </a:p>
-        </p:txBody>
-      </p:sp>
-    </p:spTree>
-  </p:cSld>
-  <p:clrMapOvr>
-    <a:masterClrMapping/>
-  </p:clrMapOvr>
-</p:sld>
-</file>
-
-<file path=ppt/slides/slide50.xml><?xml version="1.0" encoding="utf-8"?>
-<p:sld xmlns:a="http://schemas.openxmlformats.org/drawingml/2006/main" xmlns:p="http://schemas.openxmlformats.org/presentationml/2006/main" xmlns:r="http://schemas.openxmlformats.org/officeDocument/2006/relationships">
-  <p:cSld>
-    <p:spTree>
-      <p:nvGrpSpPr>
-        <p:cNvPr id="1" name=""/>
-        <p:cNvGrpSpPr/>
-        <p:nvPr/>
-      </p:nvGrpSpPr>
-      <p:grpSpPr/>
-      <p:sp>
-        <p:nvSpPr>
-          <p:cNvPr id="2" name="Title 1"/>
-          <p:cNvSpPr>
-            <a:spLocks noGrp="1"/>
-          </p:cNvSpPr>
-          <p:nvPr>
-            <p:ph type="title"/>
-          </p:nvPr>
-        </p:nvSpPr>
-        <p:spPr>
-          <a:xfrm>
-            <a:off x="468172" y="650138"/>
-            <a:ext cx="8206740" cy="616305"/>
-          </a:xfrm>
-        </p:spPr>
-        <p:txBody>
-          <a:bodyPr wrap="square" lIns="0" rIns="0" tIns="0" bIns="0">
-            <a:noAutofit/>
-          </a:bodyPr>
-          <a:lstStyle/>
-          <a:p>
-            <a:pPr algn="l">
-              <a:lnSpc>
-                <a:spcPct val="110000"/>
-              </a:lnSpc>
-              <a:buNone/>
-              <a:defRPr sz="2800" b="0">
-                <a:solidFill>
-                  <a:srgbClr val="303437"/>
-                </a:solidFill>
-                <a:latin typeface="Noto Sans"/>
-              </a:defRPr>
-            </a:pPr>
-            <a:r>
-              <a:rPr sz="2800" b="1" lang="ja-JP" altLang="en-US">
-                <a:solidFill>
-                  <a:srgbClr val="303437"/>
-                </a:solidFill>
-                <a:latin typeface="Noto Sans"/>
-                <a:ea typeface="Noto Sans CJK JP"/>
-                <a:cs typeface="Noto Sans"/>
-              </a:rPr>
-              <a:t>HELMは不正解の参照を最大30件に絞る</a:t>
-            </a:r>
-          </a:p>
-        </p:txBody>
-      </p:sp>
-      <p:sp>
-        <p:nvSpPr>
-          <p:cNvPr id="3" name="Text Placeholder 2"/>
-          <p:cNvSpPr>
-            <a:spLocks noGrp="1"/>
-          </p:cNvSpPr>
-          <p:nvPr>
-            <p:ph type="body" idx="1"/>
-          </p:nvPr>
-        </p:nvSpPr>
-        <p:spPr>
-          <a:xfrm>
-            <a:off x="594360" y="1463040"/>
-            <a:ext cx="7955279" cy="3044952"/>
-          </a:xfrm>
-        </p:spPr>
-        <p:txBody>
-          <a:bodyPr wrap="square" tIns="91440" bIns="91440">
-            <a:noAutofit/>
-          </a:bodyPr>
-          <a:lstStyle/>
-          <a:p>
-            <a:pPr marL="457200" indent="-355600">
-              <a:lnSpc>
-                <a:spcPts val="2320"/>
-              </a:lnSpc>
-              <a:spcAft>
-                <a:spcPts val="700"/>
-              </a:spcAft>
-              <a:buSzPct val="68205"/>
-              <a:buFont typeface="Noto Sans CJK JP"/>
-              <a:buChar char="●"/>
-              <a:defRPr sz="1950" b="0">
-                <a:solidFill>
-                  <a:srgbClr val="303437"/>
-                </a:solidFill>
-                <a:latin typeface="Noto Sans"/>
-              </a:defRPr>
-            </a:pPr>
-            <a:r>
-              <a:rPr sz="1950" b="0" lang="ja-JP" altLang="en-US">
-                <a:solidFill>
-                  <a:srgbClr val="303437"/>
-                </a:solidFill>
-                <a:latin typeface="Noto Sans"/>
-                <a:ea typeface="Noto Sans CJK JP"/>
-                <a:cs typeface="Noto Sans"/>
-              </a:rPr>
-              <a:t>単一・複数ラベル分類では、全クラスから正解を除いて不正解の参照を作り、seed42の乱数で順序を変える。</a:t>
-            </a:r>
-          </a:p>
-          <a:p>
-            <a:pPr marL="457200" indent="-355600">
-              <a:lnSpc>
-                <a:spcPts val="2320"/>
-              </a:lnSpc>
-              <a:spcAft>
-                <a:spcPts val="700"/>
-              </a:spcAft>
-              <a:buSzPct val="68205"/>
-              <a:buFont typeface="Noto Sans CJK JP"/>
-              <a:buChar char="●"/>
-              <a:defRPr sz="1950" b="0">
-                <a:solidFill>
-                  <a:srgbClr val="303437"/>
-                </a:solidFill>
-                <a:latin typeface="Noto Sans"/>
-              </a:defRPr>
-            </a:pPr>
-            <a:r>
-              <a:rPr sz="1950" b="0" lang="ja-JP" altLang="en-US">
-                <a:solidFill>
-                  <a:srgbClr val="303437"/>
-                </a:solidFill>
-                <a:latin typeface="Noto Sans"/>
-                <a:ea typeface="Noto Sans CJK JP"/>
-                <a:cs typeface="Noto Sans"/>
-              </a:rPr>
-              <a:t>不正解が30件を超えると、先頭30件だけを保持する。LEDGARやEUR-LEXでは、全100クラスを参照として毎回並べる実装ではない。</a:t>
-            </a:r>
-          </a:p>
-          <a:p>
-            <a:pPr marL="457200" indent="-355600">
-              <a:lnSpc>
-                <a:spcPts val="2320"/>
-              </a:lnSpc>
-              <a:spcAft>
-                <a:spcPts val="0"/>
-              </a:spcAft>
-              <a:buSzPct val="68205"/>
-              <a:buFont typeface="Noto Sans CJK JP"/>
-              <a:buChar char="●"/>
-              <a:defRPr sz="1950" b="0">
-                <a:solidFill>
-                  <a:srgbClr val="303437"/>
-                </a:solidFill>
-                <a:latin typeface="Noto Sans"/>
-              </a:defRPr>
-            </a:pPr>
-            <a:r>
-              <a:rPr sz="1950" b="0" lang="ja-JP" altLang="en-US">
-                <a:solidFill>
-                  <a:srgbClr val="303437"/>
-                </a:solidFill>
-                <a:latin typeface="Noto Sans"/>
-                <a:ea typeface="Noto Sans CJK JP"/>
-                <a:cs typeface="Noto Sans"/>
-              </a:rPr>
-              <a:t>入力本文はECtHRの段落列を空白で連結し、CaseHOLDはcontextと番号付きの5候補を連結する。</a:t>
-            </a:r>
-          </a:p>
-        </p:txBody>
-      </p:sp>
-      <p:sp>
-        <p:nvSpPr>
-          <p:cNvPr id="4" name="Title 3"/>
-          <p:cNvSpPr>
-            <a:spLocks noGrp="1"/>
-          </p:cNvSpPr>
-          <p:nvPr>
-            <p:ph type="title" idx="2"/>
-          </p:nvPr>
-        </p:nvSpPr>
-        <p:spPr>
-          <a:xfrm>
-            <a:off x="75895" y="0"/>
-            <a:ext cx="8115300" cy="480060"/>
-          </a:xfrm>
-        </p:spPr>
-        <p:txBody>
-          <a:bodyPr wrap="square" lIns="0" rIns="0" tIns="0" bIns="0" anchor="ctr">
-            <a:noAutofit/>
-          </a:bodyPr>
-          <a:lstStyle/>
-          <a:p>
-            <a:pPr algn="l">
-              <a:lnSpc>
-                <a:spcPct val="110000"/>
-              </a:lnSpc>
-              <a:buNone/>
-              <a:defRPr sz="1400" b="0">
-                <a:solidFill>
-                  <a:srgbClr val="303437"/>
-                </a:solidFill>
-                <a:latin typeface="Noto Sans"/>
-              </a:defRPr>
-            </a:pPr>
-            <a:r>
-              <a:rPr sz="1400" b="1" lang="ja-JP" altLang="en-US">
-                <a:solidFill>
-                  <a:srgbClr val="FFFEF8"/>
-                </a:solidFill>
-                <a:latin typeface="Noto Sans"/>
-                <a:ea typeface="Noto Sans CJK JP"/>
-                <a:cs typeface="Noto Sans"/>
-              </a:rPr>
-              <a:t>Appendix: 2. 配布・実装の詳しい条件</a:t>
-            </a:r>
-          </a:p>
-        </p:txBody>
-      </p:sp>
-      <p:sp>
-        <p:nvSpPr>
-          <p:cNvPr id="5" name="sources"/>
-          <p:cNvSpPr txBox="1"/>
-          <p:nvPr/>
-        </p:nvSpPr>
-        <p:spPr>
-          <a:xfrm>
-            <a:off x="502920" y="4700016"/>
-            <a:ext cx="8183879" cy="530352"/>
-          </a:xfrm>
-          <a:prstGeom prst="rect">
-            <a:avLst/>
-          </a:prstGeom>
-          <a:noFill/>
-        </p:spPr>
-        <p:txBody>
-          <a:bodyPr wrap="square" lIns="0" rIns="0" tIns="0" bIns="0">
-            <a:noAutofit/>
-          </a:bodyPr>
-          <a:lstStyle/>
-          <a:p>
-            <a:pPr algn="l">
-              <a:lnSpc>
-                <a:spcPts val="940"/>
-              </a:lnSpc>
-              <a:spcBef>
-                <a:spcPts val="0"/>
-              </a:spcBef>
-              <a:spcAft>
-                <a:spcPts val="140"/>
-              </a:spcAft>
-              <a:buNone/>
-              <a:defRPr sz="810" b="0">
-                <a:solidFill>
-                  <a:srgbClr val="303437"/>
-                </a:solidFill>
-                <a:latin typeface="Noto Sans"/>
-              </a:defRPr>
-            </a:pPr>
-            <a:r>
-              <a:rPr sz="810" b="0" lang="ja-JP" altLang="en-US">
-                <a:solidFill>
-                  <a:srgbClr val="626669"/>
-                </a:solidFill>
-                <a:latin typeface="Noto Sans"/>
-                <a:ea typeface="Noto Sans CJK JP"/>
-                <a:cs typeface="Noto Sans"/>
-              </a:rPr>
-              <a:t>[1] Stanford CRFM. LexGLUEScenario, HELM v0.4.0.</a:t>
-            </a:r>
-            <a:r>
-              <a:rPr sz="810" b="0" lang="ja-JP" altLang="en-US">
-                <a:solidFill>
-                  <a:srgbClr val="626669"/>
-                </a:solidFill>
-                <a:latin typeface="Noto Sans"/>
-                <a:ea typeface="Noto Sans CJK JP"/>
-                <a:cs typeface="Noto Sans"/>
-              </a:rPr>
-              <a:t>  </a:t>
-            </a:r>
-            <a:r>
-              <a:rPr sz="810" b="0" lang="ja-JP" altLang="en-US">
-                <a:solidFill>
-                  <a:srgbClr val="626669"/>
-                </a:solidFill>
-                <a:latin typeface="Noto Sans"/>
-                <a:ea typeface="Noto Sans CJK JP"/>
-                <a:cs typeface="Noto Sans"/>
-                <a:hlinkClick r:id="rId2"/>
-              </a:rPr>
-              <a:t>https://github.com/stanford-crfm/helm/blob/v0.4.0/src/helm/benchmark/scenarios/lex_glue_scenario.py</a:t>
-            </a:r>
-          </a:p>
-        </p:txBody>
-      </p:sp>
-    </p:spTree>
-  </p:cSld>
-  <p:clrMapOvr>
-    <a:masterClrMapping/>
-  </p:clrMapOvr>
-</p:sld>
-</file>
-
-<file path=ppt/slides/slide51.xml><?xml version="1.0" encoding="utf-8"?>
-<p:sld xmlns:a="http://schemas.openxmlformats.org/drawingml/2006/main" xmlns:p="http://schemas.openxmlformats.org/presentationml/2006/main" xmlns:r="http://schemas.openxmlformats.org/officeDocument/2006/relationships">
-  <p:cSld>
-    <p:spTree>
-      <p:nvGrpSpPr>
-        <p:cNvPr id="1" name=""/>
-        <p:cNvGrpSpPr/>
-        <p:nvPr/>
-      </p:nvGrpSpPr>
-      <p:grpSpPr/>
-      <p:sp>
-        <p:nvSpPr>
-          <p:cNvPr id="2" name="Title 1"/>
-          <p:cNvSpPr>
-            <a:spLocks noGrp="1"/>
-          </p:cNvSpPr>
-          <p:nvPr>
-            <p:ph type="title"/>
-          </p:nvPr>
-        </p:nvSpPr>
-        <p:spPr>
-          <a:xfrm>
-            <a:off x="468172" y="650138"/>
-            <a:ext cx="8206740" cy="616305"/>
-          </a:xfrm>
-        </p:spPr>
-        <p:txBody>
-          <a:bodyPr wrap="square" lIns="0" rIns="0" tIns="0" bIns="0">
-            <a:noAutofit/>
-          </a:bodyPr>
-          <a:lstStyle/>
-          <a:p>
-            <a:pPr algn="l">
-              <a:lnSpc>
-                <a:spcPct val="110000"/>
-              </a:lnSpc>
-              <a:buNone/>
-              <a:defRPr sz="2800" b="0">
-                <a:solidFill>
-                  <a:srgbClr val="303437"/>
-                </a:solidFill>
-                <a:latin typeface="Noto Sans"/>
-              </a:defRPr>
-            </a:pPr>
-            <a:r>
-              <a:rPr sz="2800" b="1" lang="ja-JP" altLang="en-US">
-                <a:solidFill>
-                  <a:srgbClr val="303437"/>
-                </a:solidFill>
-                <a:latin typeface="Noto Sans"/>
-                <a:ea typeface="Noto Sans CJK JP"/>
-                <a:cs typeface="Noto Sans"/>
-              </a:rPr>
-              <a:t>参照を作る処理と、採点の登録を照合する</a:t>
-            </a:r>
-          </a:p>
-        </p:txBody>
-      </p:sp>
-      <p:sp>
-        <p:nvSpPr>
-          <p:cNvPr id="3" name="Text Placeholder 2"/>
-          <p:cNvSpPr>
-            <a:spLocks noGrp="1"/>
-          </p:cNvSpPr>
-          <p:nvPr>
-            <p:ph type="body" idx="1"/>
-          </p:nvPr>
-        </p:nvSpPr>
-        <p:spPr>
-          <a:xfrm>
-            <a:off x="594360" y="1463040"/>
-            <a:ext cx="7955279" cy="3044952"/>
-          </a:xfrm>
-        </p:spPr>
-        <p:txBody>
-          <a:bodyPr wrap="square" tIns="91440" bIns="91440">
-            <a:noAutofit/>
-          </a:bodyPr>
-          <a:lstStyle/>
-          <a:p>
-            <a:pPr marL="457200" indent="-355600">
-              <a:lnSpc>
-                <a:spcPts val="2261"/>
-              </a:lnSpc>
-              <a:spcAft>
-                <a:spcPts val="700"/>
-              </a:spcAft>
-              <a:buSzPct val="70000"/>
-              <a:buFont typeface="Noto Sans CJK JP"/>
-              <a:buChar char="●"/>
-              <a:defRPr sz="1900" b="0">
-                <a:solidFill>
-                  <a:srgbClr val="303437"/>
-                </a:solidFill>
-                <a:latin typeface="Noto Sans"/>
-              </a:defRPr>
-            </a:pPr>
-            <a:r>
-              <a:rPr sz="1900" b="0" lang="ja-JP" altLang="en-US">
-                <a:solidFill>
-                  <a:srgbClr val="303437"/>
-                </a:solidFill>
-                <a:latin typeface="Noto Sans"/>
-                <a:ea typeface="Noto Sans CJK JP"/>
-                <a:cs typeface="Noto Sans"/>
-              </a:rPr>
-              <a:t>複数ラベル分類はカンマと空白を区切りとして分類指標を登録し、単一ラベル分類も分類指標を登録する。</a:t>
-            </a:r>
-          </a:p>
-          <a:p>
-            <a:pPr marL="457200" indent="-355600">
-              <a:lnSpc>
-                <a:spcPts val="2261"/>
-              </a:lnSpc>
-              <a:spcAft>
-                <a:spcPts val="700"/>
-              </a:spcAft>
-              <a:buSzPct val="70000"/>
-              <a:buFont typeface="Noto Sans CJK JP"/>
-              <a:buChar char="●"/>
-              <a:defRPr sz="1900" b="0">
-                <a:solidFill>
-                  <a:srgbClr val="303437"/>
-                </a:solidFill>
-                <a:latin typeface="Noto Sans"/>
-              </a:defRPr>
-            </a:pPr>
-            <a:r>
-              <a:rPr sz="1900" b="0" lang="ja-JP" altLang="en-US">
-                <a:solidFill>
-                  <a:srgbClr val="303437"/>
-                </a:solidFill>
-                <a:latin typeface="Noto Sans"/>
-                <a:ea typeface="Noto Sans CJK JP"/>
-                <a:cs typeface="Noto Sans"/>
-              </a:rPr>
-              <a:t>CaseHOLDのタスク型はQAで、同じ関数の分類指標を追加する分岐には入らない。schemaの主指標名だけから、7課題すべての採点結果があると解釈しない。</a:t>
-            </a:r>
-          </a:p>
-          <a:p>
-            <a:pPr marL="457200" indent="-355600">
-              <a:lnSpc>
-                <a:spcPts val="2261"/>
-              </a:lnSpc>
-              <a:spcAft>
-                <a:spcPts val="0"/>
-              </a:spcAft>
-              <a:buSzPct val="70000"/>
-              <a:buFont typeface="Noto Sans CJK JP"/>
-              <a:buChar char="●"/>
-              <a:defRPr sz="1900" b="0">
-                <a:solidFill>
-                  <a:srgbClr val="303437"/>
-                </a:solidFill>
-                <a:latin typeface="Noto Sans"/>
-              </a:defRPr>
-            </a:pPr>
-            <a:r>
-              <a:rPr sz="1900" b="0" lang="ja-JP" altLang="en-US">
-                <a:solidFill>
-                  <a:srgbClr val="303437"/>
-                </a:solidFill>
-                <a:latin typeface="Noto Sans"/>
-                <a:ea typeface="Noto Sans CJK JP"/>
-                <a:cs typeface="Noto Sans"/>
-              </a:rPr>
-              <a:t>UNFAIR-ToSのdocstring例には、終了を述べる文に変更ラベルを示す記述がある。参照ラベルは、説明例の文言ではなく配布レコードと生成処理で確かめた。</a:t>
-            </a:r>
-          </a:p>
-        </p:txBody>
-      </p:sp>
-      <p:sp>
-        <p:nvSpPr>
-          <p:cNvPr id="4" name="Title 3"/>
-          <p:cNvSpPr>
-            <a:spLocks noGrp="1"/>
-          </p:cNvSpPr>
-          <p:nvPr>
-            <p:ph type="title" idx="2"/>
-          </p:nvPr>
-        </p:nvSpPr>
-        <p:spPr>
-          <a:xfrm>
-            <a:off x="75895" y="0"/>
-            <a:ext cx="8115300" cy="480060"/>
-          </a:xfrm>
-        </p:spPr>
-        <p:txBody>
-          <a:bodyPr wrap="square" lIns="0" rIns="0" tIns="0" bIns="0" anchor="ctr">
-            <a:noAutofit/>
-          </a:bodyPr>
-          <a:lstStyle/>
-          <a:p>
-            <a:pPr algn="l">
-              <a:lnSpc>
-                <a:spcPct val="110000"/>
-              </a:lnSpc>
-              <a:buNone/>
-              <a:defRPr sz="1400" b="0">
-                <a:solidFill>
-                  <a:srgbClr val="303437"/>
-                </a:solidFill>
-                <a:latin typeface="Noto Sans"/>
-              </a:defRPr>
-            </a:pPr>
-            <a:r>
-              <a:rPr sz="1400" b="1" lang="ja-JP" altLang="en-US">
-                <a:solidFill>
-                  <a:srgbClr val="FFFEF8"/>
-                </a:solidFill>
-                <a:latin typeface="Noto Sans"/>
-                <a:ea typeface="Noto Sans CJK JP"/>
-                <a:cs typeface="Noto Sans"/>
-              </a:rPr>
-              <a:t>Appendix: 2. 配布・実装の詳しい条件</a:t>
-            </a:r>
-          </a:p>
-        </p:txBody>
-      </p:sp>
-      <p:sp>
-        <p:nvSpPr>
-          <p:cNvPr id="5" name="sources"/>
-          <p:cNvSpPr txBox="1"/>
-          <p:nvPr/>
-        </p:nvSpPr>
-        <p:spPr>
-          <a:xfrm>
-            <a:off x="502920" y="4700016"/>
-            <a:ext cx="8183879" cy="530352"/>
-          </a:xfrm>
-          <a:prstGeom prst="rect">
-            <a:avLst/>
-          </a:prstGeom>
-          <a:noFill/>
-        </p:spPr>
-        <p:txBody>
-          <a:bodyPr wrap="square" lIns="0" rIns="0" tIns="0" bIns="0">
-            <a:noAutofit/>
-          </a:bodyPr>
-          <a:lstStyle/>
-          <a:p>
-            <a:pPr algn="l">
-              <a:lnSpc>
-                <a:spcPts val="940"/>
-              </a:lnSpc>
-              <a:spcBef>
-                <a:spcPts val="0"/>
-              </a:spcBef>
-              <a:spcAft>
-                <a:spcPts val="140"/>
-              </a:spcAft>
-              <a:buNone/>
-              <a:defRPr sz="810" b="0">
-                <a:solidFill>
-                  <a:srgbClr val="303437"/>
-                </a:solidFill>
-                <a:latin typeface="Noto Sans"/>
-              </a:defRPr>
-            </a:pPr>
-            <a:r>
-              <a:rPr sz="810" b="0" lang="ja-JP" altLang="en-US">
-                <a:solidFill>
-                  <a:srgbClr val="626669"/>
-                </a:solidFill>
-                <a:latin typeface="Noto Sans"/>
-                <a:ea typeface="Noto Sans CJK JP"/>
-                <a:cs typeface="Noto Sans"/>
-              </a:rPr>
-              <a:t>[1] Stanford CRFM. get_lex_glue_spec, HELM v0.4.0.</a:t>
-            </a:r>
-            <a:r>
-              <a:rPr sz="810" b="0" lang="ja-JP" altLang="en-US">
-                <a:solidFill>
-                  <a:srgbClr val="626669"/>
-                </a:solidFill>
-                <a:latin typeface="Noto Sans"/>
-                <a:ea typeface="Noto Sans CJK JP"/>
-                <a:cs typeface="Noto Sans"/>
-              </a:rPr>
-              <a:t>  </a:t>
-            </a:r>
-            <a:r>
-              <a:rPr sz="810" b="0" lang="ja-JP" altLang="en-US">
-                <a:solidFill>
-                  <a:srgbClr val="626669"/>
-                </a:solidFill>
-                <a:latin typeface="Noto Sans"/>
-                <a:ea typeface="Noto Sans CJK JP"/>
-                <a:cs typeface="Noto Sans"/>
-                <a:hlinkClick r:id="rId2"/>
-              </a:rPr>
-              <a:t>https://github.com/stanford-crfm/helm/blob/v0.4.0/src/helm/benchmark/run_specs.py</a:t>
-            </a:r>
-          </a:p>
-        </p:txBody>
-      </p:sp>
-    </p:spTree>
-  </p:cSld>
-  <p:clrMapOvr>
-    <a:masterClrMapping/>
-  </p:clrMapOvr>
-</p:sld>
-</file>
-
-<file path=ppt/slides/slide52.xml><?xml version="1.0" encoding="utf-8"?>
-<p:sld xmlns:a="http://schemas.openxmlformats.org/drawingml/2006/main" xmlns:p="http://schemas.openxmlformats.org/presentationml/2006/main" xmlns:r="http://schemas.openxmlformats.org/officeDocument/2006/relationships">
-  <p:cSld>
-    <p:spTree>
-      <p:nvGrpSpPr>
-        <p:cNvPr id="1" name=""/>
-        <p:cNvGrpSpPr/>
-        <p:nvPr/>
-      </p:nvGrpSpPr>
-      <p:grpSpPr/>
-      <p:sp>
-        <p:nvSpPr>
-          <p:cNvPr id="2" name="Title 1"/>
-          <p:cNvSpPr>
-            <a:spLocks noGrp="1"/>
-          </p:cNvSpPr>
-          <p:nvPr>
-            <p:ph type="title"/>
-          </p:nvPr>
-        </p:nvSpPr>
-        <p:spPr>
-          <a:xfrm>
-            <a:off x="468172" y="650138"/>
-            <a:ext cx="8206740" cy="616305"/>
-          </a:xfrm>
-        </p:spPr>
-        <p:txBody>
-          <a:bodyPr wrap="square" lIns="0" rIns="0" tIns="0" bIns="0">
-            <a:noAutofit/>
-          </a:bodyPr>
-          <a:lstStyle/>
-          <a:p>
-            <a:pPr algn="l">
-              <a:lnSpc>
-                <a:spcPct val="110000"/>
-              </a:lnSpc>
-              <a:buNone/>
-              <a:defRPr sz="2800" b="0">
-                <a:solidFill>
-                  <a:srgbClr val="303437"/>
-                </a:solidFill>
-                <a:latin typeface="Noto Sans"/>
-              </a:defRPr>
-            </a:pPr>
-            <a:r>
-              <a:rPr sz="2800" b="1" lang="ja-JP" altLang="en-US">
-                <a:solidFill>
-                  <a:srgbClr val="303437"/>
-                </a:solidFill>
-                <a:latin typeface="Noto Sans"/>
-                <a:ea typeface="Noto Sans CJK JP"/>
-                <a:cs typeface="Noto Sans"/>
-              </a:rPr>
-              <a:t>長い入力を抜粋した範囲を明示する</a:t>
-            </a:r>
-          </a:p>
-        </p:txBody>
-      </p:sp>
-      <p:sp>
-        <p:nvSpPr>
-          <p:cNvPr id="3" name="Text Placeholder 2"/>
-          <p:cNvSpPr>
-            <a:spLocks noGrp="1"/>
-          </p:cNvSpPr>
-          <p:nvPr>
-            <p:ph type="body" idx="1"/>
-          </p:nvPr>
-        </p:nvSpPr>
-        <p:spPr>
-          <a:xfrm>
-            <a:off x="594360" y="1463040"/>
-            <a:ext cx="7955279" cy="3044952"/>
-          </a:xfrm>
-        </p:spPr>
-        <p:txBody>
-          <a:bodyPr wrap="square" tIns="91440" bIns="91440">
-            <a:noAutofit/>
-          </a:bodyPr>
-          <a:lstStyle/>
-          <a:p>
-            <a:pPr marL="457200" indent="-355600">
-              <a:lnSpc>
-                <a:spcPts val="2320"/>
-              </a:lnSpc>
-              <a:spcAft>
-                <a:spcPts val="700"/>
-              </a:spcAft>
-              <a:buSzPct val="68205"/>
-              <a:buFont typeface="Noto Sans CJK JP"/>
-              <a:buChar char="●"/>
-              <a:defRPr sz="1950" b="0">
-                <a:solidFill>
-                  <a:srgbClr val="303437"/>
-                </a:solidFill>
-                <a:latin typeface="Noto Sans"/>
-              </a:defRPr>
-            </a:pPr>
-            <a:r>
-              <a:rPr sz="1950" b="0" lang="ja-JP" altLang="en-US">
-                <a:solidFill>
-                  <a:srgbClr val="303437"/>
-                </a:solidFill>
-                <a:latin typeface="Noto Sans"/>
-                <a:ea typeface="Noto Sans CJK JP"/>
-                <a:cs typeface="Noto Sans"/>
-              </a:rPr>
-              <a:t>実例10はECtHR Bの事実列の先頭2段落、実例12はEU法令の冒頭からWhereas直前までを表示する。参照ラベルは元の全文に付く。</a:t>
-            </a:r>
-          </a:p>
-          <a:p>
-            <a:pPr marL="457200" indent="-355600">
-              <a:lnSpc>
-                <a:spcPts val="2320"/>
-              </a:lnSpc>
-              <a:spcAft>
-                <a:spcPts val="700"/>
-              </a:spcAft>
-              <a:buSzPct val="68205"/>
-              <a:buFont typeface="Noto Sans CJK JP"/>
-              <a:buChar char="●"/>
-              <a:defRPr sz="1950" b="0">
-                <a:solidFill>
-                  <a:srgbClr val="303437"/>
-                </a:solidFill>
-                <a:latin typeface="Noto Sans"/>
-              </a:defRPr>
-            </a:pPr>
-            <a:r>
-              <a:rPr sz="1950" b="0" lang="ja-JP" altLang="en-US">
-                <a:solidFill>
-                  <a:srgbClr val="303437"/>
-                </a:solidFill>
-                <a:latin typeface="Noto Sans"/>
-                <a:ea typeface="Noto Sans CJK JP"/>
-                <a:cs typeface="Noto Sans"/>
-              </a:rPr>
-              <a:t>実例13はCaseHOLD contextの末尾の連続範囲を示し、5つの候補はすべて全文を保持する。元のcontextと全候補は原記録に保存する。</a:t>
-            </a:r>
-          </a:p>
-          <a:p>
-            <a:pPr marL="457200" indent="-355600">
-              <a:lnSpc>
-                <a:spcPts val="2320"/>
-              </a:lnSpc>
-              <a:spcAft>
-                <a:spcPts val="0"/>
-              </a:spcAft>
-              <a:buSzPct val="68205"/>
-              <a:buFont typeface="Noto Sans CJK JP"/>
-              <a:buChar char="●"/>
-              <a:defRPr sz="1950" b="0">
-                <a:solidFill>
-                  <a:srgbClr val="303437"/>
-                </a:solidFill>
-                <a:latin typeface="Noto Sans"/>
-              </a:defRPr>
-            </a:pPr>
-            <a:r>
-              <a:rPr sz="1950" b="0" lang="ja-JP" altLang="en-US">
-                <a:solidFill>
-                  <a:srgbClr val="303437"/>
-                </a:solidFill>
-                <a:latin typeface="Noto Sans"/>
-                <a:ea typeface="Noto Sans CJK JP"/>
-                <a:cs typeface="Noto Sans"/>
-              </a:rPr>
-              <a:t>ほかの10例は入力全文を表示する。SCOTUSの空行は整理し、内容と順序は保った。</a:t>
-            </a:r>
-          </a:p>
-        </p:txBody>
-      </p:sp>
-      <p:sp>
-        <p:nvSpPr>
-          <p:cNvPr id="4" name="Title 3"/>
-          <p:cNvSpPr>
-            <a:spLocks noGrp="1"/>
-          </p:cNvSpPr>
-          <p:nvPr>
-            <p:ph type="title" idx="2"/>
-          </p:nvPr>
-        </p:nvSpPr>
-        <p:spPr>
-          <a:xfrm>
-            <a:off x="75895" y="0"/>
-            <a:ext cx="8115300" cy="480060"/>
-          </a:xfrm>
-        </p:spPr>
-        <p:txBody>
-          <a:bodyPr wrap="square" lIns="0" rIns="0" tIns="0" bIns="0" anchor="ctr">
-            <a:noAutofit/>
-          </a:bodyPr>
-          <a:lstStyle/>
-          <a:p>
-            <a:pPr algn="l">
-              <a:lnSpc>
-                <a:spcPct val="110000"/>
-              </a:lnSpc>
-              <a:buNone/>
-              <a:defRPr sz="1400" b="0">
-                <a:solidFill>
-                  <a:srgbClr val="303437"/>
-                </a:solidFill>
-                <a:latin typeface="Noto Sans"/>
-              </a:defRPr>
-            </a:pPr>
-            <a:r>
-              <a:rPr sz="1400" b="1" lang="ja-JP" altLang="en-US">
-                <a:solidFill>
-                  <a:srgbClr val="FFFEF8"/>
-                </a:solidFill>
-                <a:latin typeface="Noto Sans"/>
-                <a:ea typeface="Noto Sans CJK JP"/>
-                <a:cs typeface="Noto Sans"/>
-              </a:rPr>
-              <a:t>Appendix: 2. 配布・実装の詳しい条件</a:t>
-            </a:r>
-          </a:p>
-        </p:txBody>
-      </p:sp>
-      <p:sp>
-        <p:nvSpPr>
-          <p:cNvPr id="5" name="sources"/>
-          <p:cNvSpPr txBox="1"/>
-          <p:nvPr/>
-        </p:nvSpPr>
-        <p:spPr>
-          <a:xfrm>
-            <a:off x="502920" y="4700016"/>
-            <a:ext cx="8183879" cy="530352"/>
-          </a:xfrm>
-          <a:prstGeom prst="rect">
-            <a:avLst/>
-          </a:prstGeom>
-          <a:noFill/>
-        </p:spPr>
-        <p:txBody>
-          <a:bodyPr wrap="square" lIns="0" rIns="0" tIns="0" bIns="0">
-            <a:noAutofit/>
-          </a:bodyPr>
-          <a:lstStyle/>
-          <a:p>
-            <a:pPr algn="l">
-              <a:lnSpc>
-                <a:spcPts val="940"/>
-              </a:lnSpc>
-              <a:spcBef>
-                <a:spcPts val="0"/>
-              </a:spcBef>
-              <a:spcAft>
-                <a:spcPts val="140"/>
-              </a:spcAft>
-              <a:buNone/>
-              <a:defRPr sz="810" b="0">
-                <a:solidFill>
-                  <a:srgbClr val="303437"/>
-                </a:solidFill>
-                <a:latin typeface="Noto Sans"/>
-              </a:defRPr>
-            </a:pPr>
-            <a:r>
-              <a:rPr sz="810" b="0" lang="ja-JP" altLang="en-US">
-                <a:solidFill>
-                  <a:srgbClr val="626669"/>
-                </a:solidFill>
-                <a:latin typeface="Noto Sans"/>
-                <a:ea typeface="Noto Sans CJK JP"/>
-                <a:cs typeface="Noto Sans"/>
-              </a:rPr>
-              <a:t>[1] coastalcph/lex_glue. 固定revision c23fdff… / 元の裁判・法令・契約の作成者に帰属。</a:t>
-            </a:r>
-            <a:r>
-              <a:rPr sz="810" b="0" lang="ja-JP" altLang="en-US">
-                <a:solidFill>
-                  <a:srgbClr val="626669"/>
-                </a:solidFill>
-                <a:latin typeface="Noto Sans"/>
-                <a:ea typeface="Noto Sans CJK JP"/>
-                <a:cs typeface="Noto Sans"/>
-              </a:rPr>
-              <a:t>  </a:t>
-            </a:r>
-            <a:r>
-              <a:rPr sz="810" b="0" lang="ja-JP" altLang="en-US">
-                <a:solidFill>
-                  <a:srgbClr val="626669"/>
-                </a:solidFill>
-                <a:latin typeface="Noto Sans"/>
-                <a:ea typeface="Noto Sans CJK JP"/>
-                <a:cs typeface="Noto Sans"/>
-                <a:hlinkClick r:id="rId2"/>
-              </a:rPr>
-              <a:t>https://huggingface.co/datasets/coastalcph/lex_glue</a:t>
             </a:r>
           </a:p>
         </p:txBody>
@@ -31261,7 +25646,7 @@
                 <a:ea typeface="Noto Sans CJK JP"/>
                 <a:cs typeface="Noto Sans"/>
               </a:rPr>
-              <a:t>制作研究と参考文献</a:t>
+              <a:t>研究と参考文献</a:t>
             </a:r>
           </a:p>
         </p:txBody>
@@ -31309,7 +25694,7 @@
                 <a:ea typeface="Noto Sans CJK JP"/>
                 <a:cs typeface="Noto Sans"/>
               </a:rPr>
-              <a:t>Appendix: 3. 制作研究と参考文献</a:t>
+              <a:t>Appendix: 3. 研究と参考文献</a:t>
             </a:r>
           </a:p>
         </p:txBody>
@@ -31428,7 +25813,7 @@
                 <a:ea typeface="Noto Sans CJK JP"/>
                 <a:cs typeface="Noto Sans"/>
               </a:rPr>
-              <a:t>第一著者はIlias Chalkidis、最終著者はNikolaos Aletras。計7人の著者による研究として、ACL 2022で発表された。</a:t>
+              <a:t>Ilias Chalkidis、Abhik Janaら7人による研究で、2021年に初公開され、ACL 2022で発表された。</a:t>
             </a:r>
           </a:p>
           <a:p>
@@ -31536,7 +25921,7 @@
                 <a:ea typeface="Noto Sans CJK JP"/>
                 <a:cs typeface="Noto Sans"/>
               </a:rPr>
-              <a:t>Appendix: 3. 制作研究と参考文献</a:t>
+              <a:t>Appendix: 3. 研究と参考文献</a:t>
             </a:r>
           </a:p>
         </p:txBody>
@@ -31590,18 +25975,7 @@
                 <a:ea typeface="Noto Sans CJK JP"/>
                 <a:cs typeface="Noto Sans"/>
               </a:rPr>
-              <a:t>[1] Chalkidis et al. (2022). LexGLUE: A Benchmark Dataset for Legal Language Understanding in English. ACL.</a:t>
-            </a:r>
-            <a:r>
-              <a:rPr sz="810" b="0" lang="ja-JP" altLang="en-US">
-                <a:solidFill>
-                  <a:srgbClr val="626669"/>
-                </a:solidFill>
-                <a:latin typeface="Noto Sans"/>
-                <a:ea typeface="Noto Sans CJK JP"/>
-                <a:cs typeface="Noto Sans"/>
-              </a:rPr>
-              <a:t>  </a:t>
+              <a:t>[1] Chalkidis et al. (2022). LexGLUE: A Benchmark Dataset for Legal Language Understanding in English. ACL.  </a:t>
             </a:r>
             <a:r>
               <a:rPr sz="810" b="0" lang="ja-JP" altLang="en-US">
@@ -31727,7 +26101,7 @@
                 <a:ea typeface="Noto Sans CJK JP"/>
                 <a:cs typeface="Noto Sans"/>
               </a:rPr>
-              <a:t>Appendix: 3. 制作研究と参考文献</a:t>
+              <a:t>Appendix: 3. 研究と参考文献</a:t>
             </a:r>
           </a:p>
         </p:txBody>
@@ -32275,7 +26649,7 @@
                 <a:ea typeface="Noto Sans CJK JP"/>
                 <a:cs typeface="Noto Sans"/>
               </a:rPr>
-              <a:t>Appendix: 3. 制作研究と参考文献</a:t>
+              <a:t>Appendix: 3. 研究と参考文献</a:t>
             </a:r>
           </a:p>
         </p:txBody>
@@ -32823,7 +27197,7 @@
                 <a:ea typeface="Noto Sans CJK JP"/>
                 <a:cs typeface="Noto Sans"/>
               </a:rPr>
-              <a:t>Appendix: 3. 制作研究と参考文献</a:t>
+              <a:t>Appendix: 3. 研究と参考文献</a:t>
             </a:r>
           </a:p>
         </p:txBody>
@@ -32931,7 +27305,7 @@
                 <a:ea typeface="Noto Sans CJK JP"/>
                 <a:cs typeface="Noto Sans"/>
               </a:rPr>
-              <a:t>Ilias Chalkidis et al. · Hugging Face</a:t>
+              <a:t>Ilias Chalkidis et al. · n.d. · Hugging Face（2026-10-18参照）</a:t>
             </a:r>
           </a:p>
         </p:txBody>
@@ -33094,7 +27468,7 @@
                 <a:ea typeface="Noto Sans CJK JP"/>
                 <a:cs typeface="Noto Sans"/>
               </a:rPr>
-              <a:t>LexGLUEScenario / get_lex_glue_spec</a:t>
+              <a:t>LexGLUE official repository</a:t>
             </a:r>
           </a:p>
         </p:txBody>
@@ -33148,7 +27522,7 @@
                 <a:ea typeface="Noto Sans CJK JP"/>
                 <a:cs typeface="Noto Sans"/>
               </a:rPr>
-              <a:t>Stanford CRFM · HELM v0.4.0</a:t>
+              <a:t>Ilias Chalkidis et al. · n.d. · GitHub（2026-10-18参照）</a:t>
             </a:r>
           </a:p>
         </p:txBody>
@@ -33202,7 +27576,7 @@
                 <a:ea typeface="Noto Sans CJK JP"/>
                 <a:cs typeface="Noto Sans"/>
               </a:rPr>
-              <a:t>七つのsubsetの入力、参照、少数例提示と指標の登録を実装する。</a:t>
+              <a:t>7課題の構成、データ取得先、微調整と評価のコードを案内する。</a:t>
             </a:r>
           </a:p>
         </p:txBody>
@@ -33255,9 +27629,9 @@
                 <a:latin typeface="Noto Sans"/>
                 <a:ea typeface="Noto Sans CJK JP"/>
                 <a:cs typeface="Noto Sans"/>
-                <a:hlinkClick r:id="rId3"/>
-              </a:rPr>
-              <a:t>https://github.com/stanford-crfm/helm/blob/v0.4.0/src/helm/benchmark/scenarios/lex_glue_scenario.py</a:t>
+                <a:hlinkClick r:id="rId4"/>
+              </a:rPr>
+              <a:t>https://github.com/coastalcph/lex-glue</a:t>
             </a:r>
           </a:p>
         </p:txBody>
@@ -33715,18 +28089,7 @@
                 <a:ea typeface="Noto Sans CJK JP"/>
                 <a:cs typeface="Noto Sans"/>
               </a:rPr>
-              <a:t>[1] coastalcph/lex_glue. 固定revision c23fdff… / 元の裁判・法令・契約の作成者に帰属。 ledgar/test/52</a:t>
-            </a:r>
-            <a:r>
-              <a:rPr sz="810" b="0" lang="ja-JP" altLang="en-US">
-                <a:solidFill>
-                  <a:srgbClr val="626669"/>
-                </a:solidFill>
-                <a:latin typeface="Noto Sans"/>
-                <a:ea typeface="Noto Sans CJK JP"/>
-                <a:cs typeface="Noto Sans"/>
-              </a:rPr>
-              <a:t>  </a:t>
+              <a:t>[1] Chalkidis et al. LexGLUE公開データ。</a:t>
             </a:r>
             <a:r>
               <a:rPr sz="810" b="0" lang="ja-JP" altLang="en-US">
@@ -33989,18 +28352,7 @@
                 <a:ea typeface="Noto Sans CJK JP"/>
                 <a:cs typeface="Noto Sans"/>
               </a:rPr>
-              <a:t>[1] Chalkidis et al. (2022). LexGLUE: A Benchmark Dataset for Legal Language Understanding in English. ACL.</a:t>
-            </a:r>
-            <a:r>
-              <a:rPr sz="810" b="0" lang="ja-JP" altLang="en-US">
-                <a:solidFill>
-                  <a:srgbClr val="626669"/>
-                </a:solidFill>
-                <a:latin typeface="Noto Sans"/>
-                <a:ea typeface="Noto Sans CJK JP"/>
-                <a:cs typeface="Noto Sans"/>
-              </a:rPr>
-              <a:t>  </a:t>
+              <a:t>[1] Chalkidis et al. (2022). LexGLUE: A Benchmark Dataset for Legal Language Understanding in English. ACL.  </a:t>
             </a:r>
             <a:r>
               <a:rPr sz="810" b="0" lang="ja-JP" altLang="en-US">
@@ -34470,18 +28822,7 @@
                 <a:ea typeface="Noto Sans CJK JP"/>
                 <a:cs typeface="Noto Sans"/>
               </a:rPr>
-              <a:t>[1] coastalcph/lex_glue. 固定revision c23fdff… / 元の裁判・法令・契約の作成者に帰属。 unfair_tos/test/15</a:t>
-            </a:r>
-            <a:r>
-              <a:rPr sz="810" b="0" lang="ja-JP" altLang="en-US">
-                <a:solidFill>
-                  <a:srgbClr val="626669"/>
-                </a:solidFill>
-                <a:latin typeface="Noto Sans"/>
-                <a:ea typeface="Noto Sans CJK JP"/>
-                <a:cs typeface="Noto Sans"/>
-              </a:rPr>
-              <a:t>  </a:t>
+              <a:t>[1] Chalkidis et al. LexGLUE公開データ。</a:t>
             </a:r>
             <a:r>
               <a:rPr sz="810" b="0" lang="ja-JP" altLang="en-US">
@@ -34642,37 +28983,7 @@
                 <a:ea typeface="Noto Sans CJK JP"/>
                 <a:cs typeface="Noto Sans"/>
               </a:rPr>
-              <a:t>実例2の参照は一方的変更。どの種類にも当たらない文には、空のラベル集合が付く。</a:t>
-            </a:r>
-          </a:p>
-          <a:p>
-            <a:pPr marL="457200" indent="-355600">
-              <a:lnSpc>
-                <a:spcPts val="2379"/>
-              </a:lnSpc>
-              <a:spcAft>
-                <a:spcPts val="0"/>
-              </a:spcAft>
-              <a:buSzPct val="66500"/>
-              <a:buFont typeface="Noto Sans CJK JP"/>
-              <a:buChar char="●"/>
-              <a:defRPr sz="2000" b="0">
-                <a:solidFill>
-                  <a:srgbClr val="303437"/>
-                </a:solidFill>
-                <a:latin typeface="Noto Sans"/>
-              </a:defRPr>
-            </a:pPr>
-            <a:r>
-              <a:rPr sz="2000" b="0" lang="ja-JP" altLang="en-US">
-                <a:solidFill>
-                  <a:srgbClr val="303437"/>
-                </a:solidFill>
-                <a:latin typeface="Noto Sans"/>
-                <a:ea typeface="Noto Sans CJK JP"/>
-                <a:cs typeface="Noto Sans"/>
-              </a:rPr>
-              <a:t>これはデータセットの注釈を予測する課題であり、個別契約の法的効力を確定する判断とは区別される。</a:t>
+              <a:t>実例2には「一方的変更」のラベルが付く。どの種類にも当たらない文には、空のラベル集合が付く。</a:t>
             </a:r>
           </a:p>
         </p:txBody>
@@ -34774,18 +29085,7 @@
                 <a:ea typeface="Noto Sans CJK JP"/>
                 <a:cs typeface="Noto Sans"/>
               </a:rPr>
-              <a:t>[1] Chalkidis et al. (2022). LexGLUE: A Benchmark Dataset for Legal Language Understanding in English. ACL.</a:t>
-            </a:r>
-            <a:r>
-              <a:rPr sz="810" b="0" lang="ja-JP" altLang="en-US">
-                <a:solidFill>
-                  <a:srgbClr val="626669"/>
-                </a:solidFill>
-                <a:latin typeface="Noto Sans"/>
-                <a:ea typeface="Noto Sans CJK JP"/>
-                <a:cs typeface="Noto Sans"/>
-              </a:rPr>
-              <a:t>  </a:t>
+              <a:t>[1] Chalkidis et al. (2022). LexGLUE: A Benchmark Dataset for Legal Language Understanding in English. ACL.  </a:t>
             </a:r>
             <a:r>
               <a:rPr sz="810" b="0" lang="ja-JP" altLang="en-US">
